--- a/sql-as-software-getting-started-with-dbt.pptx
+++ b/sql-as-software-getting-started-with-dbt.pptx
@@ -4129,7 +4129,7 @@
           <a:p/>
           <a:p>
             <a:r>
-              <a:t>Demo 4. Switch to .venv-lakehouse and run dbt build --target lakehouse; the profile's lakehouse output points at LH_Jaffle_Shop (schema-enabled, schema jaffle_shop). Show the same model files. Run dbt build against the pre-seeded raw tables; show the generated relation name and query the Delta table in a notebook or the SQL endpoint: 6 new, 929 returning, total 671,425.37. Use a rehearsed recording if the session is not ready within 20 seconds. Be explicit that data was seeded separately and the SQL was designed to be compatible.</a:t>
+              <a:t>Demo 4. Switch to .venv-lakehouse and run dbt build --select customers --target lakehouse (measured 1 min 57 s). Do not run the full project live: every Spark statement costs ~20 s over Livy, so 48 nodes take 7.5 min even with 4 threads - run it before the talk and use that as the recording. The profile's lakehouse output points at LH_Jaffle_Shop (schema-enabled, schema jaffle_shop). Show the same model files, then the compiled customers.sql side by side with the Warehouse version: backticks vs brackets, coalesce(..., false) vs cast(... as bit), decimal vs numeric. Query the Delta table in a notebook or the SQL endpoint: 6 new, 929 returning, total 671,425.37. Use the recording if the session is not ready within 20 seconds. Be explicit that the raw tables were loaded into the Lakehouse separately (CSV upload, Load to table) and that the SQL was designed to be compatible.</a:t>
             </a:r>
           </a:p>
           <a:p/>
@@ -20482,7 +20482,7 @@
                 <a:latin typeface="Frutiger"/>
                 <a:cs typeface="Frutiger"/>
               </a:rPr>
-              <a:t>expression_is_true fails on stg_orders for all 61,948 rows; order_items, orders and customers are SKIPPED. The old tables are still there — no rollback.</a:t>
+              <a:t>expression_is_true fails on stg_orders for 61,465 of 61,948 rows (the rest carry no tax); order_items, orders and customers are SKIPPED. The old tables are still there — no rollback.</a:t>
             </a:r>
           </a:p>
         </p:txBody>
@@ -20711,7 +20711,7 @@
                 <a:latin typeface="Consolas"/>
                 <a:cs typeface="Consolas"/>
               </a:rPr>
-              <a:t>FAIL 61948 </a:t>
+              <a:t>FAIL 61465 </a:t>
             </a:r>
             <a:r>
               <a:rPr lang="en-US" sz="1500" dirty="0">
@@ -20795,7 +20795,7 @@
                 <a:latin typeface="Consolas"/>
                 <a:cs typeface="Consolas"/>
               </a:rPr>
-              <a:t>Done. PASS=4 ERROR=1 SKIP=17 TOTAL=22</a:t>
+              <a:t>Done. PASS=4 WARN=0 ERROR=1 SKIP=17 TOTAL=22</a:t>
             </a:r>
           </a:p>
           <a:p>
@@ -29280,7 +29280,7 @@
                 <a:latin typeface="Frutiger"/>
                 <a:cs typeface="Frutiger"/>
               </a:rPr>
-              <a:t>dbt build on Spark  </a:t>
+              <a:t>dbt build --select customers  </a:t>
             </a:r>
             <a:r>
               <a:rPr lang="en-US" sz="1900" dirty="0">
@@ -29290,7 +29290,7 @@
                 <a:latin typeface="Frutiger"/>
                 <a:cs typeface="Frutiger"/>
               </a:rPr>
-              <a:t>Against the pre-seeded Lakehouse with a warm Livy session. If Spark is slow, the rehearsed recording plays.</a:t>
+              <a:t>One mart and its four tests on Spark, ~2 minutes with a warm Livy session. The full 48-node build (~7 min) is the recording.</a:t>
             </a:r>
           </a:p>
         </p:txBody>
@@ -29814,6 +29814,26 @@
                 <a:cs typeface="Consolas"/>
               </a:rPr>
               <a:t>true</a:t>
+            </a:r>
+            <a:r>
+              <a:rPr lang="en-US" sz="1300" dirty="0">
+                <a:solidFill>
+                  <a:srgbClr val="FFD27F"/>
+                </a:solidFill>
+                <a:latin typeface="Consolas"/>
+                <a:cs typeface="Consolas"/>
+              </a:rPr>
+              <a:t>     threads: </a:t>
+            </a:r>
+            <a:r>
+              <a:rPr lang="en-US" sz="1300" dirty="0">
+                <a:solidFill>
+                  <a:srgbClr val="FFD27F"/>
+                </a:solidFill>
+                <a:latin typeface="Consolas"/>
+                <a:cs typeface="Consolas"/>
+              </a:rPr>
+              <a:t>4</a:t>
             </a:r>
           </a:p>
         </p:txBody>
@@ -32283,7 +32303,7 @@
                 <a:latin typeface="Consolas"/>
                 <a:cs typeface="Consolas"/>
               </a:rPr>
-              <a:t>  encrypt: </a:t>
+              <a:t>  schema_authorization: </a:t>
             </a:r>
             <a:r>
               <a:rPr lang="en-US" sz="1300" dirty="0">
@@ -32293,7 +32313,7 @@
                 <a:latin typeface="Consolas"/>
                 <a:cs typeface="Consolas"/>
               </a:rPr>
-              <a:t>true</a:t>
+              <a:t>dbo</a:t>
             </a:r>
             <a:r>
               <a:rPr lang="en-US" sz="1300" dirty="0">
@@ -32303,12 +32323,50 @@
                 <a:latin typeface="Consolas"/>
                 <a:cs typeface="Consolas"/>
               </a:rPr>
+              <a:t>   # workspace identities are not db users</a:t>
+            </a:r>
+          </a:p>
+          <a:p>
+            <a:pPr>
+              <a:lnSpc>
+                <a:spcPct val="118000"/>
+              </a:lnSpc>
+              <a:buNone/>
+            </a:pPr>
+            <a:r>
+              <a:rPr lang="en-US" sz="1300" dirty="0">
+                <a:solidFill>
+                  <a:srgbClr val="8EC5FF"/>
+                </a:solidFill>
+                <a:latin typeface="Consolas"/>
+                <a:cs typeface="Consolas"/>
+              </a:rPr>
+              <a:t>  encrypt: </a:t>
+            </a:r>
+            <a:r>
+              <a:rPr lang="en-US" sz="1300" dirty="0">
+                <a:solidFill>
+                  <a:srgbClr val="FFD27F"/>
+                </a:solidFill>
+                <a:latin typeface="Consolas"/>
+                <a:cs typeface="Consolas"/>
+              </a:rPr>
+              <a:t>true</a:t>
+            </a:r>
+            <a:r>
+              <a:rPr lang="en-US" sz="1300" dirty="0">
+                <a:solidFill>
+                  <a:srgbClr val="8EC5FF"/>
+                </a:solidFill>
+                <a:latin typeface="Consolas"/>
+                <a:cs typeface="Consolas"/>
+              </a:rPr>
               <a:t>   trust_cert: </a:t>
             </a:r>
             <a:r>
               <a:rPr lang="en-US" sz="1300" dirty="0">
                 <a:solidFill>
-                  <a:srgbClr val="FFD27F"/>
+                  <a:srgbClr val="8EC5FF"/>
                 </a:solidFill>
                 <a:latin typeface="Consolas"/>
                 <a:cs typeface="Consolas"/>
@@ -52086,7 +52144,7 @@
                 <a:latin typeface="Consolas"/>
                 <a:cs typeface="Consolas"/>
               </a:rPr>
-              <a:t>from "WH_Jaffle_Shop"."raw"."raw_orders"</a:t>
+              <a:t>from [WH_Jaffle_Shop].[raw].[raw_orders]</a:t>
             </a:r>
             <a:r>
               <a:rPr lang="en-US" sz="1800" i="1" dirty="0">

--- a/sql-as-software-getting-started-with-dbt.pptx
+++ b/sql-as-software-getting-started-with-dbt.pptx
@@ -19,8 +19,8 @@
     <p:sldId id="339" r:id="rId10"/>
     <p:sldId id="342" r:id="rId11"/>
     <p:sldId id="321" r:id="rId12"/>
-    <p:sldId id="345" r:id="rId13"/>
-    <p:sldId id="354" r:id="rId14"/>
+    <p:sldId id="354" r:id="rId13"/>
+    <p:sldId id="345" r:id="rId14"/>
     <p:sldId id="341" r:id="rId15"/>
     <p:sldId id="325" r:id="rId16"/>
     <p:sldId id="326" r:id="rId17"/>
@@ -2786,6 +2786,13 @@
           </p:nvPr>
         </p:nvSpPr>
         <p:spPr/>
+        <p:txBody>
+          <a:bodyPr/>
+          <a:lstStyle/>
+          <a:p>
+            <a:endParaRPr lang="en-US"/>
+          </a:p>
+        </p:txBody>
       </p:sp>
       <p:sp>
         <p:nvSpPr>
@@ -2803,37 +2810,43 @@
           <a:lstStyle/>
           <a:p>
             <a:r>
+              <a:rPr dirty="0"/>
               <a:t>TIME: 00:00–01:00</a:t>
             </a:r>
           </a:p>
           <a:p>
-            <a:endParaRPr/>
-          </a:p>
-          <a:p>
-            <a:r>
+            <a:endParaRPr dirty="0"/>
+          </a:p>
+          <a:p>
+            <a:r>
+              <a:rPr dirty="0"/>
               <a:t>Introduce yourself. Ask for a show of hands: SQL Server, Power BI, Fabric, dbt. Everyone who can read a SELECT is welcome. This session uses dbt Core and a fictional order dataset. No dbt subscription is needed for the demos. By the end, attendees should be able to explain a model, read a dependency, interpret a failing test, and choose an adapter.</a:t>
             </a:r>
           </a:p>
           <a:p>
-            <a:endParaRPr/>
-          </a:p>
-          <a:p>
-            <a:r>
+            <a:endParaRPr dirty="0"/>
+          </a:p>
+          <a:p>
+            <a:r>
+              <a:rPr dirty="0"/>
               <a:t>[Sources]</a:t>
             </a:r>
           </a:p>
           <a:p>
             <a:r>
+              <a:rPr dirty="0"/>
               <a:t>https://docs.getdbt.com/docs/introduction</a:t>
             </a:r>
           </a:p>
           <a:p>
             <a:r>
+              <a:rPr dirty="0"/>
               <a:t>Theme: user-supplied AANA AI Adoption Roadmap.pptx, visual reference only.</a:t>
             </a:r>
           </a:p>
           <a:p>
             <a:r>
+              <a:rPr dirty="0"/>
               <a:t>[/Sources]</a:t>
             </a:r>
           </a:p>
@@ -2894,6 +2907,13 @@
           </p:nvPr>
         </p:nvSpPr>
         <p:spPr/>
+        <p:txBody>
+          <a:bodyPr/>
+          <a:lstStyle/>
+          <a:p>
+            <a:endParaRPr lang="en-US"/>
+          </a:p>
+        </p:txBody>
       </p:sp>
       <p:sp>
         <p:nvSpPr>
@@ -2911,38 +2931,73 @@
           <a:lstStyle/>
           <a:p>
             <a:r>
+              <a:rPr dirty="0"/>
               <a:t>TIME: 19:00–22:00</a:t>
             </a:r>
           </a:p>
-          <a:p/>
-          <a:p>
-            <a:r>
-              <a:t>A model is logical SQL; materialization is the build strategy. Our project defaults to views for staging and tables for marts on all three engines, set once in dbt_project.yml. A table-to-view switch on stg_orders is a good optional ten-second edit. Ephemeral embeds SQL in consumers; materialized_view and friends are adapter-dependent. Incremental is not automatic CDC and should not be the first live demo.</a:t>
-            </a:r>
-          </a:p>
-          <a:p/>
-          <a:p>
-            <a:r>
+          <a:p>
+            <a:endParaRPr dirty="0"/>
+          </a:p>
+          <a:p>
+            <a:r>
+              <a:rPr dirty="0"/>
+              <a:t>A model is logical SQL; materialization is the build strategy. Our project defaults to views for staging and tables for marts on all three engines, set once in </a:t>
+            </a:r>
+            <a:r>
+              <a:rPr dirty="0" err="1"/>
+              <a:t>dbt_project.yml</a:t>
+            </a:r>
+            <a:r>
+              <a:rPr dirty="0"/>
+              <a:t>. A table-to-view switch on </a:t>
+            </a:r>
+            <a:r>
+              <a:rPr dirty="0" err="1"/>
+              <a:t>stg_orders</a:t>
+            </a:r>
+            <a:r>
+              <a:rPr dirty="0"/>
+              <a:t> is a good optional ten-second edit. Ephemeral embeds SQL in consumers; </a:t>
+            </a:r>
+            <a:r>
+              <a:rPr dirty="0" err="1"/>
+              <a:t>materialized_view</a:t>
+            </a:r>
+            <a:r>
+              <a:rPr dirty="0"/>
+              <a:t> and friends are adapter-dependent. Incremental is not automatic CDC and should not be the first live demo.</a:t>
+            </a:r>
+          </a:p>
+          <a:p>
+            <a:endParaRPr dirty="0"/>
+          </a:p>
+          <a:p>
+            <a:r>
+              <a:rPr dirty="0"/>
               <a:t>[Sources]</a:t>
             </a:r>
           </a:p>
           <a:p>
             <a:r>
+              <a:rPr dirty="0"/>
               <a:t>https://docs.getdbt.com/docs/build/materializations</a:t>
             </a:r>
           </a:p>
           <a:p>
             <a:r>
+              <a:rPr dirty="0"/>
               <a:t>https://docs.getdbt.com/docs/build/incremental-models</a:t>
             </a:r>
           </a:p>
           <a:p>
             <a:r>
+              <a:rPr dirty="0"/>
               <a:t>Theme: user-supplied AANA AI Adoption Roadmap.pptx, visual reference only.</a:t>
             </a:r>
           </a:p>
           <a:p>
             <a:r>
+              <a:rPr dirty="0"/>
               <a:t>[/Sources]</a:t>
             </a:r>
           </a:p>
@@ -3003,6 +3058,13 @@
           </p:nvPr>
         </p:nvSpPr>
         <p:spPr/>
+        <p:txBody>
+          <a:bodyPr/>
+          <a:lstStyle/>
+          <a:p>
+            <a:endParaRPr lang="en-US"/>
+          </a:p>
+        </p:txBody>
       </p:sp>
       <p:sp>
         <p:nvSpPr>
@@ -3023,13 +3085,17 @@
               <a:t>TIME: 08:00–10:00 (shared with slide 9)</a:t>
             </a:r>
           </a:p>
-          <a:p/>
+          <a:p>
+            <a:endParaRPr/>
+          </a:p>
           <a:p>
             <a:r>
               <a:t>Read the graph left to right: sources, staging, marts, with tests hanging off the model they check. The reconciliation test sits on stg_orders — the earliest point where cents and dollars can be confused. In the full project five source branches join at order_items and orders; this slide follows only the order and customer branches. Selection syntax: +customers builds everything customers needs; stg_orders+ rebuilds everything that depends on stg_orders — that is the Demo 2 command.</a:t>
             </a:r>
           </a:p>
-          <a:p/>
+          <a:p>
+            <a:endParaRPr/>
+          </a:p>
           <a:p>
             <a:r>
               <a:t>[Sources]</a:t>
@@ -3112,6 +3178,13 @@
           </p:nvPr>
         </p:nvSpPr>
         <p:spPr/>
+        <p:txBody>
+          <a:bodyPr/>
+          <a:lstStyle/>
+          <a:p>
+            <a:endParaRPr lang="en-US"/>
+          </a:p>
+        </p:txBody>
       </p:sp>
       <p:sp>
         <p:nvSpPr>
@@ -3129,16 +3202,20 @@
           <a:lstStyle/>
           <a:p>
             <a:r>
-              <a:t>TIME: 22:00–24:00</a:t>
-            </a:r>
-          </a:p>
-          <a:p/>
-          <a:p>
-            <a:r>
-              <a:t>Our demo uses unique, not_null, accepted_values, relationships and dbt_utils.expression_is_true, plus three unit tests from the upstream project. Ask which test would catch a duplicate key and which would catch the cents-versus-dollars slip we cause in Demo 2. Data tests are queries over built data; unit tests use controlled inputs to check model logic. Note the arguments: key — dbt 1.10+ syntax for generic test parameters.</a:t>
-            </a:r>
-          </a:p>
-          <a:p/>
+              <a:t>TIME: 22:00–24:00 (shared with slide 12)</a:t>
+            </a:r>
+          </a:p>
+          <a:p>
+            <a:endParaRPr/>
+          </a:p>
+          <a:p>
+            <a:r>
+              <a:t>Walk the real customers.yml: the description states the grain and the new/returning rule; customer_id gets not_null and unique; customer_type gets accepted_values; the model-level expression_is_true reconciles pretax + tax = spend. The same file feeds the docs site in Demo 3, so a reviewer sees the SELECT, the expectation and the documentation in one pull request.</a:t>
+            </a:r>
+          </a:p>
+          <a:p>
+            <a:endParaRPr/>
+          </a:p>
           <a:p>
             <a:r>
               <a:t>[Sources]</a:t>
@@ -3146,12 +3223,12 @@
           </a:p>
           <a:p>
             <a:r>
-              <a:t>https://docs.getdbt.com/docs/build/data-tests</a:t>
-            </a:r>
-          </a:p>
-          <a:p>
-            <a:r>
-              <a:t>https://docs.getdbt.com/docs/build/unit-tests</a:t>
+              <a:t>https://docs.getdbt.com/reference/resource-properties/data-tests</a:t>
+            </a:r>
+          </a:p>
+          <a:p>
+            <a:r>
+              <a:t>https://github.com/dbt-labs/dbt-utils</a:t>
             </a:r>
           </a:p>
           <a:p>
@@ -3221,6 +3298,13 @@
           </p:nvPr>
         </p:nvSpPr>
         <p:spPr/>
+        <p:txBody>
+          <a:bodyPr/>
+          <a:lstStyle/>
+          <a:p>
+            <a:endParaRPr lang="en-US"/>
+          </a:p>
+        </p:txBody>
       </p:sp>
       <p:sp>
         <p:nvSpPr>
@@ -3238,38 +3322,73 @@
           <a:lstStyle/>
           <a:p>
             <a:r>
-              <a:t>TIME: 22:00–24:00 (shared with slide 12)</a:t>
-            </a:r>
-          </a:p>
-          <a:p/>
-          <a:p>
-            <a:r>
-              <a:t>Walk the real customers.yml: the description states the grain and the new/returning rule; customer_id gets not_null and unique; customer_type gets accepted_values; the model-level expression_is_true reconciles pretax + tax = spend. The same file feeds the docs site in Demo 3, so a reviewer sees the SELECT, the expectation and the documentation in one pull request.</a:t>
-            </a:r>
-          </a:p>
-          <a:p/>
-          <a:p>
-            <a:r>
+              <a:rPr dirty="0"/>
+              <a:t>TIME: 22:00–24:00</a:t>
+            </a:r>
+          </a:p>
+          <a:p>
+            <a:endParaRPr dirty="0"/>
+          </a:p>
+          <a:p>
+            <a:r>
+              <a:rPr dirty="0"/>
+              <a:t>Our demo uses unique, </a:t>
+            </a:r>
+            <a:r>
+              <a:rPr dirty="0" err="1"/>
+              <a:t>not_null</a:t>
+            </a:r>
+            <a:r>
+              <a:rPr dirty="0"/>
+              <a:t>, </a:t>
+            </a:r>
+            <a:r>
+              <a:rPr dirty="0" err="1"/>
+              <a:t>accepted_values</a:t>
+            </a:r>
+            <a:r>
+              <a:rPr dirty="0"/>
+              <a:t>, relationships and </a:t>
+            </a:r>
+            <a:r>
+              <a:rPr dirty="0" err="1"/>
+              <a:t>dbt_utils.expression_is_true</a:t>
+            </a:r>
+            <a:r>
+              <a:rPr dirty="0"/>
+              <a:t>, plus three unit tests from the upstream project. Ask which test would catch a duplicate key and which would catch the cents-versus-dollars slip we cause in Demo 2. Data tests are queries over built data; unit tests use controlled inputs to check model logic. Note the arguments: key — dbt 1.10+ syntax for generic test parameters.</a:t>
+            </a:r>
+          </a:p>
+          <a:p>
+            <a:endParaRPr dirty="0"/>
+          </a:p>
+          <a:p>
+            <a:r>
+              <a:rPr dirty="0"/>
               <a:t>[Sources]</a:t>
             </a:r>
           </a:p>
           <a:p>
             <a:r>
-              <a:t>https://docs.getdbt.com/reference/resource-properties/data-tests</a:t>
-            </a:r>
-          </a:p>
-          <a:p>
-            <a:r>
-              <a:t>https://github.com/dbt-labs/dbt-utils</a:t>
-            </a:r>
-          </a:p>
-          <a:p>
-            <a:r>
+              <a:rPr dirty="0"/>
+              <a:t>https://docs.getdbt.com/docs/build/data-tests</a:t>
+            </a:r>
+          </a:p>
+          <a:p>
+            <a:r>
+              <a:rPr dirty="0"/>
+              <a:t>https://docs.getdbt.com/docs/build/unit-tests</a:t>
+            </a:r>
+          </a:p>
+          <a:p>
+            <a:r>
+              <a:rPr dirty="0"/>
               <a:t>Theme: user-supplied AANA AI Adoption Roadmap.pptx, visual reference only.</a:t>
             </a:r>
           </a:p>
           <a:p>
             <a:r>
+              <a:rPr dirty="0"/>
               <a:t>[/Sources]</a:t>
             </a:r>
           </a:p>
@@ -3330,6 +3449,13 @@
           </p:nvPr>
         </p:nvSpPr>
         <p:spPr/>
+        <p:txBody>
+          <a:bodyPr/>
+          <a:lstStyle/>
+          <a:p>
+            <a:endParaRPr lang="en-US"/>
+          </a:p>
+        </p:txBody>
       </p:sp>
       <p:sp>
         <p:nvSpPr>
@@ -3347,33 +3473,131 @@
           <a:lstStyle/>
           <a:p>
             <a:r>
+              <a:rPr dirty="0"/>
               <a:t>TIME: 10:00–19:00</a:t>
             </a:r>
           </a:p>
-          <a:p/>
-          <a:p>
-            <a:r>
-              <a:t>Demo 1 in docs/runbook.md. Fabric Warehouse: .venv-warehouse, dbt build (default target). The raw tables were seeded before the talk; dbt build touches models and tests only, because seeds are disabled unless load_source_data is set. Show __sources.yml, stg_orders.sql and customers.yml, then run dbt build after explaining the command (48 nodes, about one to two minutes). Open target/compiled/jaffle_shop/models/marts/customers.sql for the resolved names. Query: select customer_type, count(*), sum(lifetime_spend) from jaffle_shop.customers group by customer_type — expected new 6 / 113.48, returning 929 / 671,311.89, total 935 / 671,425.37. Ask the audience why only 6 customers are 'new' (a year of data, regulars). Keep code readable; spend no live time installing tools.</a:t>
-            </a:r>
-          </a:p>
-          <a:p/>
-          <a:p>
-            <a:r>
+          <a:p>
+            <a:endParaRPr dirty="0"/>
+          </a:p>
+          <a:p>
+            <a:r>
+              <a:rPr dirty="0"/>
+              <a:t>Demo 1 in docs/runbook.md. Fabric Warehouse: .</a:t>
+            </a:r>
+            <a:r>
+              <a:rPr dirty="0" err="1"/>
+              <a:t>venv</a:t>
+            </a:r>
+            <a:r>
+              <a:rPr dirty="0"/>
+              <a:t>-warehouse, dbt build (default target). The raw tables were seeded before the talk; dbt build touches models and tests only, because seeds are disabled unless </a:t>
+            </a:r>
+            <a:r>
+              <a:rPr dirty="0" err="1"/>
+              <a:t>load_source_data</a:t>
+            </a:r>
+            <a:r>
+              <a:rPr dirty="0"/>
+              <a:t> is set. Show __</a:t>
+            </a:r>
+            <a:r>
+              <a:rPr dirty="0" err="1"/>
+              <a:t>sources.yml</a:t>
+            </a:r>
+            <a:r>
+              <a:rPr dirty="0"/>
+              <a:t>, </a:t>
+            </a:r>
+            <a:r>
+              <a:rPr dirty="0" err="1"/>
+              <a:t>stg_orders.sql</a:t>
+            </a:r>
+            <a:r>
+              <a:rPr dirty="0"/>
+              <a:t> and </a:t>
+            </a:r>
+            <a:r>
+              <a:rPr dirty="0" err="1"/>
+              <a:t>customers.yml</a:t>
+            </a:r>
+            <a:r>
+              <a:rPr dirty="0"/>
+              <a:t>, then run dbt build after explaining the command (48 nodes, about one to two minutes). Open target/compiled/</a:t>
+            </a:r>
+            <a:r>
+              <a:rPr dirty="0" err="1"/>
+              <a:t>jaffle_shop</a:t>
+            </a:r>
+            <a:r>
+              <a:rPr dirty="0"/>
+              <a:t>/models/marts/</a:t>
+            </a:r>
+            <a:r>
+              <a:rPr dirty="0" err="1"/>
+              <a:t>customers.sql</a:t>
+            </a:r>
+            <a:r>
+              <a:rPr dirty="0"/>
+              <a:t> for the resolved names. Query: select </a:t>
+            </a:r>
+            <a:r>
+              <a:rPr dirty="0" err="1"/>
+              <a:t>customer_type</a:t>
+            </a:r>
+            <a:r>
+              <a:rPr dirty="0"/>
+              <a:t>, count(*), sum(</a:t>
+            </a:r>
+            <a:r>
+              <a:rPr dirty="0" err="1"/>
+              <a:t>lifetime_spend</a:t>
+            </a:r>
+            <a:r>
+              <a:rPr dirty="0"/>
+              <a:t>) from </a:t>
+            </a:r>
+            <a:r>
+              <a:rPr dirty="0" err="1"/>
+              <a:t>jaffle_shop.customers</a:t>
+            </a:r>
+            <a:r>
+              <a:rPr dirty="0"/>
+              <a:t> group by </a:t>
+            </a:r>
+            <a:r>
+              <a:rPr dirty="0" err="1"/>
+              <a:t>customer_type</a:t>
+            </a:r>
+            <a:r>
+              <a:rPr dirty="0"/>
+              <a:t> — expected new 6 / 113.48, returning 929 / 671,311.89, total 935 / 671,425.37. Ask the audience why only 6 customers are 'new' (a year of data, regulars). Keep code readable; spend no live time installing tools.</a:t>
+            </a:r>
+          </a:p>
+          <a:p>
+            <a:endParaRPr dirty="0"/>
+          </a:p>
+          <a:p>
+            <a:r>
+              <a:rPr dirty="0"/>
               <a:t>[Sources]</a:t>
             </a:r>
           </a:p>
           <a:p>
             <a:r>
+              <a:rPr dirty="0"/>
               <a:t>https://github.com/aboerger/getting-started-with-dbt (docs/runbook.md)</a:t>
             </a:r>
           </a:p>
           <a:p>
             <a:r>
+              <a:rPr dirty="0"/>
               <a:t>Theme: user-supplied AANA AI Adoption Roadmap.pptx, visual reference only.</a:t>
             </a:r>
           </a:p>
           <a:p>
             <a:r>
+              <a:rPr dirty="0"/>
               <a:t>[/Sources]</a:t>
             </a:r>
           </a:p>
@@ -3434,6 +3658,13 @@
           </p:nvPr>
         </p:nvSpPr>
         <p:spPr/>
+        <p:txBody>
+          <a:bodyPr/>
+          <a:lstStyle/>
+          <a:p>
+            <a:endParaRPr lang="en-US"/>
+          </a:p>
+        </p:txBody>
       </p:sp>
       <p:sp>
         <p:nvSpPr>
@@ -3451,33 +3682,123 @@
           <a:lstStyle/>
           <a:p>
             <a:r>
+              <a:rPr dirty="0"/>
               <a:t>TIME: 24:00–33:00</a:t>
             </a:r>
           </a:p>
-          <a:p/>
-          <a:p>
-            <a:r>
-              <a:t>Demo 2. Ask for a prediction first: tax in cents makes lifetime_spend several times too large and no single row looks wrong. Run tools\scenario.ps1 break (it edits one line of stg_orders.sql so tax_paid no longer goes through cents_to_dollars), show the diff in Git, then dbt build --select stg_orders+. The reconciliation test order_total - tax_paid = subtotal fails for every row; the three downstream marts, their tests and unit tests are skipped; the previously built tables still exist and still hold correct numbers. Open the compiled test SQL under target/compiled and run_results.json. Repair with tools\scenario.ps1 reset (a git checkout), rebuild, see the green recovery. If time remains, break accepted_values instead by returning 'Returning' from customers.sql; do not sacrifice the recovery step.</a:t>
-            </a:r>
-          </a:p>
-          <a:p/>
-          <a:p>
-            <a:r>
+          <a:p>
+            <a:endParaRPr dirty="0"/>
+          </a:p>
+          <a:p>
+            <a:r>
+              <a:rPr dirty="0"/>
+              <a:t>Demo 2. Ask for a prediction first: tax in cents makes </a:t>
+            </a:r>
+            <a:r>
+              <a:rPr dirty="0" err="1"/>
+              <a:t>lifetime_spend</a:t>
+            </a:r>
+            <a:r>
+              <a:rPr dirty="0"/>
+              <a:t> several times too large and no single row looks wrong. Run tools\scenario.ps1 break (it edits one line of </a:t>
+            </a:r>
+            <a:r>
+              <a:rPr dirty="0" err="1"/>
+              <a:t>stg_orders.sql</a:t>
+            </a:r>
+            <a:r>
+              <a:rPr dirty="0"/>
+              <a:t> so </a:t>
+            </a:r>
+            <a:r>
+              <a:rPr dirty="0" err="1"/>
+              <a:t>tax_paid</a:t>
+            </a:r>
+            <a:r>
+              <a:rPr dirty="0"/>
+              <a:t> no longer goes through </a:t>
+            </a:r>
+            <a:r>
+              <a:rPr dirty="0" err="1"/>
+              <a:t>cents_to_dollars</a:t>
+            </a:r>
+            <a:r>
+              <a:rPr dirty="0"/>
+              <a:t>), show the diff in Git, then dbt build --select </a:t>
+            </a:r>
+            <a:r>
+              <a:rPr dirty="0" err="1"/>
+              <a:t>stg_orders</a:t>
+            </a:r>
+            <a:r>
+              <a:rPr dirty="0"/>
+              <a:t>+. The reconciliation test </a:t>
+            </a:r>
+            <a:r>
+              <a:rPr dirty="0" err="1"/>
+              <a:t>order_total</a:t>
+            </a:r>
+            <a:r>
+              <a:rPr dirty="0"/>
+              <a:t> - </a:t>
+            </a:r>
+            <a:r>
+              <a:rPr dirty="0" err="1"/>
+              <a:t>tax_paid</a:t>
+            </a:r>
+            <a:r>
+              <a:rPr dirty="0"/>
+              <a:t> = subtotal fails for every row; the three downstream marts, their tests and unit tests are skipped; the previously built tables still exist and still hold correct numbers. Open the compiled test SQL under target/compiled and </a:t>
+            </a:r>
+            <a:r>
+              <a:rPr dirty="0" err="1"/>
+              <a:t>run_results.json</a:t>
+            </a:r>
+            <a:r>
+              <a:rPr dirty="0"/>
+              <a:t>. Repair with tools\scenario.ps1 reset (a git checkout), rebuild, see the green recovery. If time remains, break </a:t>
+            </a:r>
+            <a:r>
+              <a:rPr dirty="0" err="1"/>
+              <a:t>accepted_values</a:t>
+            </a:r>
+            <a:r>
+              <a:rPr dirty="0"/>
+              <a:t> instead by returning 'Returning' from </a:t>
+            </a:r>
+            <a:r>
+              <a:rPr dirty="0" err="1"/>
+              <a:t>customers.sql</a:t>
+            </a:r>
+            <a:r>
+              <a:rPr dirty="0"/>
+              <a:t>; do not sacrifice the recovery step.</a:t>
+            </a:r>
+          </a:p>
+          <a:p>
+            <a:endParaRPr dirty="0"/>
+          </a:p>
+          <a:p>
+            <a:r>
+              <a:rPr dirty="0"/>
               <a:t>[Sources]</a:t>
             </a:r>
           </a:p>
           <a:p>
             <a:r>
+              <a:rPr dirty="0"/>
               <a:t>https://github.com/aboerger/getting-started-with-dbt (tools/scenario.ps1, docs/runbook.md)</a:t>
             </a:r>
           </a:p>
           <a:p>
             <a:r>
+              <a:rPr dirty="0"/>
               <a:t>Theme: user-supplied AANA AI Adoption Roadmap.pptx, visual reference only.</a:t>
             </a:r>
           </a:p>
           <a:p>
             <a:r>
+              <a:rPr dirty="0"/>
               <a:t>[/Sources]</a:t>
             </a:r>
           </a:p>
@@ -3538,6 +3859,13 @@
           </p:nvPr>
         </p:nvSpPr>
         <p:spPr/>
+        <p:txBody>
+          <a:bodyPr/>
+          <a:lstStyle/>
+          <a:p>
+            <a:endParaRPr lang="en-US"/>
+          </a:p>
+        </p:txBody>
       </p:sp>
       <p:sp>
         <p:nvSpPr>
@@ -3555,42 +3883,49 @@
           <a:lstStyle/>
           <a:p>
             <a:r>
+              <a:rPr dirty="0"/>
               <a:t>TIME: 33:00–35:00</a:t>
             </a:r>
           </a:p>
           <a:p>
-            <a:endParaRPr/>
-          </a:p>
-          <a:p>
-            <a:r>
+            <a:endParaRPr dirty="0"/>
+          </a:p>
+          <a:p>
+            <a:r>
+              <a:rPr dirty="0"/>
               <a:t>A successful build is not proof that every business rule is correct. Data tests are not database constraints and do not prevent later writes. dbt build is not a whole-project transaction or a universal publish gate. To hide invalid data from readers, use isolated build targets and a deliberate promotion mechanism. The failure demo is in a sandbox.</a:t>
             </a:r>
           </a:p>
           <a:p>
-            <a:endParaRPr/>
-          </a:p>
-          <a:p>
-            <a:r>
+            <a:endParaRPr dirty="0"/>
+          </a:p>
+          <a:p>
+            <a:r>
+              <a:rPr dirty="0"/>
               <a:t>[Sources]</a:t>
             </a:r>
           </a:p>
           <a:p>
             <a:r>
+              <a:rPr dirty="0"/>
               <a:t>https://docs.getdbt.com/docs/build/data-tests</a:t>
             </a:r>
           </a:p>
           <a:p>
             <a:r>
+              <a:rPr dirty="0"/>
               <a:t>https://docs.getdbt.com/reference/commands/build</a:t>
             </a:r>
           </a:p>
           <a:p>
             <a:r>
+              <a:rPr dirty="0"/>
               <a:t>Theme: user-supplied AANA AI Adoption Roadmap.pptx, visual reference only.</a:t>
             </a:r>
           </a:p>
           <a:p>
             <a:r>
+              <a:rPr dirty="0"/>
               <a:t>[/Sources]</a:t>
             </a:r>
           </a:p>
@@ -3651,6 +3986,13 @@
           </p:nvPr>
         </p:nvSpPr>
         <p:spPr/>
+        <p:txBody>
+          <a:bodyPr/>
+          <a:lstStyle/>
+          <a:p>
+            <a:endParaRPr lang="en-US"/>
+          </a:p>
+        </p:txBody>
       </p:sp>
       <p:sp>
         <p:nvSpPr>
@@ -3668,38 +4010,73 @@
           <a:lstStyle/>
           <a:p>
             <a:r>
+              <a:rPr dirty="0"/>
               <a:t>TIME: 35:00–39:00</a:t>
             </a:r>
           </a:p>
-          <a:p/>
-          <a:p>
-            <a:r>
-              <a:t>Demo 3. Open the locally generated dbt docs (generate them before the talk: dbt docs generate; dbt docs serve --port 8080), find customers, read the description and columns, open the lineage graph and expand upstream: five sources, five staging views, order_items, orders. Then show dbt ls --select +customers and stg_orders+. Ask which model must change if the definition of a returning customer changes (customers.sql only, and its YAML). Do not regenerate docs on a slow connection if the rehearsed copy is already open. Show real generated docs, not a screenshot.</a:t>
-            </a:r>
-          </a:p>
-          <a:p/>
-          <a:p>
-            <a:r>
+          <a:p>
+            <a:endParaRPr dirty="0"/>
+          </a:p>
+          <a:p>
+            <a:r>
+              <a:rPr dirty="0"/>
+              <a:t>Demo 3. Open the locally generated dbt docs (generate them before the talk: dbt docs generate; dbt docs serve --port 8080), find customers, read the description and columns, open the lineage graph and expand upstream: five sources, five staging views, </a:t>
+            </a:r>
+            <a:r>
+              <a:rPr dirty="0" err="1"/>
+              <a:t>order_items</a:t>
+            </a:r>
+            <a:r>
+              <a:rPr dirty="0"/>
+              <a:t>, orders. Then show dbt ls --select +customers and </a:t>
+            </a:r>
+            <a:r>
+              <a:rPr dirty="0" err="1"/>
+              <a:t>stg_orders</a:t>
+            </a:r>
+            <a:r>
+              <a:rPr dirty="0"/>
+              <a:t>+. Ask which model must change if the definition of a returning customer changes (</a:t>
+            </a:r>
+            <a:r>
+              <a:rPr dirty="0" err="1"/>
+              <a:t>customers.sql</a:t>
+            </a:r>
+            <a:r>
+              <a:rPr dirty="0"/>
+              <a:t> only, and its YAML). Do not regenerate docs on a slow connection if the rehearsed copy is already open. Show real generated docs, not a screenshot.</a:t>
+            </a:r>
+          </a:p>
+          <a:p>
+            <a:endParaRPr dirty="0"/>
+          </a:p>
+          <a:p>
+            <a:r>
+              <a:rPr dirty="0"/>
               <a:t>[Sources]</a:t>
             </a:r>
           </a:p>
           <a:p>
             <a:r>
+              <a:rPr dirty="0"/>
               <a:t>https://docs.getdbt.com/reference/commands/cmd-docs</a:t>
             </a:r>
           </a:p>
           <a:p>
             <a:r>
+              <a:rPr dirty="0"/>
               <a:t>https://docs.getdbt.com/reference/node-selection/syntax</a:t>
             </a:r>
           </a:p>
           <a:p>
             <a:r>
+              <a:rPr dirty="0"/>
               <a:t>Theme: user-supplied AANA AI Adoption Roadmap.pptx, visual reference only.</a:t>
             </a:r>
           </a:p>
           <a:p>
             <a:r>
+              <a:rPr dirty="0"/>
               <a:t>[/Sources]</a:t>
             </a:r>
           </a:p>
@@ -3760,6 +4137,13 @@
           </p:nvPr>
         </p:nvSpPr>
         <p:spPr/>
+        <p:txBody>
+          <a:bodyPr/>
+          <a:lstStyle/>
+          <a:p>
+            <a:endParaRPr lang="en-US"/>
+          </a:p>
+        </p:txBody>
       </p:sp>
       <p:sp>
         <p:nvSpPr>
@@ -3777,58 +4161,121 @@
           <a:lstStyle/>
           <a:p>
             <a:r>
+              <a:rPr dirty="0"/>
               <a:t>TIME: 42:00–44:00</a:t>
             </a:r>
           </a:p>
-          <a:p/>
-          <a:p>
-            <a:r>
-              <a:t>Keep platform branding subordinate to the adapter mapping. The Fabric adapters are Microsoft-maintained; dbt-sqlserver is community-maintained (dbt-msft). dbt-fabric 1.10+ uses the mssql-python driver, so no ODBC driver install; dbt-sqlserver still defaults to pyodbc and ODBC Driver 18. Fabric SQL database is Azure SQL technology: dbt-sqlserver connects and builds our project in rehearsal, but the adapter pages do not certify it — say so. This training uses Core; availability in hosted dbt or Fusion is a separate question. Do not use the Lakehouse SQL analytics endpoint for table-building dbt workloads.</a:t>
-            </a:r>
-          </a:p>
-          <a:p/>
-          <a:p>
-            <a:r>
+          <a:p>
+            <a:endParaRPr dirty="0"/>
+          </a:p>
+          <a:p>
+            <a:r>
+              <a:rPr dirty="0"/>
+              <a:t>Keep platform branding subordinate to the adapter mapping. The Fabric adapters are Microsoft-maintained; dbt-</a:t>
+            </a:r>
+            <a:r>
+              <a:rPr dirty="0" err="1"/>
+              <a:t>sqlserver</a:t>
+            </a:r>
+            <a:r>
+              <a:rPr dirty="0"/>
+              <a:t> is community-maintained (dbt-</a:t>
+            </a:r>
+            <a:r>
+              <a:rPr dirty="0" err="1"/>
+              <a:t>msft</a:t>
+            </a:r>
+            <a:r>
+              <a:rPr dirty="0"/>
+              <a:t>). dbt-fabric 1.10+ uses the </a:t>
+            </a:r>
+            <a:r>
+              <a:rPr dirty="0" err="1"/>
+              <a:t>mssql</a:t>
+            </a:r>
+            <a:r>
+              <a:rPr dirty="0"/>
+              <a:t>-python driver, so no ODBC driver install; dbt-</a:t>
+            </a:r>
+            <a:r>
+              <a:rPr dirty="0" err="1"/>
+              <a:t>sqlserver</a:t>
+            </a:r>
+            <a:r>
+              <a:rPr dirty="0"/>
+              <a:t> still defaults to </a:t>
+            </a:r>
+            <a:r>
+              <a:rPr dirty="0" err="1"/>
+              <a:t>pyodbc</a:t>
+            </a:r>
+            <a:r>
+              <a:rPr dirty="0"/>
+              <a:t> and ODBC Driver 18. Fabric SQL database is Azure SQL technology: dbt-</a:t>
+            </a:r>
+            <a:r>
+              <a:rPr dirty="0" err="1"/>
+              <a:t>sqlserver</a:t>
+            </a:r>
+            <a:r>
+              <a:rPr dirty="0"/>
+              <a:t> connects and builds our project in rehearsal, but the adapter pages do not certify it — say so. This training uses Core; availability in hosted dbt or Fusion is a separate question. Do not use the Lakehouse SQL analytics endpoint for table-building dbt workloads.</a:t>
+            </a:r>
+          </a:p>
+          <a:p>
+            <a:endParaRPr dirty="0"/>
+          </a:p>
+          <a:p>
+            <a:r>
+              <a:rPr dirty="0"/>
               <a:t>[Sources]</a:t>
             </a:r>
           </a:p>
           <a:p>
             <a:r>
+              <a:rPr dirty="0"/>
               <a:t>https://docs.getdbt.com/docs/core/connect-data-platform/fabric-setup</a:t>
             </a:r>
           </a:p>
           <a:p>
             <a:r>
+              <a:rPr dirty="0"/>
               <a:t>https://docs.getdbt.com/docs/core/connect-data-platform/fabricspark-setup</a:t>
             </a:r>
           </a:p>
           <a:p>
             <a:r>
+              <a:rPr dirty="0"/>
               <a:t>https://docs.getdbt.com/docs/core/connect-data-platform/mssql-setup</a:t>
             </a:r>
           </a:p>
           <a:p>
             <a:r>
+              <a:rPr dirty="0"/>
               <a:t>https://pypi.org/project/dbt-fabric/</a:t>
             </a:r>
           </a:p>
           <a:p>
             <a:r>
+              <a:rPr dirty="0"/>
               <a:t>https://pypi.org/project/dbt-fabricspark/</a:t>
             </a:r>
           </a:p>
           <a:p>
             <a:r>
+              <a:rPr dirty="0"/>
               <a:t>https://pypi.org/project/dbt-sqlserver/</a:t>
             </a:r>
           </a:p>
           <a:p>
             <a:r>
+              <a:rPr dirty="0"/>
               <a:t>Theme: user-supplied AANA AI Adoption Roadmap.pptx, visual reference only.</a:t>
             </a:r>
           </a:p>
           <a:p>
             <a:r>
+              <a:rPr dirty="0"/>
               <a:t>[/Sources]</a:t>
             </a:r>
           </a:p>
@@ -3889,6 +4336,13 @@
           </p:nvPr>
         </p:nvSpPr>
         <p:spPr/>
+        <p:txBody>
+          <a:bodyPr/>
+          <a:lstStyle/>
+          <a:p>
+            <a:endParaRPr lang="en-US"/>
+          </a:p>
+        </p:txBody>
       </p:sp>
       <p:sp>
         <p:nvSpPr>
@@ -3909,13 +4363,17 @@
               <a:t>TIME: 39:00–42:00</a:t>
             </a:r>
           </a:p>
-          <a:p/>
+          <a:p>
+            <a:endParaRPr/>
+          </a:p>
           <a:p>
             <a:r>
               <a:t>The portability claim is workflow and design reuse, not arbitrary SQL translation. The upstream Jaffle Shop used Postgres habits (group by 1, bare boolean columns); porting it to T-SQL took explicit group-by columns and two tiny dispatch macros, to_bool and is_true, next to the upstream cents_to_dollars. Show cents_to_dollars.sql: one macro, one default body, one fabric/sqlserver body. The raw tables are loaded into each engine independently; changing targets does not transfer data. Packages and macros also have support boundaries.</a:t>
             </a:r>
           </a:p>
-          <a:p/>
+          <a:p>
+            <a:endParaRPr/>
+          </a:p>
           <a:p>
             <a:r>
               <a:t>[Sources]</a:t>
@@ -3998,6 +4456,13 @@
           </p:nvPr>
         </p:nvSpPr>
         <p:spPr/>
+        <p:txBody>
+          <a:bodyPr/>
+          <a:lstStyle/>
+          <a:p>
+            <a:endParaRPr lang="en-US"/>
+          </a:p>
+        </p:txBody>
       </p:sp>
       <p:sp>
         <p:nvSpPr>
@@ -4015,37 +4480,43 @@
           <a:lstStyle/>
           <a:p>
             <a:r>
+              <a:rPr dirty="0"/>
               <a:t>TIME: 01:00–03:00</a:t>
             </a:r>
           </a:p>
           <a:p>
-            <a:endParaRPr/>
-          </a:p>
-          <a:p>
-            <a:r>
+            <a:endParaRPr dirty="0"/>
+          </a:p>
+          <a:p>
+            <a:r>
+              <a:rPr dirty="0"/>
               <a:t>Ask: “Who has changed one SQL object and discovered the dependent report later?” The problem is coordination around transformations as they grow. Stored procedures and notebooks can be engineered well; dbt offers a consistent project workflow so each team does not invent all of it. Avoid claiming that existing tools cannot be tested or versioned.</a:t>
             </a:r>
           </a:p>
           <a:p>
-            <a:endParaRPr/>
-          </a:p>
-          <a:p>
-            <a:r>
+            <a:endParaRPr dirty="0"/>
+          </a:p>
+          <a:p>
+            <a:r>
+              <a:rPr dirty="0"/>
               <a:t>[Sources]</a:t>
             </a:r>
           </a:p>
           <a:p>
             <a:r>
+              <a:rPr dirty="0"/>
               <a:t>Original teaching scenario and synthetic demo data.</a:t>
             </a:r>
           </a:p>
           <a:p>
             <a:r>
+              <a:rPr dirty="0"/>
               <a:t>Theme: user-supplied AANA AI Adoption Roadmap.pptx, visual reference only.</a:t>
             </a:r>
           </a:p>
           <a:p>
             <a:r>
+              <a:rPr dirty="0"/>
               <a:t>[/Sources]</a:t>
             </a:r>
           </a:p>
@@ -4106,6 +4577,13 @@
           </p:nvPr>
         </p:nvSpPr>
         <p:spPr/>
+        <p:txBody>
+          <a:bodyPr/>
+          <a:lstStyle/>
+          <a:p>
+            <a:endParaRPr lang="en-US"/>
+          </a:p>
+        </p:txBody>
       </p:sp>
       <p:sp>
         <p:nvSpPr>
@@ -4123,38 +4601,97 @@
           <a:lstStyle/>
           <a:p>
             <a:r>
+              <a:rPr dirty="0"/>
               <a:t>TIME: 44:00–49:00</a:t>
             </a:r>
           </a:p>
-          <a:p/>
-          <a:p>
-            <a:r>
-              <a:t>Demo 4. Switch to .venv-lakehouse and run dbt build --select customers --target lakehouse (measured 1 min 57 s). Do not run the full project live: every Spark statement costs ~20 s over Livy, so 48 nodes take 7.5 min even with 4 threads - run it before the talk and use that as the recording. The profile's lakehouse output points at LH_Jaffle_Shop (schema-enabled, schema jaffle_shop). Show the same model files, then the compiled customers.sql side by side with the Warehouse version: backticks vs brackets, coalesce(..., false) vs cast(... as bit), decimal vs numeric. Query the Delta table in a notebook or the SQL endpoint: 6 new, 929 returning, total 671,425.37. Use the recording if the session is not ready within 20 seconds. Be explicit that the raw tables were loaded into the Lakehouse separately (CSV upload, Load to table) and that the SQL was designed to be compatible.</a:t>
-            </a:r>
-          </a:p>
-          <a:p/>
-          <a:p>
-            <a:r>
+          <a:p>
+            <a:endParaRPr dirty="0"/>
+          </a:p>
+          <a:p>
+            <a:r>
+              <a:rPr dirty="0"/>
+              <a:t>Demo 4. Switch to .</a:t>
+            </a:r>
+            <a:r>
+              <a:rPr dirty="0" err="1"/>
+              <a:t>venv</a:t>
+            </a:r>
+            <a:r>
+              <a:rPr dirty="0"/>
+              <a:t>-lakehouse and run dbt build --select customers --target lakehouse (measured 1 min 57 s). Do not run the full project live: every Spark statement costs ~20 s over Livy, so 48 nodes take 7.5 min even with 4 threads - run it before the talk and use that as the recording. The profile's lakehouse output points at </a:t>
+            </a:r>
+            <a:r>
+              <a:rPr dirty="0" err="1"/>
+              <a:t>LH_Jaffle_Shop</a:t>
+            </a:r>
+            <a:r>
+              <a:rPr dirty="0"/>
+              <a:t> (schema-enabled, schema </a:t>
+            </a:r>
+            <a:r>
+              <a:rPr dirty="0" err="1"/>
+              <a:t>jaffle_shop</a:t>
+            </a:r>
+            <a:r>
+              <a:rPr dirty="0"/>
+              <a:t>). Show the same model files, then the compiled </a:t>
+            </a:r>
+            <a:r>
+              <a:rPr dirty="0" err="1"/>
+              <a:t>customers.sql</a:t>
+            </a:r>
+            <a:r>
+              <a:rPr dirty="0"/>
+              <a:t> side by side with the Warehouse version: backticks vs brackets, coalesce(..., false) vs cast(... as bit), decimal vs numeric. Query the Delta table in a notebook or the SQL endpoint: 6 new, 929 returning, total 671,425.37. Use the recording if the session is not ready within 20 seconds. Be explicit that the raw tables were loaded into the Lakehouse separately (CSV upload, Load to table) and that the SQL was designed to be compatible.</a:t>
+            </a:r>
+          </a:p>
+          <a:p>
+            <a:endParaRPr dirty="0"/>
+          </a:p>
+          <a:p>
+            <a:r>
+              <a:rPr dirty="0"/>
               <a:t>[Sources]</a:t>
             </a:r>
           </a:p>
           <a:p>
             <a:r>
+              <a:rPr dirty="0"/>
               <a:t>https://docs.getdbt.com/docs/core/connect-data-platform/fabricspark-setup</a:t>
             </a:r>
           </a:p>
           <a:p>
             <a:r>
-              <a:t>https://github.com/aboerger/getting-started-with-dbt (jaffle_shop/profiles.yml)</a:t>
-            </a:r>
-          </a:p>
-          <a:p>
-            <a:r>
+              <a:rPr dirty="0"/>
+              <a:t>https://github.com/aboerger/getting-started-with-dbt (</a:t>
+            </a:r>
+            <a:r>
+              <a:rPr dirty="0" err="1"/>
+              <a:t>jaffle_shop</a:t>
+            </a:r>
+            <a:r>
+              <a:rPr dirty="0"/>
+              <a:t>/</a:t>
+            </a:r>
+            <a:r>
+              <a:rPr dirty="0" err="1"/>
+              <a:t>profiles.yml</a:t>
+            </a:r>
+            <a:r>
+              <a:rPr dirty="0"/>
+              <a:t>)</a:t>
+            </a:r>
+          </a:p>
+          <a:p>
+            <a:r>
+              <a:rPr dirty="0"/>
               <a:t>Theme: user-supplied AANA AI Adoption Roadmap.pptx, visual reference only.</a:t>
             </a:r>
           </a:p>
           <a:p>
             <a:r>
+              <a:rPr dirty="0"/>
               <a:t>[/Sources]</a:t>
             </a:r>
           </a:p>
@@ -4215,6 +4752,13 @@
           </p:nvPr>
         </p:nvSpPr>
         <p:spPr/>
+        <p:txBody>
+          <a:bodyPr/>
+          <a:lstStyle/>
+          <a:p>
+            <a:endParaRPr lang="en-US"/>
+          </a:p>
+        </p:txBody>
       </p:sp>
       <p:sp>
         <p:nvSpPr>
@@ -4232,47 +4776,71 @@
           <a:lstStyle/>
           <a:p>
             <a:r>
+              <a:rPr dirty="0"/>
               <a:t>TIME: 49:00–51:00</a:t>
             </a:r>
           </a:p>
           <a:p>
-            <a:endParaRPr/>
-          </a:p>
-          <a:p>
-            <a:r>
-              <a:t>For the team, connect the example to dbt over curated Lakehouse data. Use type fabricspark and method livy for the demonstrated path. Schema-enabled profile uses lakehouse name plus a separate schema; schema-less profiles use the lakehouse name as schema. Newer releases expose more connection modes; those are version-specific extensions. Do not promise starter-pool hits or fixed startup time.</a:t>
-            </a:r>
-          </a:p>
-          <a:p>
-            <a:endParaRPr/>
-          </a:p>
-          <a:p>
-            <a:r>
+            <a:endParaRPr dirty="0"/>
+          </a:p>
+          <a:p>
+            <a:r>
+              <a:rPr dirty="0"/>
+              <a:t>For the team, connect the example to dbt over curated Lakehouse data. Use type </a:t>
+            </a:r>
+            <a:r>
+              <a:rPr dirty="0" err="1"/>
+              <a:t>fabricspark</a:t>
+            </a:r>
+            <a:r>
+              <a:rPr dirty="0"/>
+              <a:t> and method </a:t>
+            </a:r>
+            <a:r>
+              <a:rPr dirty="0" err="1"/>
+              <a:t>livy</a:t>
+            </a:r>
+            <a:r>
+              <a:rPr dirty="0"/>
+              <a:t> for the demonstrated path. Schema-enabled profile uses lakehouse name plus a separate schema; schema-less profiles use the lakehouse name as schema. Newer releases expose more connection modes; those are version-specific extensions. Do not promise starter-pool hits or fixed startup time.</a:t>
+            </a:r>
+          </a:p>
+          <a:p>
+            <a:endParaRPr dirty="0"/>
+          </a:p>
+          <a:p>
+            <a:r>
+              <a:rPr dirty="0"/>
               <a:t>[Sources]</a:t>
             </a:r>
           </a:p>
           <a:p>
             <a:r>
+              <a:rPr dirty="0"/>
               <a:t>https://docs.getdbt.com/docs/local/connect-data-platform/fabricspark-setup</a:t>
             </a:r>
           </a:p>
           <a:p>
             <a:r>
+              <a:rPr dirty="0"/>
               <a:t>https://github.com/microsoft/dbt-fabricspark/blob/main/README.md</a:t>
             </a:r>
           </a:p>
           <a:p>
             <a:r>
+              <a:rPr dirty="0"/>
               <a:t>https://pypi.org/project/dbt-fabricspark/</a:t>
             </a:r>
           </a:p>
           <a:p>
             <a:r>
+              <a:rPr dirty="0"/>
               <a:t>Theme: user-supplied AANA AI Adoption Roadmap.pptx, visual reference only.</a:t>
             </a:r>
           </a:p>
           <a:p>
             <a:r>
+              <a:rPr dirty="0"/>
               <a:t>[/Sources]</a:t>
             </a:r>
           </a:p>
@@ -4333,6 +4901,13 @@
           </p:nvPr>
         </p:nvSpPr>
         <p:spPr/>
+        <p:txBody>
+          <a:bodyPr/>
+          <a:lstStyle/>
+          <a:p>
+            <a:endParaRPr lang="en-US"/>
+          </a:p>
+        </p:txBody>
       </p:sp>
       <p:sp>
         <p:nvSpPr>
@@ -4350,38 +4925,81 @@
           <a:lstStyle/>
           <a:p>
             <a:r>
+              <a:rPr dirty="0"/>
               <a:t>TIME: optional, ~4 minutes taken from the discussion slot</a:t>
             </a:r>
           </a:p>
-          <a:p/>
-          <a:p>
-            <a:r>
-              <a:t>Demo 5. Fabric SQL database is Azure SQL Database technology inside Fabric; dbt-sqlserver connects with Entra (CLI) authentication. Switch to .venv-sqldb, run dbt debug --target sqldb, then dbt build --target sqldb: the same 935 customers, 61,948 orders and 671,425.37 total. Be explicit that the adapter targets Azure SQL and is not certified for Fabric SQL database — evaluate, don't promise. Where it would run for real: the Fabric dbt job's Azure SQL adapter with a service principal, or the Azure DevOps pipeline. If skipped, the story still stands with two engines.</a:t>
-            </a:r>
-          </a:p>
-          <a:p/>
-          <a:p>
-            <a:r>
+          <a:p>
+            <a:endParaRPr dirty="0"/>
+          </a:p>
+          <a:p>
+            <a:r>
+              <a:rPr dirty="0"/>
+              <a:t>Demo 5. Fabric SQL database is Azure SQL Database technology inside Fabric; dbt-</a:t>
+            </a:r>
+            <a:r>
+              <a:rPr dirty="0" err="1"/>
+              <a:t>sqlserver</a:t>
+            </a:r>
+            <a:r>
+              <a:rPr dirty="0"/>
+              <a:t> connects with Entra (CLI) authentication. Switch to .</a:t>
+            </a:r>
+            <a:r>
+              <a:rPr dirty="0" err="1"/>
+              <a:t>venv-sqldb</a:t>
+            </a:r>
+            <a:r>
+              <a:rPr dirty="0"/>
+              <a:t>, run dbt debug --target </a:t>
+            </a:r>
+            <a:r>
+              <a:rPr dirty="0" err="1"/>
+              <a:t>sqldb</a:t>
+            </a:r>
+            <a:r>
+              <a:rPr dirty="0"/>
+              <a:t>, then dbt build --target </a:t>
+            </a:r>
+            <a:r>
+              <a:rPr dirty="0" err="1"/>
+              <a:t>sqldb</a:t>
+            </a:r>
+            <a:r>
+              <a:rPr dirty="0"/>
+              <a:t>: the same 935 customers, 61,948 orders and 671,425.37 total. Be explicit that the adapter targets Azure SQL and is not certified for Fabric SQL database — evaluate, don't promise. Where it would run for real: the Fabric dbt job's Azure SQL adapter with a service principal, or the Azure DevOps pipeline. If skipped, the story still stands with two engines.</a:t>
+            </a:r>
+          </a:p>
+          <a:p>
+            <a:endParaRPr dirty="0"/>
+          </a:p>
+          <a:p>
+            <a:r>
+              <a:rPr dirty="0"/>
               <a:t>[Sources]</a:t>
             </a:r>
           </a:p>
           <a:p>
             <a:r>
+              <a:rPr dirty="0"/>
               <a:t>https://docs.getdbt.com/docs/core/connect-data-platform/mssql-setup</a:t>
             </a:r>
           </a:p>
           <a:p>
             <a:r>
+              <a:rPr dirty="0"/>
               <a:t>https://learn.microsoft.com/fabric/database/sql/overview</a:t>
             </a:r>
           </a:p>
           <a:p>
             <a:r>
+              <a:rPr dirty="0"/>
               <a:t>Theme: user-supplied AANA AI Adoption Roadmap.pptx, visual reference only.</a:t>
             </a:r>
           </a:p>
           <a:p>
             <a:r>
+              <a:rPr dirty="0"/>
               <a:t>[/Sources]</a:t>
             </a:r>
           </a:p>
@@ -4442,6 +5060,13 @@
           </p:nvPr>
         </p:nvSpPr>
         <p:spPr/>
+        <p:txBody>
+          <a:bodyPr/>
+          <a:lstStyle/>
+          <a:p>
+            <a:endParaRPr lang="en-US"/>
+          </a:p>
+        </p:txBody>
       </p:sp>
       <p:sp>
         <p:nvSpPr>
@@ -4459,43 +5084,87 @@
           <a:lstStyle/>
           <a:p>
             <a:r>
+              <a:rPr dirty="0"/>
               <a:t>TIME: 51:00–53:00</a:t>
             </a:r>
           </a:p>
-          <a:p/>
-          <a:p>
-            <a:r>
-              <a:t>Examples: a Microsoft-hosted Azure DevOps agent (Fabric is public; self-hosted only for on-prem targets); the Fabric dbt job pulling the same GitHub folder; NB_dbt_Runner, a Python notebook that runs the same project against any of the three targets; an Airflow task or container where available. These are alternative hosts, not four more live demos — show a finished pipeline run and the notebook output if time allows. Ingestion should complete before transformation; downstream refresh should depend on successful validation. Archive manifest and run_results per run. A Git merge is not itself a data refresh.</a:t>
-            </a:r>
-          </a:p>
-          <a:p/>
-          <a:p>
-            <a:r>
+          <a:p>
+            <a:endParaRPr dirty="0"/>
+          </a:p>
+          <a:p>
+            <a:r>
+              <a:rPr dirty="0"/>
+              <a:t>Examples: a Microsoft-hosted Azure DevOps agent (Fabric is public; self-hosted only for on-prem targets); the Fabric dbt job pulling the same GitHub folder; </a:t>
+            </a:r>
+            <a:r>
+              <a:rPr dirty="0" err="1"/>
+              <a:t>NB_dbt_Runner</a:t>
+            </a:r>
+            <a:r>
+              <a:rPr dirty="0"/>
+              <a:t>, a Python notebook that runs the same project against any of the three targets; an Airflow task or container where available. These are alternative hosts, not four more live demos — show a finished pipeline run and the notebook output if time allows. Ingestion should complete before transformation; downstream refresh should depend on successful validation. Archive manifest and </a:t>
+            </a:r>
+            <a:r>
+              <a:rPr dirty="0" err="1"/>
+              <a:t>run_results</a:t>
+            </a:r>
+            <a:r>
+              <a:rPr dirty="0"/>
+              <a:t> per run. A Git merge is not itself a data refresh.</a:t>
+            </a:r>
+          </a:p>
+          <a:p>
+            <a:endParaRPr dirty="0"/>
+          </a:p>
+          <a:p>
+            <a:r>
+              <a:rPr dirty="0"/>
               <a:t>[Sources]</a:t>
             </a:r>
           </a:p>
           <a:p>
             <a:r>
+              <a:rPr dirty="0"/>
               <a:t>https://docs.getdbt.com/docs/deploy/deployments</a:t>
             </a:r>
           </a:p>
           <a:p>
             <a:r>
+              <a:rPr dirty="0"/>
               <a:t>https://docs.getdbt.com/reference/artifacts/dbt-artifacts</a:t>
             </a:r>
           </a:p>
           <a:p>
             <a:r>
-              <a:t>https://github.com/aboerger/getting-started-with-dbt (azure-pipelines.yml, workspace/NB_dbt_Runner.Notebook)</a:t>
-            </a:r>
-          </a:p>
-          <a:p>
-            <a:r>
+              <a:rPr dirty="0"/>
+              <a:t>https://github.com/aboerger/getting-started-with-dbt (azure-</a:t>
+            </a:r>
+            <a:r>
+              <a:rPr dirty="0" err="1"/>
+              <a:t>pipelines.yml</a:t>
+            </a:r>
+            <a:r>
+              <a:rPr dirty="0"/>
+              <a:t>, workspace/</a:t>
+            </a:r>
+            <a:r>
+              <a:rPr dirty="0" err="1"/>
+              <a:t>NB_dbt_Runner.Notebook</a:t>
+            </a:r>
+            <a:r>
+              <a:rPr dirty="0"/>
+              <a:t>)</a:t>
+            </a:r>
+          </a:p>
+          <a:p>
+            <a:r>
+              <a:rPr dirty="0"/>
               <a:t>Theme: user-supplied AANA AI Adoption Roadmap.pptx, visual reference only.</a:t>
             </a:r>
           </a:p>
           <a:p>
             <a:r>
+              <a:rPr dirty="0"/>
               <a:t>[/Sources]</a:t>
             </a:r>
           </a:p>
@@ -4556,6 +5225,13 @@
           </p:nvPr>
         </p:nvSpPr>
         <p:spPr/>
+        <p:txBody>
+          <a:bodyPr/>
+          <a:lstStyle/>
+          <a:p>
+            <a:endParaRPr lang="en-US"/>
+          </a:p>
+        </p:txBody>
       </p:sp>
       <p:sp>
         <p:nvSpPr>
@@ -4573,48 +5249,109 @@
           <a:lstStyle/>
           <a:p>
             <a:r>
+              <a:rPr dirty="0"/>
               <a:t>TIME: 53:00 (one minute, or appendix)</a:t>
             </a:r>
           </a:p>
-          <a:p/>
-          <a:p>
-            <a:r>
-              <a:t>Facts checked September 2026 on learn.microsoft.com: runtime v1.0 is dbt Core 1.11 with dbt-fabric 1.10.0, dbt-fabricspark 1.12.2, dbt-sqlserver 1.9.1, dbt-postgres and dbt-snowflake; Lakehouse support and a Data Factory dbt job activity exist; projects can be uploaded, started from the Jaffle Shop sample, or pulled from a GitHub repository (classic PAT, branch, read-only in the UI). No build caching, no state/defer, docs not rendered in Fabric. Our three DBT_Jaffle_Shop_* jobs pull the jaffle_shop folder of this repository on every run. Preview features move — re-check before presenting.</a:t>
-            </a:r>
-          </a:p>
-          <a:p/>
-          <a:p>
-            <a:r>
+          <a:p>
+            <a:endParaRPr dirty="0"/>
+          </a:p>
+          <a:p>
+            <a:r>
+              <a:rPr dirty="0"/>
+              <a:t>Facts checked September 2026 on learn.microsoft.com: runtime v1.0 is dbt Core 1.11 with dbt-fabric 1.10.0, dbt-</a:t>
+            </a:r>
+            <a:r>
+              <a:rPr dirty="0" err="1"/>
+              <a:t>fabricspark</a:t>
+            </a:r>
+            <a:r>
+              <a:rPr dirty="0"/>
+              <a:t> 1.12.2, dbt-</a:t>
+            </a:r>
+            <a:r>
+              <a:rPr dirty="0" err="1"/>
+              <a:t>sqlserver</a:t>
+            </a:r>
+            <a:r>
+              <a:rPr dirty="0"/>
+              <a:t> 1.9.1, dbt-</a:t>
+            </a:r>
+            <a:r>
+              <a:rPr dirty="0" err="1"/>
+              <a:t>postgres</a:t>
+            </a:r>
+            <a:r>
+              <a:rPr dirty="0"/>
+              <a:t> and dbt-snowflake; Lakehouse support and a Data Factory dbt job activity exist; projects can be uploaded, started from the </a:t>
+            </a:r>
+            <a:r>
+              <a:rPr dirty="0" err="1"/>
+              <a:t>Jaffle</a:t>
+            </a:r>
+            <a:r>
+              <a:rPr dirty="0"/>
+              <a:t> Shop sample, or pulled from a GitHub repository (classic PAT, branch, read-only in the UI). No build caching, no state/defer, docs not rendered in Fabric. Our three </a:t>
+            </a:r>
+            <a:r>
+              <a:rPr dirty="0" err="1"/>
+              <a:t>DBT_Jaffle_Shop</a:t>
+            </a:r>
+            <a:r>
+              <a:rPr dirty="0"/>
+              <a:t>_* jobs pull the </a:t>
+            </a:r>
+            <a:r>
+              <a:rPr dirty="0" err="1"/>
+              <a:t>jaffle_shop</a:t>
+            </a:r>
+            <a:r>
+              <a:rPr dirty="0"/>
+              <a:t> folder of this repository on every run. Preview features move — re-check before presenting.</a:t>
+            </a:r>
+          </a:p>
+          <a:p>
+            <a:endParaRPr dirty="0"/>
+          </a:p>
+          <a:p>
+            <a:r>
+              <a:rPr dirty="0"/>
               <a:t>[Sources]</a:t>
             </a:r>
           </a:p>
           <a:p>
             <a:r>
+              <a:rPr dirty="0"/>
               <a:t>https://learn.microsoft.com/fabric/data-factory/dbt-job-overview</a:t>
             </a:r>
           </a:p>
           <a:p>
             <a:r>
+              <a:rPr dirty="0"/>
               <a:t>https://learn.microsoft.com/fabric/data-factory/dbt-job-configure</a:t>
             </a:r>
           </a:p>
           <a:p>
             <a:r>
+              <a:rPr dirty="0"/>
               <a:t>https://learn.microsoft.com/fabric/data-factory/dbt-run-github</a:t>
             </a:r>
           </a:p>
           <a:p>
             <a:r>
+              <a:rPr dirty="0"/>
               <a:t>https://learn.microsoft.com/fabric/data-factory/dbt-job-activity</a:t>
             </a:r>
           </a:p>
           <a:p>
             <a:r>
+              <a:rPr dirty="0"/>
               <a:t>Theme: user-supplied AANA AI Adoption Roadmap.pptx, visual reference only.</a:t>
             </a:r>
           </a:p>
           <a:p>
             <a:r>
+              <a:rPr dirty="0"/>
               <a:t>[/Sources]</a:t>
             </a:r>
           </a:p>
@@ -4675,6 +5412,13 @@
           </p:nvPr>
         </p:nvSpPr>
         <p:spPr/>
+        <p:txBody>
+          <a:bodyPr/>
+          <a:lstStyle/>
+          <a:p>
+            <a:endParaRPr lang="en-US"/>
+          </a:p>
+        </p:txBody>
       </p:sp>
       <p:sp>
         <p:nvSpPr>
@@ -4783,6 +5527,13 @@
           </p:nvPr>
         </p:nvSpPr>
         <p:spPr/>
+        <p:txBody>
+          <a:bodyPr/>
+          <a:lstStyle/>
+          <a:p>
+            <a:endParaRPr lang="en-US"/>
+          </a:p>
+        </p:txBody>
       </p:sp>
       <p:sp>
         <p:nvSpPr>
@@ -4800,52 +5551,61 @@
           <a:lstStyle/>
           <a:p>
             <a:r>
+              <a:rPr dirty="0"/>
               <a:t>TIME: Appendix</a:t>
             </a:r>
           </a:p>
           <a:p>
-            <a:endParaRPr/>
-          </a:p>
-          <a:p>
-            <a:r>
+            <a:endParaRPr dirty="0"/>
+          </a:p>
+          <a:p>
+            <a:r>
+              <a:rPr dirty="0"/>
               <a:t>Optional directions after the first successful project. A dbt snapshot is not a backup and does not capture changes that happen and revert between observations. Incremental design requires correctness before speed. Selective state-based CI and defer are follow-up topics, not prerequisites for today.</a:t>
             </a:r>
           </a:p>
           <a:p>
-            <a:endParaRPr/>
-          </a:p>
-          <a:p>
-            <a:r>
+            <a:endParaRPr dirty="0"/>
+          </a:p>
+          <a:p>
+            <a:r>
+              <a:rPr dirty="0"/>
               <a:t>[Sources]</a:t>
             </a:r>
           </a:p>
           <a:p>
             <a:r>
+              <a:rPr dirty="0"/>
               <a:t>https://docs.getdbt.com/docs/build/unit-tests</a:t>
             </a:r>
           </a:p>
           <a:p>
             <a:r>
+              <a:rPr dirty="0"/>
               <a:t>https://docs.getdbt.com/docs/build/jinja-macros</a:t>
             </a:r>
           </a:p>
           <a:p>
             <a:r>
+              <a:rPr dirty="0"/>
               <a:t>https://docs.getdbt.com/docs/build/incremental-models</a:t>
             </a:r>
           </a:p>
           <a:p>
             <a:r>
+              <a:rPr dirty="0"/>
               <a:t>https://docs.getdbt.com/docs/build/snapshots</a:t>
             </a:r>
           </a:p>
           <a:p>
             <a:r>
+              <a:rPr dirty="0"/>
               <a:t>Theme: user-supplied AANA AI Adoption Roadmap.pptx, visual reference only.</a:t>
             </a:r>
           </a:p>
           <a:p>
             <a:r>
+              <a:rPr dirty="0"/>
               <a:t>[/Sources]</a:t>
             </a:r>
           </a:p>
@@ -4906,6 +5666,13 @@
           </p:nvPr>
         </p:nvSpPr>
         <p:spPr/>
+        <p:txBody>
+          <a:bodyPr/>
+          <a:lstStyle/>
+          <a:p>
+            <a:endParaRPr lang="en-US"/>
+          </a:p>
+        </p:txBody>
       </p:sp>
       <p:sp>
         <p:nvSpPr>
@@ -4923,37 +5690,43 @@
           <a:lstStyle/>
           <a:p>
             <a:r>
+              <a:rPr dirty="0"/>
               <a:t>TIME: 55:00–60:00</a:t>
             </a:r>
           </a:p>
           <a:p>
-            <a:endParaRPr/>
-          </a:p>
-          <a:p>
-            <a:r>
+            <a:endParaRPr dirty="0"/>
+          </a:p>
+          <a:p>
+            <a:r>
+              <a:rPr dirty="0"/>
               <a:t>Protect five minutes for questions. If the room is quiet, ask: Where does the dbt process run? Does ref copy data between systems? What remains after a failing build? What would you test first? Answer: on a client or runner; no; existing objects can remain; choose an assertion tied to the grain or business rule.</a:t>
             </a:r>
           </a:p>
           <a:p>
-            <a:endParaRPr/>
-          </a:p>
-          <a:p>
-            <a:r>
+            <a:endParaRPr dirty="0"/>
+          </a:p>
+          <a:p>
+            <a:r>
+              <a:rPr dirty="0"/>
               <a:t>[Sources]</a:t>
             </a:r>
           </a:p>
           <a:p>
             <a:r>
+              <a:rPr dirty="0"/>
               <a:t>Original teaching scenario and synthetic demo data.</a:t>
             </a:r>
           </a:p>
           <a:p>
             <a:r>
+              <a:rPr dirty="0"/>
               <a:t>Theme: user-supplied AANA AI Adoption Roadmap.pptx, visual reference only.</a:t>
             </a:r>
           </a:p>
           <a:p>
             <a:r>
+              <a:rPr dirty="0"/>
               <a:t>[/Sources]</a:t>
             </a:r>
           </a:p>
@@ -5014,6 +5787,13 @@
           </p:nvPr>
         </p:nvSpPr>
         <p:spPr/>
+        <p:txBody>
+          <a:bodyPr/>
+          <a:lstStyle/>
+          <a:p>
+            <a:endParaRPr lang="en-US"/>
+          </a:p>
+        </p:txBody>
       </p:sp>
       <p:sp>
         <p:nvSpPr>
@@ -5142,6 +5922,13 @@
           </p:nvPr>
         </p:nvSpPr>
         <p:spPr/>
+        <p:txBody>
+          <a:bodyPr/>
+          <a:lstStyle/>
+          <a:p>
+            <a:endParaRPr lang="en-US"/>
+          </a:p>
+        </p:txBody>
       </p:sp>
       <p:sp>
         <p:nvSpPr>
@@ -5159,42 +5946,49 @@
           <a:lstStyle/>
           <a:p>
             <a:r>
+              <a:rPr dirty="0"/>
               <a:t>TIME: 03:00–05:00</a:t>
             </a:r>
           </a:p>
           <a:p>
-            <a:endParaRPr/>
-          </a:p>
-          <a:p>
-            <a:r>
+            <a:endParaRPr dirty="0"/>
+          </a:p>
+          <a:p>
+            <a:r>
+              <a:rPr dirty="0"/>
               <a:t>Define dbt as data build tool: a framework for developing, testing and documenting data transformations. A dbt model and a Power BI semantic model are different layers. Expand ELT once: extract, load, transform. Keep ingestion, transformation and serving distinct. In a lakehouse design, dbt can own selected Silver or Gold transformations after data is landed. It need not own every layer. dbt does not automatically ingest SAP, schedule source extraction, or create a Power BI semantic model.</a:t>
             </a:r>
           </a:p>
           <a:p>
-            <a:endParaRPr/>
-          </a:p>
-          <a:p>
-            <a:r>
+            <a:endParaRPr dirty="0"/>
+          </a:p>
+          <a:p>
+            <a:r>
+              <a:rPr dirty="0"/>
               <a:t>[Sources]</a:t>
             </a:r>
           </a:p>
           <a:p>
             <a:r>
+              <a:rPr dirty="0"/>
               <a:t>https://docs.getdbt.com/docs/introduction</a:t>
             </a:r>
           </a:p>
           <a:p>
             <a:r>
+              <a:rPr dirty="0"/>
               <a:t>https://docs.getdbt.com/docs/build/sql-models</a:t>
             </a:r>
           </a:p>
           <a:p>
             <a:r>
+              <a:rPr dirty="0"/>
               <a:t>Theme: user-supplied AANA AI Adoption Roadmap.pptx, visual reference only.</a:t>
             </a:r>
           </a:p>
           <a:p>
             <a:r>
+              <a:rPr dirty="0"/>
               <a:t>[/Sources]</a:t>
             </a:r>
           </a:p>
@@ -5255,6 +6049,13 @@
           </p:nvPr>
         </p:nvSpPr>
         <p:spPr/>
+        <p:txBody>
+          <a:bodyPr/>
+          <a:lstStyle/>
+          <a:p>
+            <a:endParaRPr lang="en-US"/>
+          </a:p>
+        </p:txBody>
       </p:sp>
       <p:sp>
         <p:nvSpPr>
@@ -5272,43 +6073,63 @@
           <a:lstStyle/>
           <a:p>
             <a:r>
+              <a:rPr dirty="0"/>
               <a:t>TIME: 05:00 (30 seconds, or skip)</a:t>
             </a:r>
           </a:p>
-          <a:p/>
-          <a:p>
-            <a:r>
-              <a:t>Vendor-reported adoption figures, checked September 2026. The point for a Microsoft audience: the workflow is the industry default, and Fabric now has first-party adapters (dbt-fabric, dbt-fabricspark) plus a native dbt job item, so the skills transfer in both directions. Re-verify the figures before presenting.</a:t>
-            </a:r>
-          </a:p>
-          <a:p/>
-          <a:p>
-            <a:r>
+          <a:p>
+            <a:endParaRPr dirty="0"/>
+          </a:p>
+          <a:p>
+            <a:r>
+              <a:rPr dirty="0"/>
+              <a:t>Vendor-reported adoption figures, checked September 2026. The point for a Microsoft audience: the workflow is the industry default, and Fabric now has first-party adapters (dbt-fabric, dbt-</a:t>
+            </a:r>
+            <a:r>
+              <a:rPr dirty="0" err="1"/>
+              <a:t>fabricspark</a:t>
+            </a:r>
+            <a:r>
+              <a:rPr dirty="0"/>
+              <a:t>) plus a native dbt job item, so the skills transfer in both directions. Re-verify the figures before presenting.</a:t>
+            </a:r>
+          </a:p>
+          <a:p>
+            <a:endParaRPr dirty="0"/>
+          </a:p>
+          <a:p>
+            <a:r>
+              <a:rPr dirty="0"/>
               <a:t>[Sources]</a:t>
             </a:r>
           </a:p>
           <a:p>
             <a:r>
+              <a:rPr dirty="0"/>
               <a:t>https://learn.microsoft.com/fabric/data-factory/dbt-job-overview</a:t>
             </a:r>
           </a:p>
           <a:p>
             <a:r>
+              <a:rPr dirty="0"/>
               <a:t>https://github.com/microsoft/dbt-fabric</a:t>
             </a:r>
           </a:p>
           <a:p>
             <a:r>
+              <a:rPr dirty="0"/>
               <a:t>https://github.com/microsoft/dbt-fabricspark</a:t>
             </a:r>
           </a:p>
           <a:p>
             <a:r>
+              <a:rPr dirty="0"/>
               <a:t>Theme: user-supplied AANA AI Adoption Roadmap.pptx, visual reference only.</a:t>
             </a:r>
           </a:p>
           <a:p>
             <a:r>
+              <a:rPr dirty="0"/>
               <a:t>[/Sources]</a:t>
             </a:r>
           </a:p>
@@ -5369,6 +6190,13 @@
           </p:nvPr>
         </p:nvSpPr>
         <p:spPr/>
+        <p:txBody>
+          <a:bodyPr/>
+          <a:lstStyle/>
+          <a:p>
+            <a:endParaRPr lang="en-US"/>
+          </a:p>
+        </p:txBody>
       </p:sp>
       <p:sp>
         <p:nvSpPr>
@@ -5386,42 +6214,49 @@
           <a:lstStyle/>
           <a:p>
             <a:r>
+              <a:rPr dirty="0"/>
               <a:t>TIME: Appendix</a:t>
             </a:r>
           </a:p>
           <a:p>
-            <a:endParaRPr/>
-          </a:p>
-          <a:p>
-            <a:r>
+            <a:endParaRPr dirty="0"/>
+          </a:p>
+          <a:p>
+            <a:r>
+              <a:rPr dirty="0"/>
               <a:t>Avoid conflating the open-source Core project with a paid managed service or assuming every Python adapter runs in Fusion. The teaching project intentionally targets Core. Discuss commercial options only if asked; no pricing claims are made.</a:t>
             </a:r>
           </a:p>
           <a:p>
-            <a:endParaRPr/>
-          </a:p>
-          <a:p>
-            <a:r>
+            <a:endParaRPr dirty="0"/>
+          </a:p>
+          <a:p>
+            <a:r>
+              <a:rPr dirty="0"/>
               <a:t>[Sources]</a:t>
             </a:r>
           </a:p>
           <a:p>
             <a:r>
+              <a:rPr dirty="0"/>
               <a:t>https://docs.getdbt.com/docs/introduction</a:t>
             </a:r>
           </a:p>
           <a:p>
             <a:r>
+              <a:rPr dirty="0"/>
               <a:t>https://docs.getdbt.com/docs/dbt/supported-features</a:t>
             </a:r>
           </a:p>
           <a:p>
             <a:r>
+              <a:rPr dirty="0"/>
               <a:t>Theme: user-supplied AANA AI Adoption Roadmap.pptx, visual reference only.</a:t>
             </a:r>
           </a:p>
           <a:p>
             <a:r>
+              <a:rPr dirty="0"/>
               <a:t>[/Sources]</a:t>
             </a:r>
           </a:p>
@@ -5482,6 +6317,13 @@
           </p:nvPr>
         </p:nvSpPr>
         <p:spPr/>
+        <p:txBody>
+          <a:bodyPr/>
+          <a:lstStyle/>
+          <a:p>
+            <a:endParaRPr lang="en-US"/>
+          </a:p>
+        </p:txBody>
       </p:sp>
       <p:sp>
         <p:nvSpPr>
@@ -5499,42 +6341,49 @@
           <a:lstStyle/>
           <a:p>
             <a:r>
+              <a:rPr dirty="0"/>
               <a:t>TIME: 05:00–06:30</a:t>
             </a:r>
           </a:p>
           <a:p>
-            <a:endParaRPr/>
-          </a:p>
-          <a:p>
-            <a:r>
+            <a:endParaRPr dirty="0"/>
+          </a:p>
+          <a:p>
+            <a:r>
+              <a:rPr dirty="0"/>
               <a:t>Distinguish where the dbt process runs from where transformation compute runs. A laptop can issue work to SQL Server or Fabric Spark. Moving that process to a build agent changes the host and credentials, not the business SQL. The Core CLI does not need to be installed on the database server.</a:t>
             </a:r>
           </a:p>
           <a:p>
-            <a:endParaRPr/>
-          </a:p>
-          <a:p>
-            <a:r>
+            <a:endParaRPr dirty="0"/>
+          </a:p>
+          <a:p>
+            <a:r>
+              <a:rPr dirty="0"/>
               <a:t>[Sources]</a:t>
             </a:r>
           </a:p>
           <a:p>
             <a:r>
+              <a:rPr dirty="0"/>
               <a:t>https://docs.getdbt.com/docs/build/sql-models</a:t>
             </a:r>
           </a:p>
           <a:p>
             <a:r>
+              <a:rPr dirty="0"/>
               <a:t>https://docs.getdbt.com/docs/deploy/deployments</a:t>
             </a:r>
           </a:p>
           <a:p>
             <a:r>
+              <a:rPr dirty="0"/>
               <a:t>Theme: user-supplied AANA AI Adoption Roadmap.pptx, visual reference only.</a:t>
             </a:r>
           </a:p>
           <a:p>
             <a:r>
+              <a:rPr dirty="0"/>
               <a:t>[/Sources]</a:t>
             </a:r>
           </a:p>
@@ -5595,6 +6444,13 @@
           </p:nvPr>
         </p:nvSpPr>
         <p:spPr/>
+        <p:txBody>
+          <a:bodyPr/>
+          <a:lstStyle/>
+          <a:p>
+            <a:endParaRPr lang="en-US"/>
+          </a:p>
+        </p:txBody>
       </p:sp>
       <p:sp>
         <p:nvSpPr>
@@ -5615,13 +6471,17 @@
               <a:t>TIME: 06:30–07:15</a:t>
             </a:r>
           </a:p>
-          <a:p/>
+          <a:p>
+            <a:endParaRPr/>
+          </a:p>
           <a:p>
             <a:r>
               <a:t>Eight words, one screen. Use the project's own examples: stg_orders is a model, raw_orders.csv is a seed that lands in the raw schema, source('ecom', 'raw_orders') is how the staging model reads it, ref('orders') is how customers reads the orders mart. Today's raw tables are seeds loaded once and then declared as sources — that is the shape a real project has, with ingestion replacing the seed. One profiles.yml holds three targets; the target, not the model, picks the adapter.</a:t>
             </a:r>
           </a:p>
-          <a:p/>
+          <a:p>
+            <a:endParaRPr/>
+          </a:p>
           <a:p>
             <a:r>
               <a:t>[Sources]</a:t>
@@ -5704,6 +6564,13 @@
           </p:nvPr>
         </p:nvSpPr>
         <p:spPr/>
+        <p:txBody>
+          <a:bodyPr/>
+          <a:lstStyle/>
+          <a:p>
+            <a:endParaRPr lang="en-US"/>
+          </a:p>
+        </p:txBody>
       </p:sp>
       <p:sp>
         <p:nvSpPr>
@@ -5721,43 +6588,87 @@
           <a:lstStyle/>
           <a:p>
             <a:r>
+              <a:rPr dirty="0"/>
               <a:t>TIME: 06:30–08:00</a:t>
             </a:r>
           </a:p>
-          <a:p/>
-          <a:p>
-            <a:r>
-              <a:t>Preview the project tree, but defer terminal execution. The Jaffle Shop project has six raw CSVs (seeds), six staging views and six marts; the order branch (stg_orders → order_items → orders → customers) is the one we follow all hour. Seeds stand in for ingestion: they are loaded once per engine and declared as sources. Explain that the YAML filename can vary; dbt_project.yml is special. Distinguish the project from the installed adapter.</a:t>
-            </a:r>
-          </a:p>
-          <a:p/>
-          <a:p>
-            <a:r>
+          <a:p>
+            <a:endParaRPr dirty="0"/>
+          </a:p>
+          <a:p>
+            <a:r>
+              <a:rPr dirty="0"/>
+              <a:t>Preview the project tree, but defer terminal execution. The </a:t>
+            </a:r>
+            <a:r>
+              <a:rPr dirty="0" err="1"/>
+              <a:t>Jaffle</a:t>
+            </a:r>
+            <a:r>
+              <a:rPr dirty="0"/>
+              <a:t> Shop project has six raw CSVs (seeds), six staging views and six marts; the order branch (</a:t>
+            </a:r>
+            <a:r>
+              <a:rPr dirty="0" err="1"/>
+              <a:t>stg_orders</a:t>
+            </a:r>
+            <a:r>
+              <a:rPr dirty="0"/>
+              <a:t> → </a:t>
+            </a:r>
+            <a:r>
+              <a:rPr dirty="0" err="1"/>
+              <a:t>order_items</a:t>
+            </a:r>
+            <a:r>
+              <a:rPr dirty="0"/>
+              <a:t> → orders → customers) is the one we follow all hour. Seeds stand in for ingestion: they are loaded once per engine and declared as sources. Explain that the YAML filename can vary; </a:t>
+            </a:r>
+            <a:r>
+              <a:rPr dirty="0" err="1"/>
+              <a:t>dbt_project.yml</a:t>
+            </a:r>
+            <a:r>
+              <a:rPr dirty="0"/>
+              <a:t> is special. Distinguish the project from the installed adapter.</a:t>
+            </a:r>
+          </a:p>
+          <a:p>
+            <a:endParaRPr dirty="0"/>
+          </a:p>
+          <a:p>
+            <a:r>
+              <a:rPr dirty="0"/>
               <a:t>[Sources]</a:t>
             </a:r>
           </a:p>
           <a:p>
             <a:r>
+              <a:rPr dirty="0"/>
               <a:t>https://docs.getdbt.com/docs/build/sql-models</a:t>
             </a:r>
           </a:p>
           <a:p>
             <a:r>
+              <a:rPr dirty="0"/>
               <a:t>https://docs.getdbt.com/docs/build/data-tests</a:t>
             </a:r>
           </a:p>
           <a:p>
             <a:r>
+              <a:rPr dirty="0"/>
               <a:t>https://github.com/dbt-labs/jaffle-shop</a:t>
             </a:r>
           </a:p>
           <a:p>
             <a:r>
+              <a:rPr dirty="0"/>
               <a:t>Theme: user-supplied AANA AI Adoption Roadmap.pptx, visual reference only.</a:t>
             </a:r>
           </a:p>
           <a:p>
             <a:r>
+              <a:rPr dirty="0"/>
               <a:t>[/Sources]</a:t>
             </a:r>
           </a:p>
@@ -5818,6 +6729,13 @@
           </p:nvPr>
         </p:nvSpPr>
         <p:spPr/>
+        <p:txBody>
+          <a:bodyPr/>
+          <a:lstStyle/>
+          <a:p>
+            <a:endParaRPr lang="en-US"/>
+          </a:p>
+        </p:txBody>
       </p:sp>
       <p:sp>
         <p:nvSpPr>
@@ -5838,13 +6756,17 @@
               <a:t>TIME: 08:00–10:00</a:t>
             </a:r>
           </a:p>
-          <a:p/>
+          <a:p>
+            <a:endParaRPr/>
+          </a:p>
           <a:p>
             <a:r>
               <a:t>Introduce DAG as directed acyclic graph, then say dependency graph thereafter. Show source() and ref() in one line each: staging models read the raw tables through source('ecom', …); marts read other models through ref(). cents_to_dollars is a project macro — mention it, do not explain Jinja yet. In the actual graph five source branches join at order_items and orders; this slide follows only the order branch. A seed becomes a source node only because __sources.yml declares it.</a:t>
             </a:r>
           </a:p>
-          <a:p/>
+          <a:p>
+            <a:endParaRPr/>
+          </a:p>
           <a:p>
             <a:r>
               <a:t>[Sources]</a:t>
@@ -8134,7 +9056,7 @@
           <a:lstStyle/>
           <a:p>
             <a:fld id="{C6FD3620-A33D-4624-9CAB-9F02D195D2C5}" type="datetime1">
-              <a:t>9/8/2026</a:t>
+              <a:t>9/9/2026</a:t>
             </a:fld>
             <a:endParaRPr/>
           </a:p>
@@ -11263,18 +12185,7 @@
                 <a:ea typeface="Frutiger"/>
                 <a:cs typeface="Frutiger"/>
               </a:rPr>
-              <a:t>Getting Started with </a:t>
-            </a:r>
-            <a:r>
-              <a:rPr lang="en-US" sz="7801" b="1" spc="-156" dirty="0" err="1">
-                <a:solidFill>
-                  <a:srgbClr val="FFFFFF"/>
-                </a:solidFill>
-                <a:latin typeface="Frutiger"/>
-                <a:ea typeface="Frutiger"/>
-                <a:cs typeface="Frutiger"/>
-              </a:rPr>
-              <a:t>dbt</a:t>
+              <a:t>Getting Started with dbt</a:t>
             </a:r>
             <a:endParaRPr sz="7801" dirty="0"/>
           </a:p>
@@ -11360,57 +12271,6 @@
       </p:grpSpPr>
       <p:sp>
         <p:nvSpPr>
-          <p:cNvPr id="2" name="Text 0">
-            <a:extLst>
-              <a:ext uri="{FF2B5EF4-FFF2-40B4-BE49-F238E27FC236}">
-                <a16:creationId xmlns:a16="http://schemas.microsoft.com/office/drawing/2014/main" id="{EBF2AD33-830A-48C5-90B4-ADC3835E0158}"/>
-              </a:ext>
-            </a:extLst>
-          </p:cNvPr>
-          <p:cNvSpPr>
-            <a:spLocks noGrp="1"/>
-          </p:cNvSpPr>
-          <p:nvPr/>
-        </p:nvSpPr>
-        <p:spPr>
-          <a:xfrm>
-            <a:off x="838201" y="495302"/>
-            <a:ext cx="15240000" cy="392311"/>
-          </a:xfrm>
-          <a:prstGeom prst="rect">
-            <a:avLst/>
-          </a:prstGeom>
-          <a:noFill/>
-        </p:spPr>
-        <p:txBody>
-          <a:bodyPr wrap="square" lIns="25401" tIns="25401" rIns="25401" bIns="25401" anchor="t">
-            <a:normAutofit/>
-          </a:bodyPr>
-          <a:lstStyle/>
-          <a:p>
-            <a:pPr>
-              <a:lnSpc>
-                <a:spcPct val="120000"/>
-              </a:lnSpc>
-              <a:buNone/>
-            </a:pPr>
-            <a:r>
-              <a:rPr sz="1801" b="1" spc="361">
-                <a:solidFill>
-                  <a:srgbClr val="E40046"/>
-                </a:solidFill>
-                <a:latin typeface="Frutiger"/>
-                <a:ea typeface="Frutiger"/>
-                <a:cs typeface="Frutiger"/>
-              </a:rPr>
-              <a:t>MATERIALIZATIONS</a:t>
-            </a:r>
-            <a:endParaRPr sz="1801"/>
-          </a:p>
-        </p:txBody>
-      </p:sp>
-      <p:sp>
-        <p:nvSpPr>
           <p:cNvPr id="3" name="Text 1">
             <a:extLst>
               <a:ext uri="{FF2B5EF4-FFF2-40B4-BE49-F238E27FC236}">
@@ -11446,7 +12306,7 @@
               <a:buNone/>
             </a:pPr>
             <a:r>
-              <a:rPr sz="4651" b="1" spc="-69">
+              <a:rPr lang="en-US" sz="4651" b="1" spc="-69" dirty="0">
                 <a:solidFill>
                   <a:srgbClr val="001F6B"/>
                 </a:solidFill>
@@ -11454,9 +12314,9 @@
                 <a:ea typeface="Frutiger"/>
                 <a:cs typeface="Frutiger"/>
               </a:rPr>
-              <a:t>Same SELECT, different storage</a:t>
-            </a:r>
-            <a:endParaRPr sz="4651"/>
+              <a:t>Materializations</a:t>
+            </a:r>
+            <a:endParaRPr sz="4651" dirty="0"/>
           </a:p>
         </p:txBody>
       </p:sp>
@@ -11622,7 +12482,7 @@
               <a:buNone/>
             </a:pPr>
             <a:r>
-              <a:rPr sz="1801">
+              <a:rPr sz="1801" dirty="0">
                 <a:solidFill>
                   <a:srgbClr val="667780"/>
                 </a:solidFill>
@@ -11632,7 +12492,7 @@
               </a:rPr>
               <a:t>Getting started with dbt</a:t>
             </a:r>
-            <a:endParaRPr sz="1801"/>
+            <a:endParaRPr sz="1801" dirty="0"/>
           </a:p>
         </p:txBody>
       </p:sp>
@@ -12776,8 +13636,25 @@
                 <a:latin typeface="Consolas"/>
                 <a:cs typeface="Consolas"/>
               </a:rPr>
-              <a:t># dbt_project.yml</a:t>
-            </a:r>
+              <a:t># </a:t>
+            </a:r>
+            <a:r>
+              <a:rPr lang="en-US" sz="1500" dirty="0" err="1">
+                <a:solidFill>
+                  <a:srgbClr val="8E9DC5"/>
+                </a:solidFill>
+                <a:latin typeface="Consolas"/>
+                <a:cs typeface="Consolas"/>
+              </a:rPr>
+              <a:t>dbt_project.yml</a:t>
+            </a:r>
+            <a:endParaRPr lang="en-US" sz="1500" dirty="0">
+              <a:solidFill>
+                <a:srgbClr val="8E9DC5"/>
+              </a:solidFill>
+              <a:latin typeface="Consolas"/>
+              <a:cs typeface="Consolas"/>
+            </a:endParaRPr>
           </a:p>
           <a:p>
             <a:pPr>
@@ -13190,57 +14067,6 @@
       </p:grpSpPr>
       <p:sp>
         <p:nvSpPr>
-          <p:cNvPr id="2" name="Text 0">
-            <a:extLst>
-              <a:ext uri="{FF2B5EF4-FFF2-40B4-BE49-F238E27FC236}">
-                <a16:creationId xmlns:a16="http://schemas.microsoft.com/office/drawing/2014/main" id="{78DD8E74-1DB1-4509-B6B8-8F85DE69EC33}"/>
-              </a:ext>
-            </a:extLst>
-          </p:cNvPr>
-          <p:cNvSpPr>
-            <a:spLocks noGrp="1"/>
-          </p:cNvSpPr>
-          <p:nvPr/>
-        </p:nvSpPr>
-        <p:spPr>
-          <a:xfrm>
-            <a:off x="838201" y="495302"/>
-            <a:ext cx="15240000" cy="392311"/>
-          </a:xfrm>
-          <a:prstGeom prst="rect">
-            <a:avLst/>
-          </a:prstGeom>
-          <a:noFill/>
-        </p:spPr>
-        <p:txBody>
-          <a:bodyPr wrap="square" lIns="25401" tIns="25401" rIns="25401" bIns="25401" anchor="t">
-            <a:normAutofit/>
-          </a:bodyPr>
-          <a:lstStyle/>
-          <a:p>
-            <a:pPr>
-              <a:lnSpc>
-                <a:spcPct val="120000"/>
-              </a:lnSpc>
-              <a:buNone/>
-            </a:pPr>
-            <a:r>
-              <a:rPr sz="1801" b="1" spc="361">
-                <a:solidFill>
-                  <a:srgbClr val="E40046"/>
-                </a:solidFill>
-                <a:latin typeface="Frutiger"/>
-                <a:ea typeface="Frutiger"/>
-                <a:cs typeface="Frutiger"/>
-              </a:rPr>
-              <a:t>DEPENDENCIES</a:t>
-            </a:r>
-            <a:endParaRPr sz="1801"/>
-          </a:p>
-        </p:txBody>
-      </p:sp>
-      <p:sp>
-        <p:nvSpPr>
           <p:cNvPr id="3" name="Text 1">
             <a:extLst>
               <a:ext uri="{FF2B5EF4-FFF2-40B4-BE49-F238E27FC236}">
@@ -13276,7 +14102,7 @@
               <a:buNone/>
             </a:pPr>
             <a:r>
-              <a:rPr sz="4651" b="1" spc="-69">
+              <a:rPr lang="en-US" sz="4651" b="1" spc="-69" dirty="0">
                 <a:solidFill>
                   <a:srgbClr val="001F6B"/>
                 </a:solidFill>
@@ -13284,9 +14110,31 @@
                 <a:ea typeface="Frutiger"/>
                 <a:cs typeface="Frutiger"/>
               </a:rPr>
-              <a:t>ref() turns files into a graph</a:t>
-            </a:r>
-            <a:endParaRPr sz="4651"/>
+              <a:t>Dependencies using </a:t>
+            </a:r>
+            <a:r>
+              <a:rPr sz="4651" b="1" spc="-69" dirty="0">
+                <a:solidFill>
+                  <a:srgbClr val="001F6B"/>
+                </a:solidFill>
+                <a:latin typeface="Frutiger"/>
+                <a:ea typeface="Frutiger"/>
+                <a:cs typeface="Frutiger"/>
+              </a:rPr>
+              <a:t>ref(</a:t>
+            </a:r>
+            <a:r>
+              <a:rPr lang="en-US" sz="4651" b="1" spc="-69" dirty="0">
+                <a:solidFill>
+                  <a:srgbClr val="001F6B"/>
+                </a:solidFill>
+                <a:latin typeface="Frutiger"/>
+                <a:ea typeface="Frutiger"/>
+                <a:cs typeface="Frutiger"/>
+              </a:rPr>
+              <a:t>)</a:t>
+            </a:r>
+            <a:endParaRPr sz="4651" dirty="0"/>
           </a:p>
         </p:txBody>
       </p:sp>
@@ -13452,7 +14300,7 @@
               <a:buNone/>
             </a:pPr>
             <a:r>
-              <a:rPr sz="1801">
+              <a:rPr sz="1801" dirty="0">
                 <a:solidFill>
                   <a:srgbClr val="667780"/>
                 </a:solidFill>
@@ -13462,7 +14310,7 @@
               </a:rPr>
               <a:t>Getting started with dbt</a:t>
             </a:r>
-            <a:endParaRPr sz="1801"/>
+            <a:endParaRPr sz="1801" dirty="0"/>
           </a:p>
         </p:txBody>
       </p:sp>
@@ -13538,7 +14386,7 @@
         </p:spPr>
         <p:txBody>
           <a:bodyPr wrap="square" lIns="0" tIns="0" rIns="0" bIns="0" anchor="t">
-            <a:normAutofit/>
+            <a:normAutofit fontScale="92500"/>
           </a:bodyPr>
           <a:lstStyle/>
           <a:p>
@@ -13579,7 +14427,7 @@
         </p:spPr>
         <p:txBody>
           <a:bodyPr wrap="square" lIns="0" tIns="0" rIns="0" bIns="0" anchor="t">
-            <a:normAutofit fontScale="92500"/>
+            <a:normAutofit/>
           </a:bodyPr>
           <a:lstStyle/>
           <a:p>
@@ -13849,7 +14697,7 @@
         </p:spPr>
         <p:txBody>
           <a:bodyPr wrap="square" lIns="76200" tIns="25400" rIns="76200" bIns="25400" anchor="ctr">
-            <a:normAutofit/>
+            <a:normAutofit lnSpcReduction="10000"/>
           </a:bodyPr>
           <a:lstStyle/>
           <a:p>
@@ -13972,7 +14820,7 @@
         </p:spPr>
         <p:txBody>
           <a:bodyPr wrap="square" lIns="76200" tIns="25400" rIns="76200" bIns="25400" anchor="ctr">
-            <a:normAutofit/>
+            <a:normAutofit fontScale="92500" lnSpcReduction="10000"/>
           </a:bodyPr>
           <a:lstStyle/>
           <a:p>
@@ -14035,7 +14883,7 @@
         </p:spPr>
         <p:txBody>
           <a:bodyPr wrap="square" lIns="76200" tIns="25400" rIns="76200" bIns="25400" anchor="ctr">
-            <a:normAutofit/>
+            <a:normAutofit fontScale="92500"/>
           </a:bodyPr>
           <a:lstStyle/>
           <a:p>
@@ -14416,7 +15264,7 @@
         </p:spPr>
         <p:txBody>
           <a:bodyPr wrap="square" lIns="228600" tIns="203200" rIns="228600" bIns="228600" anchor="t">
-            <a:normAutofit fontScale="92500" lnSpcReduction="10000"/>
+            <a:normAutofit fontScale="92500" lnSpcReduction="20000"/>
           </a:bodyPr>
           <a:lstStyle/>
           <a:p>
@@ -14700,17 +15548,7 @@
                 <a:latin typeface="Consolas"/>
                 <a:cs typeface="Consolas"/>
               </a:rPr>
-              <a:t>)</a:t>
-            </a:r>
-            <a:r>
-              <a:rPr lang="en-US" sz="1400" dirty="0">
-                <a:solidFill>
-                  <a:srgbClr val="FFD27F"/>
-                </a:solidFill>
-                <a:latin typeface="Consolas"/>
-                <a:cs typeface="Consolas"/>
-              </a:rPr>
-              <a:t> as count_lifetime_orders,</a:t>
+              <a:t>) as count_lifetime_orders,</a:t>
             </a:r>
           </a:p>
           <a:p>
@@ -15233,6 +16071,1363 @@
       </p:grpSpPr>
       <p:sp>
         <p:nvSpPr>
+          <p:cNvPr id="3" name="Text 1">
+            <a:extLst>
+              <a:ext uri="{FF2B5EF4-FFF2-40B4-BE49-F238E27FC236}">
+                <a16:creationId xmlns:a16="http://schemas.microsoft.com/office/drawing/2014/main" id="{4EC90D35-304A-4ED8-BF67-87162AFBE388}"/>
+              </a:ext>
+            </a:extLst>
+          </p:cNvPr>
+          <p:cNvSpPr>
+            <a:spLocks noGrp="1"/>
+          </p:cNvSpPr>
+          <p:nvPr/>
+        </p:nvSpPr>
+        <p:spPr>
+          <a:xfrm>
+            <a:off x="838201" y="963812"/>
+            <a:ext cx="15240000" cy="640407"/>
+          </a:xfrm>
+          <a:prstGeom prst="rect">
+            <a:avLst/>
+          </a:prstGeom>
+          <a:noFill/>
+        </p:spPr>
+        <p:txBody>
+          <a:bodyPr wrap="square" lIns="25401" tIns="25401" rIns="25401" bIns="25401" anchor="t">
+            <a:normAutofit/>
+          </a:bodyPr>
+          <a:lstStyle/>
+          <a:p>
+            <a:pPr>
+              <a:lnSpc>
+                <a:spcPct val="79050"/>
+              </a:lnSpc>
+              <a:buNone/>
+            </a:pPr>
+            <a:r>
+              <a:rPr sz="4651" b="1" spc="-69" dirty="0" err="1">
+                <a:solidFill>
+                  <a:srgbClr val="001F6B"/>
+                </a:solidFill>
+                <a:latin typeface="Frutiger"/>
+                <a:ea typeface="Frutiger"/>
+                <a:cs typeface="Frutiger"/>
+              </a:rPr>
+              <a:t>schema.yml</a:t>
+            </a:r>
+            <a:r>
+              <a:rPr sz="4651" b="1" spc="-69" dirty="0">
+                <a:solidFill>
+                  <a:srgbClr val="001F6B"/>
+                </a:solidFill>
+                <a:latin typeface="Frutiger"/>
+                <a:ea typeface="Frutiger"/>
+                <a:cs typeface="Frutiger"/>
+              </a:rPr>
+              <a:t>: descriptions and tests</a:t>
+            </a:r>
+            <a:endParaRPr sz="4651" dirty="0"/>
+          </a:p>
+        </p:txBody>
+      </p:sp>
+      <p:pic>
+        <p:nvPicPr>
+          <p:cNvPr id="32" name="Image 0"/>
+          <p:cNvPicPr>
+            <a:picLocks noChangeAspect="1"/>
+          </p:cNvPicPr>
+          <p:nvPr/>
+        </p:nvPicPr>
+        <p:blipFill>
+          <a:blip r:embed="rId3"/>
+          <a:srcRect t="-5" b="-5"/>
+          <a:stretch/>
+        </p:blipFill>
+        <p:spPr>
+          <a:xfrm>
+            <a:off x="16412620" y="571500"/>
+            <a:ext cx="1037182" cy="514350"/>
+          </a:xfrm>
+          <a:prstGeom prst="rect">
+            <a:avLst/>
+          </a:prstGeom>
+        </p:spPr>
+      </p:pic>
+      <p:sp>
+        <p:nvSpPr>
+          <p:cNvPr id="5" name="Shape 2">
+            <a:extLst>
+              <a:ext uri="{FF2B5EF4-FFF2-40B4-BE49-F238E27FC236}">
+                <a16:creationId xmlns:a16="http://schemas.microsoft.com/office/drawing/2014/main" id="{619AE5D7-7CB4-4BEA-BB3F-D06573D3768F}"/>
+              </a:ext>
+            </a:extLst>
+          </p:cNvPr>
+          <p:cNvSpPr>
+            <a:spLocks noGrp="1"/>
+          </p:cNvSpPr>
+          <p:nvPr/>
+        </p:nvSpPr>
+        <p:spPr>
+          <a:xfrm>
+            <a:off x="838202" y="1813769"/>
+            <a:ext cx="16611600" cy="28574"/>
+          </a:xfrm>
+          <a:prstGeom prst="rect">
+            <a:avLst/>
+          </a:prstGeom>
+          <a:solidFill>
+            <a:srgbClr val="FF0000"/>
+          </a:solidFill>
+        </p:spPr>
+        <p:txBody>
+          <a:bodyPr/>
+          <a:lstStyle/>
+          <a:p>
+            <a:endParaRPr sz="1801"/>
+          </a:p>
+        </p:txBody>
+      </p:sp>
+      <p:sp>
+        <p:nvSpPr>
+          <p:cNvPr id="6" name="Shape 3">
+            <a:extLst>
+              <a:ext uri="{FF2B5EF4-FFF2-40B4-BE49-F238E27FC236}">
+                <a16:creationId xmlns:a16="http://schemas.microsoft.com/office/drawing/2014/main" id="{4913CC0E-0FDB-4091-96BC-623E005C1433}"/>
+              </a:ext>
+            </a:extLst>
+          </p:cNvPr>
+          <p:cNvSpPr>
+            <a:spLocks noGrp="1"/>
+          </p:cNvSpPr>
+          <p:nvPr/>
+        </p:nvSpPr>
+        <p:spPr>
+          <a:xfrm>
+            <a:off x="838202" y="1880445"/>
+            <a:ext cx="16611600" cy="28574"/>
+          </a:xfrm>
+          <a:prstGeom prst="rect">
+            <a:avLst/>
+          </a:prstGeom>
+          <a:solidFill>
+            <a:srgbClr val="3649A8"/>
+          </a:solidFill>
+        </p:spPr>
+        <p:txBody>
+          <a:bodyPr/>
+          <a:lstStyle/>
+          <a:p>
+            <a:endParaRPr sz="1801"/>
+          </a:p>
+        </p:txBody>
+      </p:sp>
+      <p:sp>
+        <p:nvSpPr>
+          <p:cNvPr id="25" name="Shape 22">
+            <a:extLst>
+              <a:ext uri="{FF2B5EF4-FFF2-40B4-BE49-F238E27FC236}">
+                <a16:creationId xmlns:a16="http://schemas.microsoft.com/office/drawing/2014/main" id="{B765AE01-8B3A-4F2B-9234-E1B2735FE6D0}"/>
+              </a:ext>
+            </a:extLst>
+          </p:cNvPr>
+          <p:cNvSpPr>
+            <a:spLocks noGrp="1"/>
+          </p:cNvSpPr>
+          <p:nvPr/>
+        </p:nvSpPr>
+        <p:spPr>
+          <a:xfrm>
+            <a:off x="838202" y="9294615"/>
+            <a:ext cx="16611600" cy="9525"/>
+          </a:xfrm>
+          <a:prstGeom prst="rect">
+            <a:avLst/>
+          </a:prstGeom>
+          <a:solidFill>
+            <a:srgbClr val="E2E7EB"/>
+          </a:solidFill>
+        </p:spPr>
+        <p:txBody>
+          <a:bodyPr/>
+          <a:lstStyle/>
+          <a:p>
+            <a:endParaRPr sz="1801"/>
+          </a:p>
+        </p:txBody>
+      </p:sp>
+      <p:sp>
+        <p:nvSpPr>
+          <p:cNvPr id="26" name="Text 23">
+            <a:extLst>
+              <a:ext uri="{FF2B5EF4-FFF2-40B4-BE49-F238E27FC236}">
+                <a16:creationId xmlns:a16="http://schemas.microsoft.com/office/drawing/2014/main" id="{5C5AFE6D-27B1-4C09-BBBE-19FE36BD27C8}"/>
+              </a:ext>
+            </a:extLst>
+          </p:cNvPr>
+          <p:cNvSpPr>
+            <a:spLocks noGrp="1"/>
+          </p:cNvSpPr>
+          <p:nvPr/>
+        </p:nvSpPr>
+        <p:spPr>
+          <a:xfrm>
+            <a:off x="838201" y="9513691"/>
+            <a:ext cx="7461945" cy="392311"/>
+          </a:xfrm>
+          <a:prstGeom prst="rect">
+            <a:avLst/>
+          </a:prstGeom>
+          <a:noFill/>
+        </p:spPr>
+        <p:txBody>
+          <a:bodyPr wrap="square" lIns="25401" tIns="25401" rIns="25401" bIns="25401" anchor="t">
+            <a:normAutofit/>
+          </a:bodyPr>
+          <a:lstStyle/>
+          <a:p>
+            <a:pPr>
+              <a:lnSpc>
+                <a:spcPct val="124000"/>
+              </a:lnSpc>
+              <a:buNone/>
+            </a:pPr>
+            <a:r>
+              <a:rPr sz="1801" dirty="0">
+                <a:solidFill>
+                  <a:srgbClr val="667780"/>
+                </a:solidFill>
+                <a:latin typeface="Frutiger"/>
+                <a:ea typeface="Frutiger"/>
+                <a:cs typeface="Frutiger"/>
+              </a:rPr>
+              <a:t>Getting started with dbt</a:t>
+            </a:r>
+            <a:endParaRPr sz="1801" dirty="0"/>
+          </a:p>
+        </p:txBody>
+      </p:sp>
+      <p:sp>
+        <p:nvSpPr>
+          <p:cNvPr id="28" name="Text 25">
+            <a:extLst>
+              <a:ext uri="{FF2B5EF4-FFF2-40B4-BE49-F238E27FC236}">
+                <a16:creationId xmlns:a16="http://schemas.microsoft.com/office/drawing/2014/main" id="{E1A6A13E-D079-4787-BA2C-26179E45E0AB}"/>
+              </a:ext>
+            </a:extLst>
+          </p:cNvPr>
+          <p:cNvSpPr>
+            <a:spLocks noGrp="1"/>
+          </p:cNvSpPr>
+          <p:nvPr/>
+        </p:nvSpPr>
+        <p:spPr>
+          <a:xfrm>
+            <a:off x="9987856" y="9513691"/>
+            <a:ext cx="7461945" cy="392311"/>
+          </a:xfrm>
+          <a:prstGeom prst="rect">
+            <a:avLst/>
+          </a:prstGeom>
+          <a:noFill/>
+        </p:spPr>
+        <p:txBody>
+          <a:bodyPr wrap="square" lIns="25401" tIns="25401" rIns="25401" bIns="25401" anchor="t">
+            <a:normAutofit/>
+          </a:bodyPr>
+          <a:lstStyle/>
+          <a:p>
+            <a:pPr algn="r">
+              <a:lnSpc>
+                <a:spcPct val="124000"/>
+              </a:lnSpc>
+              <a:buNone/>
+            </a:pPr>
+            <a:r>
+              <a:rPr lang="en-US" sz="1801">
+                <a:solidFill>
+                  <a:srgbClr val="667780"/>
+                </a:solidFill>
+                <a:latin typeface="Frutiger"/>
+                <a:ea typeface="Frutiger"/>
+                <a:cs typeface="Frutiger"/>
+              </a:rPr>
+              <a:t>13</a:t>
+            </a:r>
+            <a:endParaRPr sz="1801"/>
+          </a:p>
+        </p:txBody>
+      </p:sp>
+      <p:sp>
+        <p:nvSpPr>
+          <p:cNvPr id="100" name="Shape 100"/>
+          <p:cNvSpPr/>
+          <p:nvPr/>
+        </p:nvSpPr>
+        <p:spPr>
+          <a:xfrm>
+            <a:off x="838200" y="2311400"/>
+            <a:ext cx="8890000" cy="330200"/>
+          </a:xfrm>
+          <a:prstGeom prst="rect">
+            <a:avLst/>
+          </a:prstGeom>
+          <a:noFill/>
+          <a:ln>
+            <a:noFill/>
+          </a:ln>
+        </p:spPr>
+        <p:txBody>
+          <a:bodyPr wrap="square" lIns="0" tIns="0" rIns="0" bIns="0" anchor="t">
+            <a:normAutofit/>
+          </a:bodyPr>
+          <a:lstStyle/>
+          <a:p>
+            <a:pPr>
+              <a:buNone/>
+            </a:pPr>
+            <a:r>
+              <a:rPr lang="en-US" sz="1300" b="1" spc="150" dirty="0">
+                <a:solidFill>
+                  <a:srgbClr val="E40046"/>
+                </a:solidFill>
+                <a:latin typeface="Frutiger"/>
+                <a:cs typeface="Frutiger"/>
+              </a:rPr>
+              <a:t>MODELS/MARTS/CUSTOMERS.YML  ·  THE FILE THAT SITS NEXT TO CUSTOMERS.SQL</a:t>
+            </a:r>
+          </a:p>
+        </p:txBody>
+      </p:sp>
+      <p:sp>
+        <p:nvSpPr>
+          <p:cNvPr id="101" name="Code 101"/>
+          <p:cNvSpPr/>
+          <p:nvPr/>
+        </p:nvSpPr>
+        <p:spPr>
+          <a:xfrm>
+            <a:off x="838200" y="2667000"/>
+            <a:ext cx="8890000" cy="6426200"/>
+          </a:xfrm>
+          <a:prstGeom prst="roundRect">
+            <a:avLst>
+              <a:gd name="adj" fmla="val 4000"/>
+            </a:avLst>
+          </a:prstGeom>
+          <a:solidFill>
+            <a:srgbClr val="0E1E4A"/>
+          </a:solidFill>
+          <a:ln>
+            <a:noFill/>
+          </a:ln>
+        </p:spPr>
+        <p:txBody>
+          <a:bodyPr wrap="square" lIns="228600" tIns="203200" rIns="228600" bIns="228600" anchor="t">
+            <a:normAutofit lnSpcReduction="10000"/>
+          </a:bodyPr>
+          <a:lstStyle/>
+          <a:p>
+            <a:pPr>
+              <a:lnSpc>
+                <a:spcPct val="114000"/>
+              </a:lnSpc>
+              <a:buNone/>
+            </a:pPr>
+            <a:r>
+              <a:rPr lang="en-US" sz="1500" dirty="0">
+                <a:solidFill>
+                  <a:srgbClr val="8EC5FF"/>
+                </a:solidFill>
+                <a:latin typeface="Consolas"/>
+                <a:cs typeface="Consolas"/>
+              </a:rPr>
+              <a:t>models:</a:t>
+            </a:r>
+          </a:p>
+          <a:p>
+            <a:pPr>
+              <a:lnSpc>
+                <a:spcPct val="114000"/>
+              </a:lnSpc>
+              <a:buNone/>
+            </a:pPr>
+            <a:r>
+              <a:rPr lang="en-US" sz="1500" dirty="0">
+                <a:solidFill>
+                  <a:srgbClr val="E8ECF5"/>
+                </a:solidFill>
+                <a:latin typeface="Consolas"/>
+                <a:cs typeface="Consolas"/>
+              </a:rPr>
+              <a:t>  - name: customers</a:t>
+            </a:r>
+          </a:p>
+          <a:p>
+            <a:pPr>
+              <a:lnSpc>
+                <a:spcPct val="114000"/>
+              </a:lnSpc>
+              <a:buNone/>
+            </a:pPr>
+            <a:r>
+              <a:rPr lang="en-US" sz="1500" dirty="0">
+                <a:solidFill>
+                  <a:srgbClr val="8EC5FF"/>
+                </a:solidFill>
+                <a:latin typeface="Consolas"/>
+                <a:cs typeface="Consolas"/>
+              </a:rPr>
+              <a:t>    description: &gt;</a:t>
+            </a:r>
+          </a:p>
+          <a:p>
+            <a:pPr>
+              <a:lnSpc>
+                <a:spcPct val="114000"/>
+              </a:lnSpc>
+              <a:buNone/>
+            </a:pPr>
+            <a:r>
+              <a:rPr lang="en-US" sz="1500" dirty="0">
+                <a:solidFill>
+                  <a:srgbClr val="8EC5FF"/>
+                </a:solidFill>
+                <a:latin typeface="Consolas"/>
+                <a:cs typeface="Consolas"/>
+              </a:rPr>
+              <a:t>      One row per customer. A customer with a single</a:t>
+            </a:r>
+          </a:p>
+          <a:p>
+            <a:pPr>
+              <a:lnSpc>
+                <a:spcPct val="114000"/>
+              </a:lnSpc>
+              <a:buNone/>
+            </a:pPr>
+            <a:r>
+              <a:rPr lang="en-US" sz="1500" dirty="0">
+                <a:solidFill>
+                  <a:srgbClr val="8EC5FF"/>
+                </a:solidFill>
+                <a:latin typeface="Consolas"/>
+                <a:cs typeface="Consolas"/>
+              </a:rPr>
+              <a:t>      order is 'new'; two or more make them 'returning'.</a:t>
+            </a:r>
+          </a:p>
+          <a:p>
+            <a:pPr>
+              <a:lnSpc>
+                <a:spcPct val="114000"/>
+              </a:lnSpc>
+              <a:buNone/>
+            </a:pPr>
+            <a:r>
+              <a:rPr lang="en-US" sz="1500" dirty="0">
+                <a:solidFill>
+                  <a:srgbClr val="FFD27F"/>
+                </a:solidFill>
+                <a:latin typeface="Consolas"/>
+                <a:cs typeface="Consolas"/>
+              </a:rPr>
+              <a:t>      Amounts in USD.</a:t>
+            </a:r>
+          </a:p>
+          <a:p>
+            <a:pPr>
+              <a:lnSpc>
+                <a:spcPct val="114000"/>
+              </a:lnSpc>
+              <a:buNone/>
+            </a:pPr>
+            <a:r>
+              <a:rPr lang="en-US" sz="1500" dirty="0">
+                <a:solidFill>
+                  <a:srgbClr val="FFD27F"/>
+                </a:solidFill>
+                <a:latin typeface="Consolas"/>
+                <a:cs typeface="Consolas"/>
+              </a:rPr>
+              <a:t>    data_tests:</a:t>
+            </a:r>
+          </a:p>
+          <a:p>
+            <a:pPr>
+              <a:lnSpc>
+                <a:spcPct val="114000"/>
+              </a:lnSpc>
+              <a:buNone/>
+            </a:pPr>
+            <a:r>
+              <a:rPr lang="en-US" sz="1500" dirty="0">
+                <a:solidFill>
+                  <a:srgbClr val="FFD27F"/>
+                </a:solidFill>
+                <a:latin typeface="Consolas"/>
+                <a:cs typeface="Consolas"/>
+              </a:rPr>
+              <a:t>      - </a:t>
+            </a:r>
+            <a:r>
+              <a:rPr lang="en-US" sz="1500" dirty="0" err="1">
+                <a:solidFill>
+                  <a:srgbClr val="FFD27F"/>
+                </a:solidFill>
+                <a:latin typeface="Consolas"/>
+                <a:cs typeface="Consolas"/>
+              </a:rPr>
+              <a:t>dbt_utils.expression_is_true</a:t>
+            </a:r>
+            <a:r>
+              <a:rPr lang="en-US" sz="1500" dirty="0">
+                <a:solidFill>
+                  <a:srgbClr val="FFD27F"/>
+                </a:solidFill>
+                <a:latin typeface="Consolas"/>
+                <a:cs typeface="Consolas"/>
+              </a:rPr>
+              <a:t>:</a:t>
+            </a:r>
+          </a:p>
+          <a:p>
+            <a:pPr>
+              <a:lnSpc>
+                <a:spcPct val="114000"/>
+              </a:lnSpc>
+              <a:buNone/>
+            </a:pPr>
+            <a:r>
+              <a:rPr lang="en-US" sz="1500" dirty="0">
+                <a:solidFill>
+                  <a:srgbClr val="8EC5FF"/>
+                </a:solidFill>
+                <a:latin typeface="Consolas"/>
+                <a:cs typeface="Consolas"/>
+              </a:rPr>
+              <a:t>          arguments:</a:t>
+            </a:r>
+          </a:p>
+          <a:p>
+            <a:pPr>
+              <a:lnSpc>
+                <a:spcPct val="114000"/>
+              </a:lnSpc>
+              <a:buNone/>
+            </a:pPr>
+            <a:r>
+              <a:rPr lang="en-US" sz="1500" dirty="0">
+                <a:solidFill>
+                  <a:srgbClr val="8EC5FF"/>
+                </a:solidFill>
+                <a:latin typeface="Consolas"/>
+                <a:cs typeface="Consolas"/>
+              </a:rPr>
+              <a:t>            expression: </a:t>
+            </a:r>
+            <a:r>
+              <a:rPr lang="en-US" sz="1500" dirty="0">
+                <a:solidFill>
+                  <a:srgbClr val="E8ECF5"/>
+                </a:solidFill>
+                <a:latin typeface="Consolas"/>
+                <a:cs typeface="Consolas"/>
+              </a:rPr>
+              <a:t>"lifetime_spend_pretax + lifetime_tax_paid = lifetime_spend"</a:t>
+            </a:r>
+          </a:p>
+          <a:p>
+            <a:pPr>
+              <a:lnSpc>
+                <a:spcPct val="114000"/>
+              </a:lnSpc>
+              <a:buNone/>
+            </a:pPr>
+            <a:r>
+              <a:rPr lang="en-US" sz="1500" dirty="0">
+                <a:solidFill>
+                  <a:srgbClr val="8EC5FF"/>
+                </a:solidFill>
+                <a:latin typeface="Consolas"/>
+                <a:cs typeface="Consolas"/>
+              </a:rPr>
+              <a:t>    columns:</a:t>
+            </a:r>
+          </a:p>
+          <a:p>
+            <a:pPr>
+              <a:lnSpc>
+                <a:spcPct val="114000"/>
+              </a:lnSpc>
+              <a:buNone/>
+            </a:pPr>
+            <a:r>
+              <a:rPr lang="en-US" sz="1500" dirty="0">
+                <a:solidFill>
+                  <a:srgbClr val="8EC5FF"/>
+                </a:solidFill>
+                <a:latin typeface="Consolas"/>
+                <a:cs typeface="Consolas"/>
+              </a:rPr>
+              <a:t>      - name: customer_id</a:t>
+            </a:r>
+          </a:p>
+          <a:p>
+            <a:pPr>
+              <a:lnSpc>
+                <a:spcPct val="114000"/>
+              </a:lnSpc>
+              <a:buNone/>
+            </a:pPr>
+            <a:r>
+              <a:rPr lang="en-US" sz="1500" dirty="0">
+                <a:solidFill>
+                  <a:srgbClr val="8EC5FF"/>
+                </a:solidFill>
+                <a:latin typeface="Consolas"/>
+                <a:cs typeface="Consolas"/>
+              </a:rPr>
+              <a:t>        description: </a:t>
+            </a:r>
+            <a:r>
+              <a:rPr lang="en-US" sz="1500" dirty="0">
+                <a:solidFill>
+                  <a:srgbClr val="FF8FA3"/>
+                </a:solidFill>
+                <a:latin typeface="Consolas"/>
+                <a:cs typeface="Consolas"/>
+              </a:rPr>
+              <a:t>Grain key. Matches stg_customers.</a:t>
+            </a:r>
+          </a:p>
+          <a:p>
+            <a:pPr>
+              <a:lnSpc>
+                <a:spcPct val="114000"/>
+              </a:lnSpc>
+              <a:buNone/>
+            </a:pPr>
+            <a:r>
+              <a:rPr lang="en-US" sz="1500" dirty="0">
+                <a:solidFill>
+                  <a:srgbClr val="8EC5FF"/>
+                </a:solidFill>
+                <a:latin typeface="Consolas"/>
+                <a:cs typeface="Consolas"/>
+              </a:rPr>
+              <a:t>        data_tests:</a:t>
+            </a:r>
+          </a:p>
+          <a:p>
+            <a:pPr>
+              <a:lnSpc>
+                <a:spcPct val="114000"/>
+              </a:lnSpc>
+              <a:buNone/>
+            </a:pPr>
+            <a:r>
+              <a:rPr lang="en-US" sz="1500" dirty="0">
+                <a:solidFill>
+                  <a:srgbClr val="8EC5FF"/>
+                </a:solidFill>
+                <a:latin typeface="Consolas"/>
+                <a:cs typeface="Consolas"/>
+              </a:rPr>
+              <a:t>          - </a:t>
+            </a:r>
+            <a:r>
+              <a:rPr lang="en-US" sz="1500" dirty="0">
+                <a:solidFill>
+                  <a:srgbClr val="FF8FA3"/>
+                </a:solidFill>
+                <a:latin typeface="Consolas"/>
+                <a:cs typeface="Consolas"/>
+              </a:rPr>
+              <a:t>not_null</a:t>
+            </a:r>
+          </a:p>
+          <a:p>
+            <a:pPr>
+              <a:lnSpc>
+                <a:spcPct val="114000"/>
+              </a:lnSpc>
+              <a:buNone/>
+            </a:pPr>
+            <a:r>
+              <a:rPr lang="en-US" sz="1500" dirty="0">
+                <a:solidFill>
+                  <a:srgbClr val="8EC5FF"/>
+                </a:solidFill>
+                <a:latin typeface="Consolas"/>
+                <a:cs typeface="Consolas"/>
+              </a:rPr>
+              <a:t>          - </a:t>
+            </a:r>
+            <a:r>
+              <a:rPr lang="en-US" sz="1500" dirty="0">
+                <a:solidFill>
+                  <a:srgbClr val="E8ECF5"/>
+                </a:solidFill>
+                <a:latin typeface="Consolas"/>
+                <a:cs typeface="Consolas"/>
+              </a:rPr>
+              <a:t>unique</a:t>
+            </a:r>
+          </a:p>
+          <a:p>
+            <a:pPr>
+              <a:lnSpc>
+                <a:spcPct val="114000"/>
+              </a:lnSpc>
+              <a:buNone/>
+            </a:pPr>
+            <a:r>
+              <a:rPr lang="en-US" sz="1500" dirty="0">
+                <a:solidFill>
+                  <a:srgbClr val="8EC5FF"/>
+                </a:solidFill>
+                <a:latin typeface="Consolas"/>
+                <a:cs typeface="Consolas"/>
+              </a:rPr>
+              <a:t>      - name: </a:t>
+            </a:r>
+            <a:r>
+              <a:rPr lang="en-US" sz="1500" dirty="0">
+                <a:solidFill>
+                  <a:srgbClr val="E8ECF5"/>
+                </a:solidFill>
+                <a:latin typeface="Consolas"/>
+                <a:cs typeface="Consolas"/>
+              </a:rPr>
+              <a:t>customer_type</a:t>
+            </a:r>
+          </a:p>
+          <a:p>
+            <a:pPr>
+              <a:lnSpc>
+                <a:spcPct val="114000"/>
+              </a:lnSpc>
+              <a:buNone/>
+            </a:pPr>
+            <a:r>
+              <a:rPr lang="en-US" sz="1500" dirty="0">
+                <a:solidFill>
+                  <a:srgbClr val="8EC5FF"/>
+                </a:solidFill>
+                <a:latin typeface="Consolas"/>
+                <a:cs typeface="Consolas"/>
+              </a:rPr>
+              <a:t>        description: </a:t>
+            </a:r>
+            <a:r>
+              <a:rPr lang="en-US" sz="1500" dirty="0">
+                <a:solidFill>
+                  <a:srgbClr val="E8ECF5"/>
+                </a:solidFill>
+                <a:latin typeface="Consolas"/>
+                <a:cs typeface="Consolas"/>
+              </a:rPr>
+              <a:t>'new' or 'returning'.</a:t>
+            </a:r>
+          </a:p>
+          <a:p>
+            <a:pPr>
+              <a:lnSpc>
+                <a:spcPct val="114000"/>
+              </a:lnSpc>
+              <a:buNone/>
+            </a:pPr>
+            <a:r>
+              <a:rPr lang="en-US" sz="1500" dirty="0">
+                <a:solidFill>
+                  <a:srgbClr val="8EC5FF"/>
+                </a:solidFill>
+                <a:latin typeface="Consolas"/>
+                <a:cs typeface="Consolas"/>
+              </a:rPr>
+              <a:t>        data_tests:</a:t>
+            </a:r>
+          </a:p>
+          <a:p>
+            <a:pPr>
+              <a:lnSpc>
+                <a:spcPct val="114000"/>
+              </a:lnSpc>
+              <a:buNone/>
+            </a:pPr>
+            <a:r>
+              <a:rPr lang="en-US" sz="1500" dirty="0">
+                <a:solidFill>
+                  <a:srgbClr val="8EC5FF"/>
+                </a:solidFill>
+                <a:latin typeface="Consolas"/>
+                <a:cs typeface="Consolas"/>
+              </a:rPr>
+              <a:t>          - accepted_values:</a:t>
+            </a:r>
+          </a:p>
+          <a:p>
+            <a:pPr>
+              <a:lnSpc>
+                <a:spcPct val="114000"/>
+              </a:lnSpc>
+              <a:buNone/>
+            </a:pPr>
+            <a:r>
+              <a:rPr lang="en-US" sz="1500" dirty="0">
+                <a:solidFill>
+                  <a:srgbClr val="8EC5FF"/>
+                </a:solidFill>
+                <a:latin typeface="Consolas"/>
+                <a:cs typeface="Consolas"/>
+              </a:rPr>
+              <a:t>              arguments:</a:t>
+            </a:r>
+          </a:p>
+          <a:p>
+            <a:pPr>
+              <a:lnSpc>
+                <a:spcPct val="114000"/>
+              </a:lnSpc>
+              <a:buNone/>
+            </a:pPr>
+            <a:r>
+              <a:rPr lang="en-US" sz="1500" dirty="0">
+                <a:solidFill>
+                  <a:srgbClr val="8EC5FF"/>
+                </a:solidFill>
+                <a:latin typeface="Consolas"/>
+                <a:cs typeface="Consolas"/>
+              </a:rPr>
+              <a:t>                values: [</a:t>
+            </a:r>
+            <a:r>
+              <a:rPr lang="en-US" sz="1500" dirty="0">
+                <a:solidFill>
+                  <a:srgbClr val="FF8FA3"/>
+                </a:solidFill>
+                <a:latin typeface="Consolas"/>
+                <a:cs typeface="Consolas"/>
+              </a:rPr>
+              <a:t>"new", "returning"</a:t>
+            </a:r>
+            <a:r>
+              <a:rPr lang="en-US" sz="1500" dirty="0">
+                <a:solidFill>
+                  <a:srgbClr val="8EC5FF"/>
+                </a:solidFill>
+                <a:latin typeface="Consolas"/>
+                <a:cs typeface="Consolas"/>
+              </a:rPr>
+              <a:t>]</a:t>
+            </a:r>
+          </a:p>
+          <a:p>
+            <a:pPr>
+              <a:lnSpc>
+                <a:spcPct val="114000"/>
+              </a:lnSpc>
+              <a:buNone/>
+            </a:pPr>
+            <a:r>
+              <a:rPr lang="en-US" sz="1500" dirty="0">
+                <a:solidFill>
+                  <a:srgbClr val="8EC5FF"/>
+                </a:solidFill>
+                <a:latin typeface="Consolas"/>
+                <a:cs typeface="Consolas"/>
+              </a:rPr>
+              <a:t>      # … lifetime_spend, first_ordered_at, …</a:t>
+            </a:r>
+          </a:p>
+        </p:txBody>
+      </p:sp>
+      <p:cxnSp>
+        <p:nvCxnSpPr>
+          <p:cNvPr id="110" name="Line 110"/>
+          <p:cNvCxnSpPr/>
+          <p:nvPr/>
+        </p:nvCxnSpPr>
+        <p:spPr>
+          <a:xfrm>
+            <a:off x="9779000" y="2946400"/>
+            <a:ext cx="406400" cy="0"/>
+          </a:xfrm>
+          <a:prstGeom prst="line">
+            <a:avLst/>
+          </a:prstGeom>
+          <a:ln w="25400">
+            <a:solidFill>
+              <a:srgbClr val="E40046"/>
+            </a:solidFill>
+          </a:ln>
+        </p:spPr>
+      </p:cxnSp>
+      <p:sp>
+        <p:nvSpPr>
+          <p:cNvPr id="111" name="Shape 111"/>
+          <p:cNvSpPr/>
+          <p:nvPr/>
+        </p:nvSpPr>
+        <p:spPr>
+          <a:xfrm>
+            <a:off x="10312400" y="2641600"/>
+            <a:ext cx="7137400" cy="1219200"/>
+          </a:xfrm>
+          <a:prstGeom prst="rect">
+            <a:avLst/>
+          </a:prstGeom>
+          <a:noFill/>
+          <a:ln>
+            <a:noFill/>
+          </a:ln>
+        </p:spPr>
+        <p:txBody>
+          <a:bodyPr wrap="square" lIns="0" tIns="0" rIns="0" bIns="0" anchor="t">
+            <a:normAutofit/>
+          </a:bodyPr>
+          <a:lstStyle/>
+          <a:p>
+            <a:pPr>
+              <a:buNone/>
+            </a:pPr>
+            <a:r>
+              <a:rPr lang="en-US" sz="1900" b="1" dirty="0">
+                <a:solidFill>
+                  <a:srgbClr val="001F6B"/>
+                </a:solidFill>
+                <a:latin typeface="Frutiger"/>
+                <a:cs typeface="Frutiger"/>
+              </a:rPr>
+              <a:t>One YAML file, many models</a:t>
+            </a:r>
+          </a:p>
+          <a:p>
+            <a:pPr>
+              <a:lnSpc>
+                <a:spcPct val="104000"/>
+              </a:lnSpc>
+              <a:spcBef>
+                <a:spcPts val="300"/>
+              </a:spcBef>
+              <a:buNone/>
+            </a:pPr>
+            <a:r>
+              <a:rPr lang="en-US" sz="1600" dirty="0">
+                <a:solidFill>
+                  <a:srgbClr val="364750"/>
+                </a:solidFill>
+                <a:latin typeface="Frutiger"/>
+                <a:cs typeface="Frutiger"/>
+              </a:rPr>
+              <a:t>Filename is free (schema.yml, customers.yml…). It’s a list of models; each entry describes one .sql file by name.</a:t>
+            </a:r>
+          </a:p>
+        </p:txBody>
+      </p:sp>
+      <p:cxnSp>
+        <p:nvCxnSpPr>
+          <p:cNvPr id="113" name="Line 113"/>
+          <p:cNvCxnSpPr/>
+          <p:nvPr/>
+        </p:nvCxnSpPr>
+        <p:spPr>
+          <a:xfrm>
+            <a:off x="9779000" y="4038600"/>
+            <a:ext cx="406400" cy="0"/>
+          </a:xfrm>
+          <a:prstGeom prst="line">
+            <a:avLst/>
+          </a:prstGeom>
+          <a:ln w="25400">
+            <a:solidFill>
+              <a:srgbClr val="E40046"/>
+            </a:solidFill>
+          </a:ln>
+        </p:spPr>
+      </p:cxnSp>
+      <p:sp>
+        <p:nvSpPr>
+          <p:cNvPr id="114" name="Shape 114"/>
+          <p:cNvSpPr/>
+          <p:nvPr/>
+        </p:nvSpPr>
+        <p:spPr>
+          <a:xfrm>
+            <a:off x="10312400" y="3733800"/>
+            <a:ext cx="7137400" cy="1219200"/>
+          </a:xfrm>
+          <a:prstGeom prst="rect">
+            <a:avLst/>
+          </a:prstGeom>
+          <a:noFill/>
+          <a:ln>
+            <a:noFill/>
+          </a:ln>
+        </p:spPr>
+        <p:txBody>
+          <a:bodyPr wrap="square" lIns="0" tIns="0" rIns="0" bIns="0" anchor="t">
+            <a:normAutofit/>
+          </a:bodyPr>
+          <a:lstStyle/>
+          <a:p>
+            <a:pPr>
+              <a:buNone/>
+            </a:pPr>
+            <a:r>
+              <a:rPr lang="en-US" sz="1900" b="1" dirty="0">
+                <a:solidFill>
+                  <a:srgbClr val="001F6B"/>
+                </a:solidFill>
+                <a:latin typeface="Frutiger"/>
+                <a:cs typeface="Frutiger"/>
+              </a:rPr>
+              <a:t>Descriptions are documentation</a:t>
+            </a:r>
+          </a:p>
+          <a:p>
+            <a:pPr>
+              <a:lnSpc>
+                <a:spcPct val="104000"/>
+              </a:lnSpc>
+              <a:spcBef>
+                <a:spcPts val="300"/>
+              </a:spcBef>
+              <a:buNone/>
+            </a:pPr>
+            <a:r>
+              <a:rPr lang="en-US" sz="1600" dirty="0">
+                <a:solidFill>
+                  <a:srgbClr val="364750"/>
+                </a:solidFill>
+                <a:latin typeface="Frutiger"/>
+                <a:cs typeface="Frutiger"/>
+              </a:rPr>
+              <a:t>Written once here, they appear in dbt docs, in the lineage graph, and — with the right adapter — as column comments on the warehouse table.</a:t>
+            </a:r>
+          </a:p>
+        </p:txBody>
+      </p:sp>
+      <p:cxnSp>
+        <p:nvCxnSpPr>
+          <p:cNvPr id="116" name="Line 116"/>
+          <p:cNvCxnSpPr/>
+          <p:nvPr/>
+        </p:nvCxnSpPr>
+        <p:spPr>
+          <a:xfrm>
+            <a:off x="9779000" y="5308600"/>
+            <a:ext cx="406400" cy="0"/>
+          </a:xfrm>
+          <a:prstGeom prst="line">
+            <a:avLst/>
+          </a:prstGeom>
+          <a:ln w="25400">
+            <a:solidFill>
+              <a:srgbClr val="E40046"/>
+            </a:solidFill>
+          </a:ln>
+        </p:spPr>
+      </p:cxnSp>
+      <p:sp>
+        <p:nvSpPr>
+          <p:cNvPr id="117" name="Shape 117"/>
+          <p:cNvSpPr/>
+          <p:nvPr/>
+        </p:nvSpPr>
+        <p:spPr>
+          <a:xfrm>
+            <a:off x="10312400" y="5003800"/>
+            <a:ext cx="7137400" cy="1219200"/>
+          </a:xfrm>
+          <a:prstGeom prst="rect">
+            <a:avLst/>
+          </a:prstGeom>
+          <a:noFill/>
+          <a:ln>
+            <a:noFill/>
+          </a:ln>
+        </p:spPr>
+        <p:txBody>
+          <a:bodyPr wrap="square" lIns="0" tIns="0" rIns="0" bIns="0" anchor="t">
+            <a:normAutofit/>
+          </a:bodyPr>
+          <a:lstStyle/>
+          <a:p>
+            <a:pPr>
+              <a:buNone/>
+            </a:pPr>
+            <a:r>
+              <a:rPr lang="en-US" sz="1900" b="1" dirty="0">
+                <a:solidFill>
+                  <a:srgbClr val="001F6B"/>
+                </a:solidFill>
+                <a:latin typeface="Frutiger"/>
+                <a:cs typeface="Frutiger"/>
+              </a:rPr>
+              <a:t>Tests are assertions in YAML</a:t>
+            </a:r>
+          </a:p>
+          <a:p>
+            <a:pPr>
+              <a:lnSpc>
+                <a:spcPct val="104000"/>
+              </a:lnSpc>
+              <a:spcBef>
+                <a:spcPts val="300"/>
+              </a:spcBef>
+              <a:buNone/>
+            </a:pPr>
+            <a:r>
+              <a:rPr lang="en-US" sz="1600" dirty="0">
+                <a:solidFill>
+                  <a:srgbClr val="364750"/>
+                </a:solidFill>
+                <a:latin typeface="Frutiger"/>
+                <a:cs typeface="Frutiger"/>
+              </a:rPr>
+              <a:t>Each entry becomes a SQL query at run time. dbt build runs them right after the model builds; a failure stops downstream models.</a:t>
+            </a:r>
+          </a:p>
+        </p:txBody>
+      </p:sp>
+      <p:cxnSp>
+        <p:nvCxnSpPr>
+          <p:cNvPr id="119" name="Line 119"/>
+          <p:cNvCxnSpPr/>
+          <p:nvPr/>
+        </p:nvCxnSpPr>
+        <p:spPr>
+          <a:xfrm>
+            <a:off x="9779000" y="6654800"/>
+            <a:ext cx="406400" cy="0"/>
+          </a:xfrm>
+          <a:prstGeom prst="line">
+            <a:avLst/>
+          </a:prstGeom>
+          <a:ln w="25400">
+            <a:solidFill>
+              <a:srgbClr val="E40046"/>
+            </a:solidFill>
+          </a:ln>
+        </p:spPr>
+      </p:cxnSp>
+      <p:sp>
+        <p:nvSpPr>
+          <p:cNvPr id="120" name="Shape 120"/>
+          <p:cNvSpPr/>
+          <p:nvPr/>
+        </p:nvSpPr>
+        <p:spPr>
+          <a:xfrm>
+            <a:off x="10312400" y="6350000"/>
+            <a:ext cx="7137400" cy="1219200"/>
+          </a:xfrm>
+          <a:prstGeom prst="rect">
+            <a:avLst/>
+          </a:prstGeom>
+          <a:noFill/>
+          <a:ln>
+            <a:noFill/>
+          </a:ln>
+        </p:spPr>
+        <p:txBody>
+          <a:bodyPr wrap="square" lIns="0" tIns="0" rIns="0" bIns="0" anchor="t">
+            <a:normAutofit/>
+          </a:bodyPr>
+          <a:lstStyle/>
+          <a:p>
+            <a:pPr>
+              <a:buNone/>
+            </a:pPr>
+            <a:r>
+              <a:rPr lang="en-US" sz="1900" b="1" dirty="0">
+                <a:solidFill>
+                  <a:srgbClr val="001F6B"/>
+                </a:solidFill>
+                <a:latin typeface="Frutiger"/>
+                <a:cs typeface="Frutiger"/>
+              </a:rPr>
+              <a:t>Packages add more tests</a:t>
+            </a:r>
+          </a:p>
+          <a:p>
+            <a:pPr>
+              <a:lnSpc>
+                <a:spcPct val="104000"/>
+              </a:lnSpc>
+              <a:spcBef>
+                <a:spcPts val="300"/>
+              </a:spcBef>
+              <a:buNone/>
+            </a:pPr>
+            <a:r>
+              <a:rPr lang="en-US" sz="1600" dirty="0" err="1">
+                <a:solidFill>
+                  <a:srgbClr val="364750"/>
+                </a:solidFill>
+                <a:latin typeface="Frutiger"/>
+                <a:cs typeface="Frutiger"/>
+              </a:rPr>
+              <a:t>dbt_utils.expression_is_true</a:t>
+            </a:r>
+            <a:r>
+              <a:rPr lang="en-US" sz="1600" dirty="0">
+                <a:solidFill>
+                  <a:srgbClr val="364750"/>
+                </a:solidFill>
+                <a:latin typeface="Frutiger"/>
+                <a:cs typeface="Frutiger"/>
+              </a:rPr>
+              <a:t>, </a:t>
+            </a:r>
+            <a:r>
+              <a:rPr lang="en-US" sz="1600" dirty="0" err="1">
+                <a:solidFill>
+                  <a:srgbClr val="364750"/>
+                </a:solidFill>
+                <a:latin typeface="Frutiger"/>
+                <a:cs typeface="Frutiger"/>
+              </a:rPr>
+              <a:t>dbt_expectations</a:t>
+            </a:r>
+            <a:r>
+              <a:rPr lang="en-US" sz="1600" dirty="0">
+                <a:solidFill>
+                  <a:srgbClr val="364750"/>
+                </a:solidFill>
+                <a:latin typeface="Frutiger"/>
+                <a:cs typeface="Frutiger"/>
+              </a:rPr>
+              <a:t>… installed via packages.yml. Same YAML shape, someone else wrote the SQL.</a:t>
+            </a:r>
+          </a:p>
+        </p:txBody>
+      </p:sp>
+      <p:cxnSp>
+        <p:nvCxnSpPr>
+          <p:cNvPr id="122" name="Line 122"/>
+          <p:cNvCxnSpPr/>
+          <p:nvPr/>
+        </p:nvCxnSpPr>
+        <p:spPr>
+          <a:xfrm>
+            <a:off x="9779000" y="7899400"/>
+            <a:ext cx="406400" cy="0"/>
+          </a:xfrm>
+          <a:prstGeom prst="line">
+            <a:avLst/>
+          </a:prstGeom>
+          <a:ln w="25400">
+            <a:solidFill>
+              <a:srgbClr val="E40046"/>
+            </a:solidFill>
+          </a:ln>
+        </p:spPr>
+      </p:cxnSp>
+      <p:sp>
+        <p:nvSpPr>
+          <p:cNvPr id="123" name="Shape 123"/>
+          <p:cNvSpPr/>
+          <p:nvPr/>
+        </p:nvSpPr>
+        <p:spPr>
+          <a:xfrm>
+            <a:off x="10312400" y="7594600"/>
+            <a:ext cx="7137400" cy="1219200"/>
+          </a:xfrm>
+          <a:prstGeom prst="rect">
+            <a:avLst/>
+          </a:prstGeom>
+          <a:noFill/>
+          <a:ln>
+            <a:noFill/>
+          </a:ln>
+        </p:spPr>
+        <p:txBody>
+          <a:bodyPr wrap="square" lIns="0" tIns="0" rIns="0" bIns="0" anchor="t">
+            <a:normAutofit/>
+          </a:bodyPr>
+          <a:lstStyle/>
+          <a:p>
+            <a:pPr>
+              <a:buNone/>
+            </a:pPr>
+            <a:r>
+              <a:rPr lang="en-US" sz="1900" b="1" dirty="0">
+                <a:solidFill>
+                  <a:srgbClr val="001F6B"/>
+                </a:solidFill>
+                <a:latin typeface="Frutiger"/>
+                <a:cs typeface="Frutiger"/>
+              </a:rPr>
+              <a:t>Tests and docs are versioned with the code</a:t>
+            </a:r>
+          </a:p>
+          <a:p>
+            <a:pPr>
+              <a:lnSpc>
+                <a:spcPct val="104000"/>
+              </a:lnSpc>
+              <a:spcBef>
+                <a:spcPts val="300"/>
+              </a:spcBef>
+              <a:buNone/>
+            </a:pPr>
+            <a:r>
+              <a:rPr lang="en-US" sz="1600" dirty="0">
+                <a:solidFill>
+                  <a:srgbClr val="364750"/>
+                </a:solidFill>
+                <a:latin typeface="Frutiger"/>
+                <a:cs typeface="Frutiger"/>
+              </a:rPr>
+              <a:t>A pull request that changes the SELECT also shows the changed expectation. Review both together.</a:t>
+            </a:r>
+          </a:p>
+        </p:txBody>
+      </p:sp>
+    </p:spTree>
+    <p:extLst>
+      <p:ext uri="{BB962C8B-B14F-4D97-AF65-F5344CB8AC3E}">
+        <p14:creationId xmlns:p14="http://schemas.microsoft.com/office/powerpoint/2010/main" val="1914950974"/>
+      </p:ext>
+    </p:extLst>
+  </p:cSld>
+  <p:clrMapOvr>
+    <a:masterClrMapping/>
+  </p:clrMapOvr>
+</p:sld>
+</file>
+
+<file path=ppt/slides/slide13.xml><?xml version="1.0" encoding="utf-8"?>
+<p:sld xmlns:a="http://schemas.openxmlformats.org/drawingml/2006/main" xmlns:r="http://schemas.openxmlformats.org/officeDocument/2006/relationships" xmlns:p="http://schemas.openxmlformats.org/presentationml/2006/main">
+  <p:cSld>
+    <p:bg>
+      <p:bgPr>
+        <a:solidFill>
+          <a:srgbClr val="FFFFFF"/>
+        </a:solidFill>
+        <a:effectLst/>
+      </p:bgPr>
+    </p:bg>
+    <p:spTree>
+      <p:nvGrpSpPr>
+        <p:cNvPr id="1" name=""/>
+        <p:cNvGrpSpPr/>
+        <p:nvPr/>
+      </p:nvGrpSpPr>
+      <p:grpSpPr>
+        <a:xfrm>
+          <a:off x="0" y="0"/>
+          <a:ext cx="0" cy="0"/>
+          <a:chOff x="0" y="0"/>
+          <a:chExt cx="0" cy="0"/>
+        </a:xfrm>
+      </p:grpSpPr>
+      <p:sp>
+        <p:nvSpPr>
           <p:cNvPr id="2" name="Text 0">
             <a:extLst>
               <a:ext uri="{FF2B5EF4-FFF2-40B4-BE49-F238E27FC236}">
@@ -15319,7 +17514,7 @@
               <a:buNone/>
             </a:pPr>
             <a:r>
-              <a:rPr sz="4651" b="1" spc="-69">
+              <a:rPr sz="4651" b="1" spc="-69" dirty="0">
                 <a:solidFill>
                   <a:srgbClr val="001F6B"/>
                 </a:solidFill>
@@ -15329,7 +17524,7 @@
               </a:rPr>
               <a:t>State the rules next to the code</a:t>
             </a:r>
-            <a:endParaRPr sz="4651"/>
+            <a:endParaRPr sz="4651" dirty="0"/>
           </a:p>
         </p:txBody>
       </p:sp>
@@ -15495,7 +17690,7 @@
               <a:buNone/>
             </a:pPr>
             <a:r>
-              <a:rPr sz="1801">
+              <a:rPr sz="1801" dirty="0">
                 <a:solidFill>
                   <a:srgbClr val="667780"/>
                 </a:solidFill>
@@ -15505,7 +17700,7 @@
               </a:rPr>
               <a:t>Getting started with dbt</a:t>
             </a:r>
-            <a:endParaRPr sz="1801"/>
+            <a:endParaRPr sz="1801" dirty="0"/>
           </a:p>
         </p:txBody>
       </p:sp>
@@ -15626,7 +17821,7 @@
         </p:spPr>
         <p:txBody>
           <a:bodyPr wrap="square" lIns="228600" tIns="203200" rIns="228600" bIns="228600" anchor="t">
-            <a:normAutofit lnSpcReduction="10000"/>
+            <a:normAutofit fontScale="92500" lnSpcReduction="20000"/>
           </a:bodyPr>
           <a:lstStyle/>
           <a:p>
@@ -15739,7 +17934,7 @@
               <a:t>      - </a:t>
             </a:r>
             <a:r>
-              <a:rPr lang="en-US" sz="1700" dirty="0">
+              <a:rPr lang="en-US" sz="1700" dirty="0" err="1">
                 <a:solidFill>
                   <a:srgbClr val="E8ECF5"/>
                 </a:solidFill>
@@ -15830,17 +18025,7 @@
                 <a:latin typeface="Consolas"/>
                 <a:cs typeface="Consolas"/>
               </a:rPr>
-              <a:t>      - name: </a:t>
-            </a:r>
-            <a:r>
-              <a:rPr lang="en-US" sz="1700" dirty="0">
-                <a:solidFill>
-                  <a:srgbClr val="8EC5FF"/>
-                </a:solidFill>
-                <a:latin typeface="Consolas"/>
-                <a:cs typeface="Consolas"/>
-              </a:rPr>
-              <a:t>order_id</a:t>
+              <a:t>      - name: order_id</a:t>
             </a:r>
           </a:p>
           <a:p>
@@ -15878,27 +18063,7 @@
                 <a:latin typeface="Consolas"/>
                 <a:cs typeface="Consolas"/>
               </a:rPr>
-              <a:t>, </a:t>
-            </a:r>
-            <a:r>
-              <a:rPr lang="en-US" sz="1700" dirty="0">
-                <a:solidFill>
-                  <a:srgbClr val="8EC5FF"/>
-                </a:solidFill>
-                <a:latin typeface="Consolas"/>
-                <a:cs typeface="Consolas"/>
-              </a:rPr>
-              <a:t>unique</a:t>
-            </a:r>
-            <a:r>
-              <a:rPr lang="en-US" sz="1700" dirty="0">
-                <a:solidFill>
-                  <a:srgbClr val="8EC5FF"/>
-                </a:solidFill>
-                <a:latin typeface="Consolas"/>
-                <a:cs typeface="Consolas"/>
-              </a:rPr>
-              <a:t>]</a:t>
+              <a:t>, unique]</a:t>
             </a:r>
           </a:p>
           <a:p>
@@ -15944,17 +18109,7 @@
                 <a:latin typeface="Consolas"/>
                 <a:cs typeface="Consolas"/>
               </a:rPr>
-              <a:t>orders</a:t>
-            </a:r>
-            <a:r>
-              <a:rPr lang="en-US" sz="1700" dirty="0">
-                <a:solidFill>
-                  <a:srgbClr val="E8ECF5"/>
-                </a:solidFill>
-                <a:latin typeface="Consolas"/>
-                <a:cs typeface="Consolas"/>
-              </a:rPr>
-              <a:t>                    # marts/orders.yml</a:t>
+              <a:t>orders                    # marts/orders.yml</a:t>
             </a:r>
           </a:p>
           <a:p>
@@ -16046,17 +18201,7 @@
                 <a:latin typeface="Consolas"/>
                 <a:cs typeface="Consolas"/>
               </a:rPr>
-              <a:t>relationships</a:t>
-            </a:r>
-            <a:r>
-              <a:rPr lang="en-US" sz="1700" dirty="0">
-                <a:solidFill>
-                  <a:srgbClr val="E8ECF5"/>
-                </a:solidFill>
-                <a:latin typeface="Consolas"/>
-                <a:cs typeface="Consolas"/>
-              </a:rPr>
-              <a:t>:</a:t>
+              <a:t>relationships:</a:t>
             </a:r>
           </a:p>
           <a:p>
@@ -16084,17 +18229,7 @@
                 <a:latin typeface="Consolas"/>
                 <a:cs typeface="Consolas"/>
               </a:rPr>
-              <a:t>ref('stg_customers')</a:t>
-            </a:r>
-            <a:r>
-              <a:rPr lang="en-US" sz="1700" dirty="0">
-                <a:solidFill>
-                  <a:srgbClr val="E8ECF5"/>
-                </a:solidFill>
-                <a:latin typeface="Consolas"/>
-                <a:cs typeface="Consolas"/>
-              </a:rPr>
-              <a:t>, field: customer_id }</a:t>
+              <a:t>ref('stg_customers'), field: customer_id }</a:t>
             </a:r>
           </a:p>
         </p:txBody>
@@ -16877,7 +19012,7 @@
         </p:spPr>
         <p:txBody>
           <a:bodyPr wrap="square" lIns="0" tIns="0" rIns="0" bIns="0" anchor="t">
-            <a:normAutofit/>
+            <a:normAutofit fontScale="92500"/>
           </a:bodyPr>
           <a:lstStyle/>
           <a:p>
@@ -16976,1413 +19111,6 @@
     <p:extLst>
       <p:ext uri="{BB962C8B-B14F-4D97-AF65-F5344CB8AC3E}">
         <p14:creationId xmlns:p14="http://schemas.microsoft.com/office/powerpoint/2010/main" val="3324024509"/>
-      </p:ext>
-    </p:extLst>
-  </p:cSld>
-  <p:clrMapOvr>
-    <a:masterClrMapping/>
-  </p:clrMapOvr>
-</p:sld>
-</file>
-
-<file path=ppt/slides/slide13.xml><?xml version="1.0" encoding="utf-8"?>
-<p:sld xmlns:a="http://schemas.openxmlformats.org/drawingml/2006/main" xmlns:r="http://schemas.openxmlformats.org/officeDocument/2006/relationships" xmlns:p="http://schemas.openxmlformats.org/presentationml/2006/main">
-  <p:cSld>
-    <p:bg>
-      <p:bgPr>
-        <a:solidFill>
-          <a:srgbClr val="FFFFFF"/>
-        </a:solidFill>
-        <a:effectLst/>
-      </p:bgPr>
-    </p:bg>
-    <p:spTree>
-      <p:nvGrpSpPr>
-        <p:cNvPr id="1" name=""/>
-        <p:cNvGrpSpPr/>
-        <p:nvPr/>
-      </p:nvGrpSpPr>
-      <p:grpSpPr>
-        <a:xfrm>
-          <a:off x="0" y="0"/>
-          <a:ext cx="0" cy="0"/>
-          <a:chOff x="0" y="0"/>
-          <a:chExt cx="0" cy="0"/>
-        </a:xfrm>
-      </p:grpSpPr>
-      <p:sp>
-        <p:nvSpPr>
-          <p:cNvPr id="2" name="Text 0">
-            <a:extLst>
-              <a:ext uri="{FF2B5EF4-FFF2-40B4-BE49-F238E27FC236}">
-                <a16:creationId xmlns:a16="http://schemas.microsoft.com/office/drawing/2014/main" id="{EBF2AD33-830A-48C5-90B4-ADC3835E0158}"/>
-              </a:ext>
-            </a:extLst>
-          </p:cNvPr>
-          <p:cNvSpPr>
-            <a:spLocks noGrp="1"/>
-          </p:cNvSpPr>
-          <p:nvPr/>
-        </p:nvSpPr>
-        <p:spPr>
-          <a:xfrm>
-            <a:off x="838201" y="495302"/>
-            <a:ext cx="15240000" cy="392311"/>
-          </a:xfrm>
-          <a:prstGeom prst="rect">
-            <a:avLst/>
-          </a:prstGeom>
-          <a:noFill/>
-        </p:spPr>
-        <p:txBody>
-          <a:bodyPr wrap="square" lIns="25401" tIns="25401" rIns="25401" bIns="25401" anchor="t">
-            <a:normAutofit/>
-          </a:bodyPr>
-          <a:lstStyle/>
-          <a:p>
-            <a:pPr>
-              <a:lnSpc>
-                <a:spcPct val="120000"/>
-              </a:lnSpc>
-              <a:buNone/>
-            </a:pPr>
-            <a:r>
-              <a:rPr sz="1801" b="1" spc="361">
-                <a:solidFill>
-                  <a:srgbClr val="E40046"/>
-                </a:solidFill>
-                <a:latin typeface="Frutiger"/>
-                <a:ea typeface="Frutiger"/>
-                <a:cs typeface="Frutiger"/>
-              </a:rPr>
-              <a:t>YAML, DEMONSTRATED</a:t>
-            </a:r>
-            <a:endParaRPr sz="1801"/>
-          </a:p>
-        </p:txBody>
-      </p:sp>
-      <p:sp>
-        <p:nvSpPr>
-          <p:cNvPr id="3" name="Text 1">
-            <a:extLst>
-              <a:ext uri="{FF2B5EF4-FFF2-40B4-BE49-F238E27FC236}">
-                <a16:creationId xmlns:a16="http://schemas.microsoft.com/office/drawing/2014/main" id="{4EC90D35-304A-4ED8-BF67-87162AFBE388}"/>
-              </a:ext>
-            </a:extLst>
-          </p:cNvPr>
-          <p:cNvSpPr>
-            <a:spLocks noGrp="1"/>
-          </p:cNvSpPr>
-          <p:nvPr/>
-        </p:nvSpPr>
-        <p:spPr>
-          <a:xfrm>
-            <a:off x="838201" y="963812"/>
-            <a:ext cx="15240000" cy="640407"/>
-          </a:xfrm>
-          <a:prstGeom prst="rect">
-            <a:avLst/>
-          </a:prstGeom>
-          <a:noFill/>
-        </p:spPr>
-        <p:txBody>
-          <a:bodyPr wrap="square" lIns="25401" tIns="25401" rIns="25401" bIns="25401" anchor="t">
-            <a:normAutofit/>
-          </a:bodyPr>
-          <a:lstStyle/>
-          <a:p>
-            <a:pPr>
-              <a:lnSpc>
-                <a:spcPct val="79050"/>
-              </a:lnSpc>
-              <a:buNone/>
-            </a:pPr>
-            <a:r>
-              <a:rPr sz="4651" b="1" spc="-69">
-                <a:solidFill>
-                  <a:srgbClr val="001F6B"/>
-                </a:solidFill>
-                <a:latin typeface="Frutiger"/>
-                <a:ea typeface="Frutiger"/>
-                <a:cs typeface="Frutiger"/>
-              </a:rPr>
-              <a:t>Inside schema.yml: descriptions and tests</a:t>
-            </a:r>
-            <a:endParaRPr sz="4651"/>
-          </a:p>
-        </p:txBody>
-      </p:sp>
-      <p:pic>
-        <p:nvPicPr>
-          <p:cNvPr id="32" name="Image 0"/>
-          <p:cNvPicPr>
-            <a:picLocks noChangeAspect="1"/>
-          </p:cNvPicPr>
-          <p:nvPr/>
-        </p:nvPicPr>
-        <p:blipFill>
-          <a:blip r:embed="rId3"/>
-          <a:srcRect t="-5" b="-5"/>
-          <a:stretch/>
-        </p:blipFill>
-        <p:spPr>
-          <a:xfrm>
-            <a:off x="16412620" y="571500"/>
-            <a:ext cx="1037182" cy="514350"/>
-          </a:xfrm>
-          <a:prstGeom prst="rect">
-            <a:avLst/>
-          </a:prstGeom>
-        </p:spPr>
-      </p:pic>
-      <p:sp>
-        <p:nvSpPr>
-          <p:cNvPr id="5" name="Shape 2">
-            <a:extLst>
-              <a:ext uri="{FF2B5EF4-FFF2-40B4-BE49-F238E27FC236}">
-                <a16:creationId xmlns:a16="http://schemas.microsoft.com/office/drawing/2014/main" id="{619AE5D7-7CB4-4BEA-BB3F-D06573D3768F}"/>
-              </a:ext>
-            </a:extLst>
-          </p:cNvPr>
-          <p:cNvSpPr>
-            <a:spLocks noGrp="1"/>
-          </p:cNvSpPr>
-          <p:nvPr/>
-        </p:nvSpPr>
-        <p:spPr>
-          <a:xfrm>
-            <a:off x="838202" y="1813769"/>
-            <a:ext cx="16611600" cy="28574"/>
-          </a:xfrm>
-          <a:prstGeom prst="rect">
-            <a:avLst/>
-          </a:prstGeom>
-          <a:solidFill>
-            <a:srgbClr val="FF0000"/>
-          </a:solidFill>
-        </p:spPr>
-        <p:txBody>
-          <a:bodyPr/>
-          <a:lstStyle/>
-          <a:p>
-            <a:endParaRPr sz="1801"/>
-          </a:p>
-        </p:txBody>
-      </p:sp>
-      <p:sp>
-        <p:nvSpPr>
-          <p:cNvPr id="6" name="Shape 3">
-            <a:extLst>
-              <a:ext uri="{FF2B5EF4-FFF2-40B4-BE49-F238E27FC236}">
-                <a16:creationId xmlns:a16="http://schemas.microsoft.com/office/drawing/2014/main" id="{4913CC0E-0FDB-4091-96BC-623E005C1433}"/>
-              </a:ext>
-            </a:extLst>
-          </p:cNvPr>
-          <p:cNvSpPr>
-            <a:spLocks noGrp="1"/>
-          </p:cNvSpPr>
-          <p:nvPr/>
-        </p:nvSpPr>
-        <p:spPr>
-          <a:xfrm>
-            <a:off x="838202" y="1880445"/>
-            <a:ext cx="16611600" cy="28574"/>
-          </a:xfrm>
-          <a:prstGeom prst="rect">
-            <a:avLst/>
-          </a:prstGeom>
-          <a:solidFill>
-            <a:srgbClr val="3649A8"/>
-          </a:solidFill>
-        </p:spPr>
-        <p:txBody>
-          <a:bodyPr/>
-          <a:lstStyle/>
-          <a:p>
-            <a:endParaRPr sz="1801"/>
-          </a:p>
-        </p:txBody>
-      </p:sp>
-      <p:sp>
-        <p:nvSpPr>
-          <p:cNvPr id="25" name="Shape 22">
-            <a:extLst>
-              <a:ext uri="{FF2B5EF4-FFF2-40B4-BE49-F238E27FC236}">
-                <a16:creationId xmlns:a16="http://schemas.microsoft.com/office/drawing/2014/main" id="{B765AE01-8B3A-4F2B-9234-E1B2735FE6D0}"/>
-              </a:ext>
-            </a:extLst>
-          </p:cNvPr>
-          <p:cNvSpPr>
-            <a:spLocks noGrp="1"/>
-          </p:cNvSpPr>
-          <p:nvPr/>
-        </p:nvSpPr>
-        <p:spPr>
-          <a:xfrm>
-            <a:off x="838202" y="9294615"/>
-            <a:ext cx="16611600" cy="9525"/>
-          </a:xfrm>
-          <a:prstGeom prst="rect">
-            <a:avLst/>
-          </a:prstGeom>
-          <a:solidFill>
-            <a:srgbClr val="E2E7EB"/>
-          </a:solidFill>
-        </p:spPr>
-        <p:txBody>
-          <a:bodyPr/>
-          <a:lstStyle/>
-          <a:p>
-            <a:endParaRPr sz="1801"/>
-          </a:p>
-        </p:txBody>
-      </p:sp>
-      <p:sp>
-        <p:nvSpPr>
-          <p:cNvPr id="26" name="Text 23">
-            <a:extLst>
-              <a:ext uri="{FF2B5EF4-FFF2-40B4-BE49-F238E27FC236}">
-                <a16:creationId xmlns:a16="http://schemas.microsoft.com/office/drawing/2014/main" id="{5C5AFE6D-27B1-4C09-BBBE-19FE36BD27C8}"/>
-              </a:ext>
-            </a:extLst>
-          </p:cNvPr>
-          <p:cNvSpPr>
-            <a:spLocks noGrp="1"/>
-          </p:cNvSpPr>
-          <p:nvPr/>
-        </p:nvSpPr>
-        <p:spPr>
-          <a:xfrm>
-            <a:off x="838201" y="9513691"/>
-            <a:ext cx="7461945" cy="392311"/>
-          </a:xfrm>
-          <a:prstGeom prst="rect">
-            <a:avLst/>
-          </a:prstGeom>
-          <a:noFill/>
-        </p:spPr>
-        <p:txBody>
-          <a:bodyPr wrap="square" lIns="25401" tIns="25401" rIns="25401" bIns="25401" anchor="t">
-            <a:normAutofit/>
-          </a:bodyPr>
-          <a:lstStyle/>
-          <a:p>
-            <a:pPr>
-              <a:lnSpc>
-                <a:spcPct val="124000"/>
-              </a:lnSpc>
-              <a:buNone/>
-            </a:pPr>
-            <a:r>
-              <a:rPr sz="1801">
-                <a:solidFill>
-                  <a:srgbClr val="667780"/>
-                </a:solidFill>
-                <a:latin typeface="Frutiger"/>
-                <a:ea typeface="Frutiger"/>
-                <a:cs typeface="Frutiger"/>
-              </a:rPr>
-              <a:t>Getting started with dbt</a:t>
-            </a:r>
-            <a:endParaRPr sz="1801"/>
-          </a:p>
-        </p:txBody>
-      </p:sp>
-      <p:sp>
-        <p:nvSpPr>
-          <p:cNvPr id="28" name="Text 25">
-            <a:extLst>
-              <a:ext uri="{FF2B5EF4-FFF2-40B4-BE49-F238E27FC236}">
-                <a16:creationId xmlns:a16="http://schemas.microsoft.com/office/drawing/2014/main" id="{E1A6A13E-D079-4787-BA2C-26179E45E0AB}"/>
-              </a:ext>
-            </a:extLst>
-          </p:cNvPr>
-          <p:cNvSpPr>
-            <a:spLocks noGrp="1"/>
-          </p:cNvSpPr>
-          <p:nvPr/>
-        </p:nvSpPr>
-        <p:spPr>
-          <a:xfrm>
-            <a:off x="9987856" y="9513691"/>
-            <a:ext cx="7461945" cy="392311"/>
-          </a:xfrm>
-          <a:prstGeom prst="rect">
-            <a:avLst/>
-          </a:prstGeom>
-          <a:noFill/>
-        </p:spPr>
-        <p:txBody>
-          <a:bodyPr wrap="square" lIns="25401" tIns="25401" rIns="25401" bIns="25401" anchor="t">
-            <a:normAutofit/>
-          </a:bodyPr>
-          <a:lstStyle/>
-          <a:p>
-            <a:pPr algn="r">
-              <a:lnSpc>
-                <a:spcPct val="124000"/>
-              </a:lnSpc>
-              <a:buNone/>
-            </a:pPr>
-            <a:r>
-              <a:rPr lang="en-US" sz="1801">
-                <a:solidFill>
-                  <a:srgbClr val="667780"/>
-                </a:solidFill>
-                <a:latin typeface="Frutiger"/>
-                <a:ea typeface="Frutiger"/>
-                <a:cs typeface="Frutiger"/>
-              </a:rPr>
-              <a:t>13</a:t>
-            </a:r>
-            <a:endParaRPr sz="1801"/>
-          </a:p>
-        </p:txBody>
-      </p:sp>
-      <p:sp>
-        <p:nvSpPr>
-          <p:cNvPr id="100" name="Shape 100"/>
-          <p:cNvSpPr/>
-          <p:nvPr/>
-        </p:nvSpPr>
-        <p:spPr>
-          <a:xfrm>
-            <a:off x="838200" y="2311400"/>
-            <a:ext cx="8890000" cy="330200"/>
-          </a:xfrm>
-          <a:prstGeom prst="rect">
-            <a:avLst/>
-          </a:prstGeom>
-          <a:noFill/>
-          <a:ln>
-            <a:noFill/>
-          </a:ln>
-        </p:spPr>
-        <p:txBody>
-          <a:bodyPr wrap="square" lIns="0" tIns="0" rIns="0" bIns="0" anchor="t">
-            <a:normAutofit/>
-          </a:bodyPr>
-          <a:lstStyle/>
-          <a:p>
-            <a:pPr>
-              <a:buNone/>
-            </a:pPr>
-            <a:r>
-              <a:rPr lang="en-US" sz="1300" b="1" spc="150" dirty="0">
-                <a:solidFill>
-                  <a:srgbClr val="E40046"/>
-                </a:solidFill>
-                <a:latin typeface="Frutiger"/>
-                <a:cs typeface="Frutiger"/>
-              </a:rPr>
-              <a:t>MODELS/MARTS/CUSTOMERS.YML  ·  THE FILE THAT SITS NEXT TO CUSTOMERS.SQL</a:t>
-            </a:r>
-          </a:p>
-        </p:txBody>
-      </p:sp>
-      <p:sp>
-        <p:nvSpPr>
-          <p:cNvPr id="101" name="Code 101"/>
-          <p:cNvSpPr/>
-          <p:nvPr/>
-        </p:nvSpPr>
-        <p:spPr>
-          <a:xfrm>
-            <a:off x="838200" y="2667000"/>
-            <a:ext cx="8890000" cy="6426200"/>
-          </a:xfrm>
-          <a:prstGeom prst="roundRect">
-            <a:avLst>
-              <a:gd name="adj" fmla="val 4000"/>
-            </a:avLst>
-          </a:prstGeom>
-          <a:solidFill>
-            <a:srgbClr val="0E1E4A"/>
-          </a:solidFill>
-          <a:ln>
-            <a:noFill/>
-          </a:ln>
-        </p:spPr>
-        <p:txBody>
-          <a:bodyPr wrap="square" lIns="228600" tIns="203200" rIns="228600" bIns="228600" anchor="t">
-            <a:normAutofit lnSpcReduction="10000"/>
-          </a:bodyPr>
-          <a:lstStyle/>
-          <a:p>
-            <a:pPr>
-              <a:lnSpc>
-                <a:spcPct val="114000"/>
-              </a:lnSpc>
-              <a:buNone/>
-            </a:pPr>
-            <a:r>
-              <a:rPr lang="en-US" sz="1500" dirty="0">
-                <a:solidFill>
-                  <a:srgbClr val="8EC5FF"/>
-                </a:solidFill>
-                <a:latin typeface="Consolas"/>
-                <a:cs typeface="Consolas"/>
-              </a:rPr>
-              <a:t>models:</a:t>
-            </a:r>
-          </a:p>
-          <a:p>
-            <a:pPr>
-              <a:lnSpc>
-                <a:spcPct val="114000"/>
-              </a:lnSpc>
-              <a:buNone/>
-            </a:pPr>
-            <a:r>
-              <a:rPr lang="en-US" sz="1500" dirty="0">
-                <a:solidFill>
-                  <a:srgbClr val="E8ECF5"/>
-                </a:solidFill>
-                <a:latin typeface="Consolas"/>
-                <a:cs typeface="Consolas"/>
-              </a:rPr>
-              <a:t>  - name: </a:t>
-            </a:r>
-            <a:r>
-              <a:rPr lang="en-US" sz="1500" dirty="0">
-                <a:solidFill>
-                  <a:srgbClr val="E8ECF5"/>
-                </a:solidFill>
-                <a:latin typeface="Consolas"/>
-                <a:cs typeface="Consolas"/>
-              </a:rPr>
-              <a:t>customers</a:t>
-            </a:r>
-          </a:p>
-          <a:p>
-            <a:pPr>
-              <a:lnSpc>
-                <a:spcPct val="114000"/>
-              </a:lnSpc>
-              <a:buNone/>
-            </a:pPr>
-            <a:r>
-              <a:rPr lang="en-US" sz="1500" dirty="0">
-                <a:solidFill>
-                  <a:srgbClr val="8EC5FF"/>
-                </a:solidFill>
-                <a:latin typeface="Consolas"/>
-                <a:cs typeface="Consolas"/>
-              </a:rPr>
-              <a:t>    description: &gt;</a:t>
-            </a:r>
-          </a:p>
-          <a:p>
-            <a:pPr>
-              <a:lnSpc>
-                <a:spcPct val="114000"/>
-              </a:lnSpc>
-              <a:buNone/>
-            </a:pPr>
-            <a:r>
-              <a:rPr lang="en-US" sz="1500" dirty="0">
-                <a:solidFill>
-                  <a:srgbClr val="8EC5FF"/>
-                </a:solidFill>
-                <a:latin typeface="Consolas"/>
-                <a:cs typeface="Consolas"/>
-              </a:rPr>
-              <a:t>      One row per customer. A customer with a single</a:t>
-            </a:r>
-          </a:p>
-          <a:p>
-            <a:pPr>
-              <a:lnSpc>
-                <a:spcPct val="114000"/>
-              </a:lnSpc>
-              <a:buNone/>
-            </a:pPr>
-            <a:r>
-              <a:rPr lang="en-US" sz="1500" dirty="0">
-                <a:solidFill>
-                  <a:srgbClr val="8EC5FF"/>
-                </a:solidFill>
-                <a:latin typeface="Consolas"/>
-                <a:cs typeface="Consolas"/>
-              </a:rPr>
-              <a:t>      order is 'new'; two or more make them 'returning'.</a:t>
-            </a:r>
-          </a:p>
-          <a:p>
-            <a:pPr>
-              <a:lnSpc>
-                <a:spcPct val="114000"/>
-              </a:lnSpc>
-              <a:buNone/>
-            </a:pPr>
-            <a:r>
-              <a:rPr lang="en-US" sz="1500" dirty="0">
-                <a:solidFill>
-                  <a:srgbClr val="FFD27F"/>
-                </a:solidFill>
-                <a:latin typeface="Consolas"/>
-                <a:cs typeface="Consolas"/>
-              </a:rPr>
-              <a:t>      Amounts in USD.</a:t>
-            </a:r>
-          </a:p>
-          <a:p>
-            <a:pPr>
-              <a:lnSpc>
-                <a:spcPct val="114000"/>
-              </a:lnSpc>
-              <a:buNone/>
-            </a:pPr>
-            <a:r>
-              <a:rPr lang="en-US" sz="1500" dirty="0">
-                <a:solidFill>
-                  <a:srgbClr val="FFD27F"/>
-                </a:solidFill>
-                <a:latin typeface="Consolas"/>
-                <a:cs typeface="Consolas"/>
-              </a:rPr>
-              <a:t>    data_tests:</a:t>
-            </a:r>
-          </a:p>
-          <a:p>
-            <a:pPr>
-              <a:lnSpc>
-                <a:spcPct val="114000"/>
-              </a:lnSpc>
-              <a:buNone/>
-            </a:pPr>
-            <a:r>
-              <a:rPr lang="en-US" sz="1500" dirty="0">
-                <a:solidFill>
-                  <a:srgbClr val="FFD27F"/>
-                </a:solidFill>
-                <a:latin typeface="Consolas"/>
-                <a:cs typeface="Consolas"/>
-              </a:rPr>
-              <a:t>      - </a:t>
-            </a:r>
-            <a:r>
-              <a:rPr lang="en-US" sz="1500" dirty="0">
-                <a:solidFill>
-                  <a:srgbClr val="FFD27F"/>
-                </a:solidFill>
-                <a:latin typeface="Consolas"/>
-                <a:cs typeface="Consolas"/>
-              </a:rPr>
-              <a:t>dbt_utils.expression_is_true</a:t>
-            </a:r>
-            <a:r>
-              <a:rPr lang="en-US" sz="1500" dirty="0">
-                <a:solidFill>
-                  <a:srgbClr val="FFD27F"/>
-                </a:solidFill>
-                <a:latin typeface="Consolas"/>
-                <a:cs typeface="Consolas"/>
-              </a:rPr>
-              <a:t>:</a:t>
-            </a:r>
-          </a:p>
-          <a:p>
-            <a:pPr>
-              <a:lnSpc>
-                <a:spcPct val="114000"/>
-              </a:lnSpc>
-              <a:buNone/>
-            </a:pPr>
-            <a:r>
-              <a:rPr lang="en-US" sz="1500" dirty="0">
-                <a:solidFill>
-                  <a:srgbClr val="8EC5FF"/>
-                </a:solidFill>
-                <a:latin typeface="Consolas"/>
-                <a:cs typeface="Consolas"/>
-              </a:rPr>
-              <a:t>          arguments:</a:t>
-            </a:r>
-          </a:p>
-          <a:p>
-            <a:pPr>
-              <a:lnSpc>
-                <a:spcPct val="114000"/>
-              </a:lnSpc>
-              <a:buNone/>
-            </a:pPr>
-            <a:r>
-              <a:rPr lang="en-US" sz="1500" dirty="0">
-                <a:solidFill>
-                  <a:srgbClr val="8EC5FF"/>
-                </a:solidFill>
-                <a:latin typeface="Consolas"/>
-                <a:cs typeface="Consolas"/>
-              </a:rPr>
-              <a:t>            expression: </a:t>
-            </a:r>
-            <a:r>
-              <a:rPr lang="en-US" sz="1500" dirty="0">
-                <a:solidFill>
-                  <a:srgbClr val="E8ECF5"/>
-                </a:solidFill>
-                <a:latin typeface="Consolas"/>
-                <a:cs typeface="Consolas"/>
-              </a:rPr>
-              <a:t>"lifetime_spend_pretax + lifetime_tax_paid = lifetime_spend"</a:t>
-            </a:r>
-          </a:p>
-          <a:p>
-            <a:pPr>
-              <a:lnSpc>
-                <a:spcPct val="114000"/>
-              </a:lnSpc>
-              <a:buNone/>
-            </a:pPr>
-            <a:r>
-              <a:rPr lang="en-US" sz="1500" dirty="0">
-                <a:solidFill>
-                  <a:srgbClr val="8EC5FF"/>
-                </a:solidFill>
-                <a:latin typeface="Consolas"/>
-                <a:cs typeface="Consolas"/>
-              </a:rPr>
-              <a:t>    columns:</a:t>
-            </a:r>
-          </a:p>
-          <a:p>
-            <a:pPr>
-              <a:lnSpc>
-                <a:spcPct val="114000"/>
-              </a:lnSpc>
-              <a:buNone/>
-            </a:pPr>
-            <a:r>
-              <a:rPr lang="en-US" sz="1500" dirty="0">
-                <a:solidFill>
-                  <a:srgbClr val="8EC5FF"/>
-                </a:solidFill>
-                <a:latin typeface="Consolas"/>
-                <a:cs typeface="Consolas"/>
-              </a:rPr>
-              <a:t>      - name: </a:t>
-            </a:r>
-            <a:r>
-              <a:rPr lang="en-US" sz="1500" dirty="0">
-                <a:solidFill>
-                  <a:srgbClr val="8EC5FF"/>
-                </a:solidFill>
-                <a:latin typeface="Consolas"/>
-                <a:cs typeface="Consolas"/>
-              </a:rPr>
-              <a:t>customer_id</a:t>
-            </a:r>
-          </a:p>
-          <a:p>
-            <a:pPr>
-              <a:lnSpc>
-                <a:spcPct val="114000"/>
-              </a:lnSpc>
-              <a:buNone/>
-            </a:pPr>
-            <a:r>
-              <a:rPr lang="en-US" sz="1500" dirty="0">
-                <a:solidFill>
-                  <a:srgbClr val="8EC5FF"/>
-                </a:solidFill>
-                <a:latin typeface="Consolas"/>
-                <a:cs typeface="Consolas"/>
-              </a:rPr>
-              <a:t>        description: </a:t>
-            </a:r>
-            <a:r>
-              <a:rPr lang="en-US" sz="1500" dirty="0">
-                <a:solidFill>
-                  <a:srgbClr val="FF8FA3"/>
-                </a:solidFill>
-                <a:latin typeface="Consolas"/>
-                <a:cs typeface="Consolas"/>
-              </a:rPr>
-              <a:t>Grain key. Matches stg_customers.</a:t>
-            </a:r>
-          </a:p>
-          <a:p>
-            <a:pPr>
-              <a:lnSpc>
-                <a:spcPct val="114000"/>
-              </a:lnSpc>
-              <a:buNone/>
-            </a:pPr>
-            <a:r>
-              <a:rPr lang="en-US" sz="1500" dirty="0">
-                <a:solidFill>
-                  <a:srgbClr val="8EC5FF"/>
-                </a:solidFill>
-                <a:latin typeface="Consolas"/>
-                <a:cs typeface="Consolas"/>
-              </a:rPr>
-              <a:t>        data_tests:</a:t>
-            </a:r>
-          </a:p>
-          <a:p>
-            <a:pPr>
-              <a:lnSpc>
-                <a:spcPct val="114000"/>
-              </a:lnSpc>
-              <a:buNone/>
-            </a:pPr>
-            <a:r>
-              <a:rPr lang="en-US" sz="1500" dirty="0">
-                <a:solidFill>
-                  <a:srgbClr val="8EC5FF"/>
-                </a:solidFill>
-                <a:latin typeface="Consolas"/>
-                <a:cs typeface="Consolas"/>
-              </a:rPr>
-              <a:t>          - </a:t>
-            </a:r>
-            <a:r>
-              <a:rPr lang="en-US" sz="1500" dirty="0">
-                <a:solidFill>
-                  <a:srgbClr val="FF8FA3"/>
-                </a:solidFill>
-                <a:latin typeface="Consolas"/>
-                <a:cs typeface="Consolas"/>
-              </a:rPr>
-              <a:t>not_null</a:t>
-            </a:r>
-          </a:p>
-          <a:p>
-            <a:pPr>
-              <a:lnSpc>
-                <a:spcPct val="114000"/>
-              </a:lnSpc>
-              <a:buNone/>
-            </a:pPr>
-            <a:r>
-              <a:rPr lang="en-US" sz="1500" dirty="0">
-                <a:solidFill>
-                  <a:srgbClr val="8EC5FF"/>
-                </a:solidFill>
-                <a:latin typeface="Consolas"/>
-                <a:cs typeface="Consolas"/>
-              </a:rPr>
-              <a:t>          - </a:t>
-            </a:r>
-            <a:r>
-              <a:rPr lang="en-US" sz="1500" dirty="0">
-                <a:solidFill>
-                  <a:srgbClr val="E8ECF5"/>
-                </a:solidFill>
-                <a:latin typeface="Consolas"/>
-                <a:cs typeface="Consolas"/>
-              </a:rPr>
-              <a:t>unique</a:t>
-            </a:r>
-          </a:p>
-          <a:p>
-            <a:pPr>
-              <a:lnSpc>
-                <a:spcPct val="114000"/>
-              </a:lnSpc>
-              <a:buNone/>
-            </a:pPr>
-            <a:r>
-              <a:rPr lang="en-US" sz="1500" dirty="0">
-                <a:solidFill>
-                  <a:srgbClr val="8EC5FF"/>
-                </a:solidFill>
-                <a:latin typeface="Consolas"/>
-                <a:cs typeface="Consolas"/>
-              </a:rPr>
-              <a:t>      - name: </a:t>
-            </a:r>
-            <a:r>
-              <a:rPr lang="en-US" sz="1500" dirty="0">
-                <a:solidFill>
-                  <a:srgbClr val="E8ECF5"/>
-                </a:solidFill>
-                <a:latin typeface="Consolas"/>
-                <a:cs typeface="Consolas"/>
-              </a:rPr>
-              <a:t>customer_type</a:t>
-            </a:r>
-          </a:p>
-          <a:p>
-            <a:pPr>
-              <a:lnSpc>
-                <a:spcPct val="114000"/>
-              </a:lnSpc>
-              <a:buNone/>
-            </a:pPr>
-            <a:r>
-              <a:rPr lang="en-US" sz="1500" dirty="0">
-                <a:solidFill>
-                  <a:srgbClr val="8EC5FF"/>
-                </a:solidFill>
-                <a:latin typeface="Consolas"/>
-                <a:cs typeface="Consolas"/>
-              </a:rPr>
-              <a:t>        description: </a:t>
-            </a:r>
-            <a:r>
-              <a:rPr lang="en-US" sz="1500" dirty="0">
-                <a:solidFill>
-                  <a:srgbClr val="E8ECF5"/>
-                </a:solidFill>
-                <a:latin typeface="Consolas"/>
-                <a:cs typeface="Consolas"/>
-              </a:rPr>
-              <a:t>'new' or 'returning'.</a:t>
-            </a:r>
-          </a:p>
-          <a:p>
-            <a:pPr>
-              <a:lnSpc>
-                <a:spcPct val="114000"/>
-              </a:lnSpc>
-              <a:buNone/>
-            </a:pPr>
-            <a:r>
-              <a:rPr lang="en-US" sz="1500" dirty="0">
-                <a:solidFill>
-                  <a:srgbClr val="8EC5FF"/>
-                </a:solidFill>
-                <a:latin typeface="Consolas"/>
-                <a:cs typeface="Consolas"/>
-              </a:rPr>
-              <a:t>        data_tests:</a:t>
-            </a:r>
-          </a:p>
-          <a:p>
-            <a:pPr>
-              <a:lnSpc>
-                <a:spcPct val="114000"/>
-              </a:lnSpc>
-              <a:buNone/>
-            </a:pPr>
-            <a:r>
-              <a:rPr lang="en-US" sz="1500" dirty="0">
-                <a:solidFill>
-                  <a:srgbClr val="8EC5FF"/>
-                </a:solidFill>
-                <a:latin typeface="Consolas"/>
-                <a:cs typeface="Consolas"/>
-              </a:rPr>
-              <a:t>          - </a:t>
-            </a:r>
-            <a:r>
-              <a:rPr lang="en-US" sz="1500" dirty="0">
-                <a:solidFill>
-                  <a:srgbClr val="8EC5FF"/>
-                </a:solidFill>
-                <a:latin typeface="Consolas"/>
-                <a:cs typeface="Consolas"/>
-              </a:rPr>
-              <a:t>accepted_values</a:t>
-            </a:r>
-            <a:r>
-              <a:rPr lang="en-US" sz="1500" dirty="0">
-                <a:solidFill>
-                  <a:srgbClr val="8EC5FF"/>
-                </a:solidFill>
-                <a:latin typeface="Consolas"/>
-                <a:cs typeface="Consolas"/>
-              </a:rPr>
-              <a:t>:</a:t>
-            </a:r>
-          </a:p>
-          <a:p>
-            <a:pPr>
-              <a:lnSpc>
-                <a:spcPct val="114000"/>
-              </a:lnSpc>
-              <a:buNone/>
-            </a:pPr>
-            <a:r>
-              <a:rPr lang="en-US" sz="1500" dirty="0">
-                <a:solidFill>
-                  <a:srgbClr val="8EC5FF"/>
-                </a:solidFill>
-                <a:latin typeface="Consolas"/>
-                <a:cs typeface="Consolas"/>
-              </a:rPr>
-              <a:t>              arguments:</a:t>
-            </a:r>
-          </a:p>
-          <a:p>
-            <a:pPr>
-              <a:lnSpc>
-                <a:spcPct val="114000"/>
-              </a:lnSpc>
-              <a:buNone/>
-            </a:pPr>
-            <a:r>
-              <a:rPr lang="en-US" sz="1500" dirty="0">
-                <a:solidFill>
-                  <a:srgbClr val="8EC5FF"/>
-                </a:solidFill>
-                <a:latin typeface="Consolas"/>
-                <a:cs typeface="Consolas"/>
-              </a:rPr>
-              <a:t>                values: [</a:t>
-            </a:r>
-            <a:r>
-              <a:rPr lang="en-US" sz="1500" dirty="0">
-                <a:solidFill>
-                  <a:srgbClr val="FF8FA3"/>
-                </a:solidFill>
-                <a:latin typeface="Consolas"/>
-                <a:cs typeface="Consolas"/>
-              </a:rPr>
-              <a:t>"new", "returning"</a:t>
-            </a:r>
-            <a:r>
-              <a:rPr lang="en-US" sz="1500" dirty="0">
-                <a:solidFill>
-                  <a:srgbClr val="8EC5FF"/>
-                </a:solidFill>
-                <a:latin typeface="Consolas"/>
-                <a:cs typeface="Consolas"/>
-              </a:rPr>
-              <a:t>]</a:t>
-            </a:r>
-          </a:p>
-          <a:p>
-            <a:pPr>
-              <a:lnSpc>
-                <a:spcPct val="114000"/>
-              </a:lnSpc>
-              <a:buNone/>
-            </a:pPr>
-            <a:r>
-              <a:rPr lang="en-US" sz="1500" dirty="0">
-                <a:solidFill>
-                  <a:srgbClr val="8EC5FF"/>
-                </a:solidFill>
-                <a:latin typeface="Consolas"/>
-                <a:cs typeface="Consolas"/>
-              </a:rPr>
-              <a:t>      # … lifetime_spend, first_ordered_at, …</a:t>
-            </a:r>
-          </a:p>
-        </p:txBody>
-      </p:sp>
-      <p:cxnSp>
-        <p:nvCxnSpPr>
-          <p:cNvPr id="110" name="Line 110"/>
-          <p:cNvCxnSpPr/>
-          <p:nvPr/>
-        </p:nvCxnSpPr>
-        <p:spPr>
-          <a:xfrm>
-            <a:off x="9779000" y="2946400"/>
-            <a:ext cx="406400" cy="0"/>
-          </a:xfrm>
-          <a:prstGeom prst="line">
-            <a:avLst/>
-          </a:prstGeom>
-          <a:ln w="25400">
-            <a:solidFill>
-              <a:srgbClr val="E40046"/>
-            </a:solidFill>
-          </a:ln>
-        </p:spPr>
-      </p:cxnSp>
-      <p:sp>
-        <p:nvSpPr>
-          <p:cNvPr id="111" name="Shape 111"/>
-          <p:cNvSpPr/>
-          <p:nvPr/>
-        </p:nvSpPr>
-        <p:spPr>
-          <a:xfrm>
-            <a:off x="10312400" y="2641600"/>
-            <a:ext cx="7137400" cy="1219200"/>
-          </a:xfrm>
-          <a:prstGeom prst="rect">
-            <a:avLst/>
-          </a:prstGeom>
-          <a:noFill/>
-          <a:ln>
-            <a:noFill/>
-          </a:ln>
-        </p:spPr>
-        <p:txBody>
-          <a:bodyPr wrap="square" lIns="0" tIns="0" rIns="0" bIns="0" anchor="t">
-            <a:normAutofit/>
-          </a:bodyPr>
-          <a:lstStyle/>
-          <a:p>
-            <a:pPr>
-              <a:buNone/>
-            </a:pPr>
-            <a:r>
-              <a:rPr lang="en-US" sz="1900" b="1" dirty="0">
-                <a:solidFill>
-                  <a:srgbClr val="001F6B"/>
-                </a:solidFill>
-                <a:latin typeface="Frutiger"/>
-                <a:cs typeface="Frutiger"/>
-              </a:rPr>
-              <a:t>One YAML file, many models</a:t>
-            </a:r>
-          </a:p>
-          <a:p>
-            <a:pPr>
-              <a:lnSpc>
-                <a:spcPct val="104000"/>
-              </a:lnSpc>
-              <a:spcBef>
-                <a:spcPts val="300"/>
-              </a:spcBef>
-              <a:buNone/>
-            </a:pPr>
-            <a:r>
-              <a:rPr lang="en-US" sz="1600" dirty="0">
-                <a:solidFill>
-                  <a:srgbClr val="364750"/>
-                </a:solidFill>
-                <a:latin typeface="Frutiger"/>
-                <a:cs typeface="Frutiger"/>
-              </a:rPr>
-              <a:t>Filename is free (schema.yml, customers.yml…). It’s a list of models; each entry describes one .sql file by name.</a:t>
-            </a:r>
-          </a:p>
-        </p:txBody>
-      </p:sp>
-      <p:cxnSp>
-        <p:nvCxnSpPr>
-          <p:cNvPr id="113" name="Line 113"/>
-          <p:cNvCxnSpPr/>
-          <p:nvPr/>
-        </p:nvCxnSpPr>
-        <p:spPr>
-          <a:xfrm>
-            <a:off x="9779000" y="4038600"/>
-            <a:ext cx="406400" cy="0"/>
-          </a:xfrm>
-          <a:prstGeom prst="line">
-            <a:avLst/>
-          </a:prstGeom>
-          <a:ln w="25400">
-            <a:solidFill>
-              <a:srgbClr val="E40046"/>
-            </a:solidFill>
-          </a:ln>
-        </p:spPr>
-      </p:cxnSp>
-      <p:sp>
-        <p:nvSpPr>
-          <p:cNvPr id="114" name="Shape 114"/>
-          <p:cNvSpPr/>
-          <p:nvPr/>
-        </p:nvSpPr>
-        <p:spPr>
-          <a:xfrm>
-            <a:off x="10312400" y="3733800"/>
-            <a:ext cx="7137400" cy="1219200"/>
-          </a:xfrm>
-          <a:prstGeom prst="rect">
-            <a:avLst/>
-          </a:prstGeom>
-          <a:noFill/>
-          <a:ln>
-            <a:noFill/>
-          </a:ln>
-        </p:spPr>
-        <p:txBody>
-          <a:bodyPr wrap="square" lIns="0" tIns="0" rIns="0" bIns="0" anchor="t">
-            <a:normAutofit/>
-          </a:bodyPr>
-          <a:lstStyle/>
-          <a:p>
-            <a:pPr>
-              <a:buNone/>
-            </a:pPr>
-            <a:r>
-              <a:rPr lang="en-US" sz="1900" b="1" dirty="0">
-                <a:solidFill>
-                  <a:srgbClr val="001F6B"/>
-                </a:solidFill>
-                <a:latin typeface="Frutiger"/>
-                <a:cs typeface="Frutiger"/>
-              </a:rPr>
-              <a:t>Descriptions are documentation</a:t>
-            </a:r>
-          </a:p>
-          <a:p>
-            <a:pPr>
-              <a:lnSpc>
-                <a:spcPct val="104000"/>
-              </a:lnSpc>
-              <a:spcBef>
-                <a:spcPts val="300"/>
-              </a:spcBef>
-              <a:buNone/>
-            </a:pPr>
-            <a:r>
-              <a:rPr lang="en-US" sz="1600" dirty="0">
-                <a:solidFill>
-                  <a:srgbClr val="364750"/>
-                </a:solidFill>
-                <a:latin typeface="Frutiger"/>
-                <a:cs typeface="Frutiger"/>
-              </a:rPr>
-              <a:t>Written once here, they appear in dbt docs, in the lineage graph, and — with the right adapter — as column comments on the warehouse table.</a:t>
-            </a:r>
-          </a:p>
-        </p:txBody>
-      </p:sp>
-      <p:cxnSp>
-        <p:nvCxnSpPr>
-          <p:cNvPr id="116" name="Line 116"/>
-          <p:cNvCxnSpPr/>
-          <p:nvPr/>
-        </p:nvCxnSpPr>
-        <p:spPr>
-          <a:xfrm>
-            <a:off x="9779000" y="5308600"/>
-            <a:ext cx="406400" cy="0"/>
-          </a:xfrm>
-          <a:prstGeom prst="line">
-            <a:avLst/>
-          </a:prstGeom>
-          <a:ln w="25400">
-            <a:solidFill>
-              <a:srgbClr val="E40046"/>
-            </a:solidFill>
-          </a:ln>
-        </p:spPr>
-      </p:cxnSp>
-      <p:sp>
-        <p:nvSpPr>
-          <p:cNvPr id="117" name="Shape 117"/>
-          <p:cNvSpPr/>
-          <p:nvPr/>
-        </p:nvSpPr>
-        <p:spPr>
-          <a:xfrm>
-            <a:off x="10312400" y="5003800"/>
-            <a:ext cx="7137400" cy="1219200"/>
-          </a:xfrm>
-          <a:prstGeom prst="rect">
-            <a:avLst/>
-          </a:prstGeom>
-          <a:noFill/>
-          <a:ln>
-            <a:noFill/>
-          </a:ln>
-        </p:spPr>
-        <p:txBody>
-          <a:bodyPr wrap="square" lIns="0" tIns="0" rIns="0" bIns="0" anchor="t">
-            <a:normAutofit/>
-          </a:bodyPr>
-          <a:lstStyle/>
-          <a:p>
-            <a:pPr>
-              <a:buNone/>
-            </a:pPr>
-            <a:r>
-              <a:rPr lang="en-US" sz="1900" b="1" dirty="0">
-                <a:solidFill>
-                  <a:srgbClr val="001F6B"/>
-                </a:solidFill>
-                <a:latin typeface="Frutiger"/>
-                <a:cs typeface="Frutiger"/>
-              </a:rPr>
-              <a:t>Tests are assertions in YAML</a:t>
-            </a:r>
-          </a:p>
-          <a:p>
-            <a:pPr>
-              <a:lnSpc>
-                <a:spcPct val="104000"/>
-              </a:lnSpc>
-              <a:spcBef>
-                <a:spcPts val="300"/>
-              </a:spcBef>
-              <a:buNone/>
-            </a:pPr>
-            <a:r>
-              <a:rPr lang="en-US" sz="1600" dirty="0">
-                <a:solidFill>
-                  <a:srgbClr val="364750"/>
-                </a:solidFill>
-                <a:latin typeface="Frutiger"/>
-                <a:cs typeface="Frutiger"/>
-              </a:rPr>
-              <a:t>Each entry becomes a SQL query at run time. dbt build runs them right after the model builds; a failure stops downstream models.</a:t>
-            </a:r>
-          </a:p>
-        </p:txBody>
-      </p:sp>
-      <p:cxnSp>
-        <p:nvCxnSpPr>
-          <p:cNvPr id="119" name="Line 119"/>
-          <p:cNvCxnSpPr/>
-          <p:nvPr/>
-        </p:nvCxnSpPr>
-        <p:spPr>
-          <a:xfrm>
-            <a:off x="9779000" y="6654800"/>
-            <a:ext cx="406400" cy="0"/>
-          </a:xfrm>
-          <a:prstGeom prst="line">
-            <a:avLst/>
-          </a:prstGeom>
-          <a:ln w="25400">
-            <a:solidFill>
-              <a:srgbClr val="E40046"/>
-            </a:solidFill>
-          </a:ln>
-        </p:spPr>
-      </p:cxnSp>
-      <p:sp>
-        <p:nvSpPr>
-          <p:cNvPr id="120" name="Shape 120"/>
-          <p:cNvSpPr/>
-          <p:nvPr/>
-        </p:nvSpPr>
-        <p:spPr>
-          <a:xfrm>
-            <a:off x="10312400" y="6350000"/>
-            <a:ext cx="7137400" cy="1219200"/>
-          </a:xfrm>
-          <a:prstGeom prst="rect">
-            <a:avLst/>
-          </a:prstGeom>
-          <a:noFill/>
-          <a:ln>
-            <a:noFill/>
-          </a:ln>
-        </p:spPr>
-        <p:txBody>
-          <a:bodyPr wrap="square" lIns="0" tIns="0" rIns="0" bIns="0" anchor="t">
-            <a:normAutofit/>
-          </a:bodyPr>
-          <a:lstStyle/>
-          <a:p>
-            <a:pPr>
-              <a:buNone/>
-            </a:pPr>
-            <a:r>
-              <a:rPr lang="en-US" sz="1900" b="1" dirty="0">
-                <a:solidFill>
-                  <a:srgbClr val="001F6B"/>
-                </a:solidFill>
-                <a:latin typeface="Frutiger"/>
-                <a:cs typeface="Frutiger"/>
-              </a:rPr>
-              <a:t>Packages add more tests</a:t>
-            </a:r>
-          </a:p>
-          <a:p>
-            <a:pPr>
-              <a:lnSpc>
-                <a:spcPct val="104000"/>
-              </a:lnSpc>
-              <a:spcBef>
-                <a:spcPts val="300"/>
-              </a:spcBef>
-              <a:buNone/>
-            </a:pPr>
-            <a:r>
-              <a:rPr lang="en-US" sz="1600" dirty="0">
-                <a:solidFill>
-                  <a:srgbClr val="364750"/>
-                </a:solidFill>
-                <a:latin typeface="Frutiger"/>
-                <a:cs typeface="Frutiger"/>
-              </a:rPr>
-              <a:t>dbt_utils.expression_is_true, dbt_expectations… installed via packages.yml. Same YAML shape, someone else wrote the SQL.</a:t>
-            </a:r>
-          </a:p>
-        </p:txBody>
-      </p:sp>
-      <p:cxnSp>
-        <p:nvCxnSpPr>
-          <p:cNvPr id="122" name="Line 122"/>
-          <p:cNvCxnSpPr/>
-          <p:nvPr/>
-        </p:nvCxnSpPr>
-        <p:spPr>
-          <a:xfrm>
-            <a:off x="9779000" y="7899400"/>
-            <a:ext cx="406400" cy="0"/>
-          </a:xfrm>
-          <a:prstGeom prst="line">
-            <a:avLst/>
-          </a:prstGeom>
-          <a:ln w="25400">
-            <a:solidFill>
-              <a:srgbClr val="E40046"/>
-            </a:solidFill>
-          </a:ln>
-        </p:spPr>
-      </p:cxnSp>
-      <p:sp>
-        <p:nvSpPr>
-          <p:cNvPr id="123" name="Shape 123"/>
-          <p:cNvSpPr/>
-          <p:nvPr/>
-        </p:nvSpPr>
-        <p:spPr>
-          <a:xfrm>
-            <a:off x="10312400" y="7594600"/>
-            <a:ext cx="7137400" cy="1219200"/>
-          </a:xfrm>
-          <a:prstGeom prst="rect">
-            <a:avLst/>
-          </a:prstGeom>
-          <a:noFill/>
-          <a:ln>
-            <a:noFill/>
-          </a:ln>
-        </p:spPr>
-        <p:txBody>
-          <a:bodyPr wrap="square" lIns="0" tIns="0" rIns="0" bIns="0" anchor="t">
-            <a:normAutofit/>
-          </a:bodyPr>
-          <a:lstStyle/>
-          <a:p>
-            <a:pPr>
-              <a:buNone/>
-            </a:pPr>
-            <a:r>
-              <a:rPr lang="en-US" sz="1900" b="1" dirty="0">
-                <a:solidFill>
-                  <a:srgbClr val="001F6B"/>
-                </a:solidFill>
-                <a:latin typeface="Frutiger"/>
-                <a:cs typeface="Frutiger"/>
-              </a:rPr>
-              <a:t>Tests and docs are versioned with the code</a:t>
-            </a:r>
-          </a:p>
-          <a:p>
-            <a:pPr>
-              <a:lnSpc>
-                <a:spcPct val="104000"/>
-              </a:lnSpc>
-              <a:spcBef>
-                <a:spcPts val="300"/>
-              </a:spcBef>
-              <a:buNone/>
-            </a:pPr>
-            <a:r>
-              <a:rPr lang="en-US" sz="1600" dirty="0">
-                <a:solidFill>
-                  <a:srgbClr val="364750"/>
-                </a:solidFill>
-                <a:latin typeface="Frutiger"/>
-                <a:cs typeface="Frutiger"/>
-              </a:rPr>
-              <a:t>A pull request that changes the SELECT also shows the changed expectation. Review both together.</a:t>
-            </a:r>
-          </a:p>
-        </p:txBody>
-      </p:sp>
-    </p:spTree>
-    <p:extLst>
-      <p:ext uri="{BB962C8B-B14F-4D97-AF65-F5344CB8AC3E}">
-        <p14:creationId xmlns:p14="http://schemas.microsoft.com/office/powerpoint/2010/main" val="1914950974"/>
       </p:ext>
     </p:extLst>
   </p:cSld>
@@ -18645,7 +19373,7 @@
               <a:buNone/>
             </a:pPr>
             <a:r>
-              <a:rPr sz="6000" b="1" spc="-121">
+              <a:rPr sz="6000" b="1" spc="-121" dirty="0">
                 <a:solidFill>
                   <a:srgbClr val="FFFFFF"/>
                 </a:solidFill>
@@ -18653,7 +19381,29 @@
                 <a:ea typeface="Frutiger"/>
                 <a:cs typeface="Frutiger"/>
               </a:rPr>
-              <a:t>Build a useful mart</a:t>
+              <a:t>Build a useful </a:t>
+            </a:r>
+            <a:r>
+              <a:rPr lang="en-US" sz="6000" b="1" spc="-121" dirty="0">
+                <a:solidFill>
+                  <a:srgbClr val="FFFFFF"/>
+                </a:solidFill>
+                <a:latin typeface="Frutiger"/>
+                <a:ea typeface="Frutiger"/>
+                <a:cs typeface="Frutiger"/>
+              </a:rPr>
+              <a:t>data </a:t>
+            </a:r>
+            <a:r>
+              <a:rPr sz="6000" b="1" spc="-121" dirty="0">
+                <a:solidFill>
+                  <a:srgbClr val="FFFFFF"/>
+                </a:solidFill>
+                <a:latin typeface="Frutiger"/>
+                <a:ea typeface="Frutiger"/>
+                <a:cs typeface="Frutiger"/>
+              </a:rPr>
+              <a:t>mart</a:t>
             </a:r>
           </a:p>
         </p:txBody>
@@ -19199,7 +19949,7 @@
         </p:nvGraphicFramePr>
         <p:xfrm>
           <a:off x="9906000" y="1066800"/>
-          <a:ext cx="5969000" cy="2540000"/>
+          <a:ext cx="5969000" cy="2032000"/>
         </p:xfrm>
         <a:graphic>
           <a:graphicData uri="http://schemas.openxmlformats.org/drawingml/2006/table">
@@ -20457,7 +21207,7 @@
         </p:spPr>
         <p:txBody>
           <a:bodyPr wrap="square" lIns="0" tIns="0" rIns="0" bIns="0" anchor="ctr">
-            <a:normAutofit/>
+            <a:normAutofit fontScale="92500" lnSpcReduction="20000"/>
           </a:bodyPr>
           <a:lstStyle/>
           <a:p>
@@ -20714,14 +21464,24 @@
               <a:t>FAIL 61465 </a:t>
             </a:r>
             <a:r>
-              <a:rPr lang="en-US" sz="1500" dirty="0">
+              <a:rPr lang="en-US" sz="1500" dirty="0" err="1">
                 <a:solidFill>
                   <a:srgbClr val="E8ECF5"/>
                 </a:solidFill>
                 <a:latin typeface="Consolas"/>
                 <a:cs typeface="Consolas"/>
               </a:rPr>
-              <a:t>dbt_utils_expression_is_true_stg_orders_…</a:t>
+              <a:t>dbt_utils_expression_is_true_stg_orders</a:t>
+            </a:r>
+            <a:r>
+              <a:rPr lang="en-US" sz="1500" dirty="0">
+                <a:solidFill>
+                  <a:srgbClr val="E8ECF5"/>
+                </a:solidFill>
+                <a:latin typeface="Consolas"/>
+                <a:cs typeface="Consolas"/>
+              </a:rPr>
+              <a:t>_…</a:t>
             </a:r>
           </a:p>
           <a:p>
@@ -20858,57 +21618,6 @@
       </p:grpSpPr>
       <p:sp>
         <p:nvSpPr>
-          <p:cNvPr id="2" name="Text 0">
-            <a:extLst>
-              <a:ext uri="{FF2B5EF4-FFF2-40B4-BE49-F238E27FC236}">
-                <a16:creationId xmlns:a16="http://schemas.microsoft.com/office/drawing/2014/main" id="{EBF2AD33-830A-48C5-90B4-ADC3835E0158}"/>
-              </a:ext>
-            </a:extLst>
-          </p:cNvPr>
-          <p:cNvSpPr>
-            <a:spLocks noGrp="1"/>
-          </p:cNvSpPr>
-          <p:nvPr/>
-        </p:nvSpPr>
-        <p:spPr>
-          <a:xfrm>
-            <a:off x="838201" y="495302"/>
-            <a:ext cx="15240000" cy="392311"/>
-          </a:xfrm>
-          <a:prstGeom prst="rect">
-            <a:avLst/>
-          </a:prstGeom>
-          <a:noFill/>
-        </p:spPr>
-        <p:txBody>
-          <a:bodyPr wrap="square" lIns="25401" tIns="25401" rIns="25401" bIns="25401" anchor="t">
-            <a:normAutofit/>
-          </a:bodyPr>
-          <a:lstStyle/>
-          <a:p>
-            <a:pPr>
-              <a:lnSpc>
-                <a:spcPct val="120000"/>
-              </a:lnSpc>
-              <a:buNone/>
-            </a:pPr>
-            <a:r>
-              <a:rPr sz="1801" b="1" spc="361">
-                <a:solidFill>
-                  <a:srgbClr val="E40046"/>
-                </a:solidFill>
-                <a:latin typeface="Frutiger"/>
-                <a:ea typeface="Frutiger"/>
-                <a:cs typeface="Frutiger"/>
-              </a:rPr>
-              <a:t>READ THE RESULT CAREFULLY</a:t>
-            </a:r>
-            <a:endParaRPr sz="1801"/>
-          </a:p>
-        </p:txBody>
-      </p:sp>
-      <p:sp>
-        <p:nvSpPr>
           <p:cNvPr id="3" name="Text 1">
             <a:extLst>
               <a:ext uri="{FF2B5EF4-FFF2-40B4-BE49-F238E27FC236}">
@@ -20944,17 +21653,15 @@
               <a:buNone/>
             </a:pPr>
             <a:r>
-              <a:rPr sz="4651" b="1" spc="-69">
+              <a:rPr lang="en-US" sz="4651" b="1" spc="-69" dirty="0">
                 <a:solidFill>
                   <a:srgbClr val="001F6B"/>
                 </a:solidFill>
                 <a:latin typeface="Frutiger"/>
-                <a:ea typeface="Frutiger"/>
-                <a:cs typeface="Frutiger"/>
-              </a:rPr>
-              <a:t>What a green run does — and doesn’t — prove</a:t>
-            </a:r>
-            <a:endParaRPr sz="4651"/>
+              </a:rPr>
+              <a:t>dbt results</a:t>
+            </a:r>
+            <a:endParaRPr sz="4651" dirty="0"/>
           </a:p>
         </p:txBody>
       </p:sp>
@@ -21120,7 +21827,7 @@
               <a:buNone/>
             </a:pPr>
             <a:r>
-              <a:rPr sz="1801">
+              <a:rPr sz="1801" dirty="0">
                 <a:solidFill>
                   <a:srgbClr val="667780"/>
                 </a:solidFill>
@@ -21130,7 +21837,7 @@
               </a:rPr>
               <a:t>Getting started with dbt</a:t>
             </a:r>
-            <a:endParaRPr sz="1801"/>
+            <a:endParaRPr sz="1801" dirty="0"/>
           </a:p>
         </p:txBody>
       </p:sp>
@@ -22597,7 +23304,7 @@
               <a:buNone/>
             </a:pPr>
             <a:r>
-              <a:rPr sz="1801" b="1" spc="432">
+              <a:rPr sz="1801" b="1" spc="432" dirty="0">
                 <a:solidFill>
                   <a:srgbClr val="B6BFC4"/>
                 </a:solidFill>
@@ -22647,7 +23354,7 @@
               <a:buNone/>
             </a:pPr>
             <a:r>
-              <a:rPr sz="6000" b="1" spc="-121">
+              <a:rPr sz="6000" b="1" spc="-121" dirty="0">
                 <a:solidFill>
                   <a:srgbClr val="FFFFFF"/>
                 </a:solidFill>
@@ -23216,7 +23923,7 @@
         </p:spPr>
         <p:txBody>
           <a:bodyPr wrap="square" lIns="228600" tIns="203200" rIns="228600" bIns="228600" anchor="t">
-            <a:normAutofit lnSpcReduction="10000"/>
+            <a:normAutofit fontScale="92500"/>
           </a:bodyPr>
           <a:lstStyle/>
           <a:p>
@@ -23677,7 +24384,7 @@
               <a:buNone/>
             </a:pPr>
             <a:r>
-              <a:rPr sz="1801">
+              <a:rPr sz="1801" dirty="0">
                 <a:solidFill>
                   <a:srgbClr val="667780"/>
                 </a:solidFill>
@@ -23687,7 +24394,7 @@
               </a:rPr>
               <a:t>Getting started with dbt</a:t>
             </a:r>
-            <a:endParaRPr sz="1801"/>
+            <a:endParaRPr sz="1801" dirty="0"/>
           </a:p>
         </p:txBody>
       </p:sp>
@@ -25781,7 +26488,7 @@
               <a:buNone/>
             </a:pPr>
             <a:r>
-              <a:rPr sz="1801">
+              <a:rPr sz="1801" dirty="0">
                 <a:solidFill>
                   <a:srgbClr val="667780"/>
                 </a:solidFill>
@@ -25791,7 +26498,7 @@
               </a:rPr>
               <a:t>Getting started with dbt</a:t>
             </a:r>
-            <a:endParaRPr sz="1801"/>
+            <a:endParaRPr sz="1801" dirty="0"/>
           </a:p>
         </p:txBody>
       </p:sp>
@@ -26869,7 +27576,7 @@
         </p:spPr>
         <p:txBody>
           <a:bodyPr wrap="square" lIns="0" tIns="0" rIns="0" bIns="0" anchor="t">
-            <a:normAutofit/>
+            <a:normAutofit fontScale="77500" lnSpcReduction="20000"/>
           </a:bodyPr>
           <a:lstStyle/>
           <a:p>
@@ -27640,7 +28347,7 @@
               <a:buNone/>
             </a:pPr>
             <a:r>
-              <a:rPr sz="1801">
+              <a:rPr sz="1801" dirty="0">
                 <a:solidFill>
                   <a:srgbClr val="667780"/>
                 </a:solidFill>
@@ -27650,7 +28357,7 @@
               </a:rPr>
               <a:t>Getting started with dbt</a:t>
             </a:r>
-            <a:endParaRPr sz="1801"/>
+            <a:endParaRPr sz="1801" dirty="0"/>
           </a:p>
         </p:txBody>
       </p:sp>
@@ -29265,7 +29972,7 @@
         </p:spPr>
         <p:txBody>
           <a:bodyPr wrap="square" lIns="0" tIns="0" rIns="0" bIns="0" anchor="ctr">
-            <a:normAutofit/>
+            <a:normAutofit fontScale="92500" lnSpcReduction="20000"/>
           </a:bodyPr>
           <a:lstStyle/>
           <a:p>
@@ -29549,7 +30256,7 @@
         </p:spPr>
         <p:txBody>
           <a:bodyPr wrap="square" lIns="228600" tIns="203200" rIns="228600" bIns="228600" anchor="t">
-            <a:normAutofit/>
+            <a:normAutofit lnSpcReduction="10000"/>
           </a:bodyPr>
           <a:lstStyle/>
           <a:p>
@@ -29727,27 +30434,7 @@
                 <a:latin typeface="Consolas"/>
                 <a:cs typeface="Consolas"/>
               </a:rPr>
-              <a:t>LH_Jaffle_Shop</a:t>
-            </a:r>
-            <a:r>
-              <a:rPr lang="en-US" sz="1300" dirty="0">
-                <a:solidFill>
-                  <a:srgbClr val="FF8FA3"/>
-                </a:solidFill>
-                <a:latin typeface="Consolas"/>
-                <a:cs typeface="Consolas"/>
-              </a:rPr>
-              <a:t>   schema: </a:t>
-            </a:r>
-            <a:r>
-              <a:rPr lang="en-US" sz="1300" dirty="0">
-                <a:solidFill>
-                  <a:srgbClr val="FF8FA3"/>
-                </a:solidFill>
-                <a:latin typeface="Consolas"/>
-                <a:cs typeface="Consolas"/>
-              </a:rPr>
-              <a:t>jaffle_shop</a:t>
+              <a:t>LH_Jaffle_Shop   schema: jaffle_shop</a:t>
             </a:r>
           </a:p>
           <a:p>
@@ -29813,27 +30500,7 @@
                 <a:latin typeface="Consolas"/>
                 <a:cs typeface="Consolas"/>
               </a:rPr>
-              <a:t>true</a:t>
-            </a:r>
-            <a:r>
-              <a:rPr lang="en-US" sz="1300" dirty="0">
-                <a:solidFill>
-                  <a:srgbClr val="FFD27F"/>
-                </a:solidFill>
-                <a:latin typeface="Consolas"/>
-                <a:cs typeface="Consolas"/>
-              </a:rPr>
-              <a:t>     threads: </a:t>
-            </a:r>
-            <a:r>
-              <a:rPr lang="en-US" sz="1300" dirty="0">
-                <a:solidFill>
-                  <a:srgbClr val="FFD27F"/>
-                </a:solidFill>
-                <a:latin typeface="Consolas"/>
-                <a:cs typeface="Consolas"/>
-              </a:rPr>
-              <a:t>4</a:t>
+              <a:t>true     threads: 4</a:t>
             </a:r>
           </a:p>
         </p:txBody>
@@ -29964,7 +30631,7 @@
               <a:buNone/>
             </a:pPr>
             <a:r>
-              <a:rPr sz="4651" b="1" spc="-69">
+              <a:rPr sz="4651" b="1" spc="-69" dirty="0">
                 <a:solidFill>
                   <a:srgbClr val="001F6B"/>
                 </a:solidFill>
@@ -29974,7 +30641,7 @@
               </a:rPr>
               <a:t>dbt on the Lakehouse — how it actually runs</a:t>
             </a:r>
-            <a:endParaRPr sz="4651"/>
+            <a:endParaRPr sz="4651" dirty="0"/>
           </a:p>
         </p:txBody>
       </p:sp>
@@ -30140,7 +30807,7 @@
               <a:buNone/>
             </a:pPr>
             <a:r>
-              <a:rPr sz="1801">
+              <a:rPr sz="1801" dirty="0">
                 <a:solidFill>
                   <a:srgbClr val="667780"/>
                 </a:solidFill>
@@ -30150,7 +30817,7 @@
               </a:rPr>
               <a:t>Getting started with dbt</a:t>
             </a:r>
-            <a:endParaRPr sz="1801"/>
+            <a:endParaRPr sz="1801" dirty="0"/>
           </a:p>
         </p:txBody>
       </p:sp>
@@ -31575,7 +32242,7 @@
         </p:spPr>
         <p:txBody>
           <a:bodyPr wrap="square" lIns="25401" tIns="25401" rIns="25401" bIns="25401" anchor="t">
-            <a:normAutofit/>
+            <a:normAutofit fontScale="92500"/>
           </a:bodyPr>
           <a:lstStyle/>
           <a:p>
@@ -31727,7 +32394,7 @@
         </p:spPr>
         <p:txBody>
           <a:bodyPr wrap="square" lIns="0" tIns="0" rIns="0" bIns="0" anchor="ctr">
-            <a:normAutofit fontScale="92500"/>
+            <a:normAutofit/>
           </a:bodyPr>
           <a:lstStyle/>
           <a:p>
@@ -32009,7 +32676,7 @@
         </p:spPr>
         <p:txBody>
           <a:bodyPr wrap="square" lIns="0" tIns="0" rIns="0" bIns="0" anchor="ctr">
-            <a:normAutofit fontScale="92500"/>
+            <a:normAutofit fontScale="92500" lnSpcReduction="20000"/>
           </a:bodyPr>
           <a:lstStyle/>
           <a:p>
@@ -32105,7 +32772,7 @@
         </p:spPr>
         <p:txBody>
           <a:bodyPr wrap="square" lIns="228600" tIns="203200" rIns="228600" bIns="228600" anchor="t">
-            <a:normAutofit/>
+            <a:normAutofit fontScale="92500" lnSpcReduction="10000"/>
           </a:bodyPr>
           <a:lstStyle/>
           <a:p>
@@ -32361,17 +33028,7 @@
                 <a:latin typeface="Consolas"/>
                 <a:cs typeface="Consolas"/>
               </a:rPr>
-              <a:t>   trust_cert: </a:t>
-            </a:r>
-            <a:r>
-              <a:rPr lang="en-US" sz="1300" dirty="0">
-                <a:solidFill>
-                  <a:srgbClr val="8EC5FF"/>
-                </a:solidFill>
-                <a:latin typeface="Consolas"/>
-                <a:cs typeface="Consolas"/>
-              </a:rPr>
-              <a:t>false</a:t>
+              <a:t>   trust_cert: false</a:t>
             </a:r>
           </a:p>
         </p:txBody>
@@ -32678,7 +33335,7 @@
               <a:buNone/>
             </a:pPr>
             <a:r>
-              <a:rPr sz="1801">
+              <a:rPr sz="1801" dirty="0">
                 <a:solidFill>
                   <a:srgbClr val="667780"/>
                 </a:solidFill>
@@ -32688,7 +33345,7 @@
               </a:rPr>
               <a:t>Getting started with dbt</a:t>
             </a:r>
-            <a:endParaRPr sz="1801"/>
+            <a:endParaRPr sz="1801" dirty="0"/>
           </a:p>
         </p:txBody>
       </p:sp>
@@ -33124,7 +33781,7 @@
         </p:spPr>
         <p:txBody>
           <a:bodyPr wrap="square" lIns="228600" tIns="203200" rIns="228600" bIns="228600" anchor="t">
-            <a:normAutofit/>
+            <a:normAutofit lnSpcReduction="10000"/>
           </a:bodyPr>
           <a:lstStyle/>
           <a:p>
@@ -33256,17 +33913,7 @@
                 <a:latin typeface="Consolas"/>
                 <a:cs typeface="Consolas"/>
               </a:rPr>
-              <a:t>dbt build --target ci</a:t>
-            </a:r>
-            <a:r>
-              <a:rPr lang="en-US" sz="1500" dirty="0">
-                <a:solidFill>
-                  <a:srgbClr val="E8ECF5"/>
-                </a:solidFill>
-                <a:latin typeface="Consolas"/>
-                <a:cs typeface="Consolas"/>
-              </a:rPr>
-              <a:t>   # schema ci_$(Build.BuildId)</a:t>
+              <a:t>dbt build --target ci   # schema ci_$(Build.BuildId)</a:t>
             </a:r>
           </a:p>
           <a:p>
@@ -34212,7 +34859,7 @@
               <a:buNone/>
             </a:pPr>
             <a:r>
-              <a:rPr sz="4651" b="1" spc="-69">
+              <a:rPr sz="4651" b="1" spc="-69" dirty="0">
                 <a:solidFill>
                   <a:srgbClr val="001F6B"/>
                 </a:solidFill>
@@ -34222,7 +34869,7 @@
               </a:rPr>
               <a:t>The Fabric dbt job: dbt without the plumbing</a:t>
             </a:r>
-            <a:endParaRPr sz="4651"/>
+            <a:endParaRPr sz="4651" dirty="0"/>
           </a:p>
         </p:txBody>
       </p:sp>
@@ -34388,7 +35035,7 @@
               <a:buNone/>
             </a:pPr>
             <a:r>
-              <a:rPr sz="1801">
+              <a:rPr sz="1801" dirty="0">
                 <a:solidFill>
                   <a:srgbClr val="667780"/>
                 </a:solidFill>
@@ -34398,7 +35045,7 @@
               </a:rPr>
               <a:t>Getting started with dbt</a:t>
             </a:r>
-            <a:endParaRPr sz="1801"/>
+            <a:endParaRPr sz="1801" dirty="0"/>
           </a:p>
         </p:txBody>
       </p:sp>
@@ -34767,7 +35414,7 @@
         </p:spPr>
         <p:txBody>
           <a:bodyPr wrap="square" lIns="0" tIns="0" rIns="0" bIns="0" anchor="t">
-            <a:normAutofit/>
+            <a:normAutofit fontScale="85000" lnSpcReduction="10000"/>
           </a:bodyPr>
           <a:lstStyle/>
           <a:p>
@@ -35378,7 +36025,27 @@
                 <a:latin typeface="Frutiger"/>
                 <a:cs typeface="Frutiger"/>
               </a:rPr>
-              <a:t>Packages such as dbt_utils install from packages.yml at run time</a:t>
+              <a:t>Packages such as </a:t>
+            </a:r>
+            <a:r>
+              <a:rPr lang="en-US" sz="1600" dirty="0" err="1">
+                <a:solidFill>
+                  <a:srgbClr val="364750"/>
+                </a:solidFill>
+                <a:latin typeface="Frutiger"/>
+                <a:cs typeface="Frutiger"/>
+              </a:rPr>
+              <a:t>dbt_utils</a:t>
+            </a:r>
+            <a:r>
+              <a:rPr lang="en-US" sz="1600" dirty="0">
+                <a:solidFill>
+                  <a:srgbClr val="364750"/>
+                </a:solidFill>
+                <a:latin typeface="Frutiger"/>
+                <a:cs typeface="Frutiger"/>
+              </a:rPr>
+              <a:t> install from packages.yml at run time</a:t>
             </a:r>
           </a:p>
         </p:txBody>
@@ -36324,7 +36991,7 @@
               <a:buNone/>
             </a:pPr>
             <a:r>
-              <a:rPr sz="1801">
+              <a:rPr sz="1801" dirty="0">
                 <a:solidFill>
                   <a:srgbClr val="667780"/>
                 </a:solidFill>
@@ -36334,7 +37001,7 @@
               </a:rPr>
               <a:t>Getting started with dbt</a:t>
             </a:r>
-            <a:endParaRPr sz="1801"/>
+            <a:endParaRPr sz="1801" dirty="0"/>
           </a:p>
         </p:txBody>
       </p:sp>
@@ -37813,7 +38480,7 @@
               <a:buNone/>
             </a:pPr>
             <a:r>
-              <a:rPr sz="1801">
+              <a:rPr sz="1801" dirty="0">
                 <a:solidFill>
                   <a:srgbClr val="667780"/>
                 </a:solidFill>
@@ -37823,7 +38490,7 @@
               </a:rPr>
               <a:t>Getting started with dbt</a:t>
             </a:r>
-            <a:endParaRPr sz="1801"/>
+            <a:endParaRPr sz="1801" dirty="0"/>
           </a:p>
         </p:txBody>
       </p:sp>
@@ -38783,6 +39450,16 @@
               <a:buNone/>
             </a:pPr>
             <a:r>
+              <a:rPr lang="en-US" sz="1800" dirty="0" err="1">
+                <a:solidFill>
+                  <a:srgbClr val="364750"/>
+                </a:solidFill>
+                <a:latin typeface="Frutiger"/>
+                <a:cs typeface="Frutiger"/>
+              </a:rPr>
+              <a:t>dbt_utils</a:t>
+            </a:r>
+            <a:r>
               <a:rPr lang="en-US" sz="1800" dirty="0">
                 <a:solidFill>
                   <a:srgbClr val="364750"/>
@@ -38790,7 +39467,7 @@
                 <a:latin typeface="Frutiger"/>
                 <a:cs typeface="Frutiger"/>
               </a:rPr>
-              <a:t>dbt_utils and friends add reusable tests and cross-database macros. Write your own macros for repeated SQL patterns. Every package has a support matrix.</a:t>
+              <a:t> and friends add reusable tests and cross-database macros. Write your own macros for repeated SQL patterns. Every package has a support matrix.</a:t>
             </a:r>
           </a:p>
         </p:txBody>
@@ -40097,7 +40774,7 @@
               <a:buNone/>
             </a:pPr>
             <a:r>
-              <a:rPr sz="1801">
+              <a:rPr sz="1801" dirty="0">
                 <a:solidFill>
                   <a:srgbClr val="667780"/>
                 </a:solidFill>
@@ -40107,7 +40784,7 @@
               </a:rPr>
               <a:t>Getting started with dbt</a:t>
             </a:r>
-            <a:endParaRPr sz="1801"/>
+            <a:endParaRPr sz="1801" dirty="0"/>
           </a:p>
         </p:txBody>
       </p:sp>
@@ -41141,7 +41818,7 @@
         </p:spPr>
         <p:txBody>
           <a:bodyPr wrap="square" lIns="0" tIns="0" rIns="0" bIns="0" anchor="t">
-            <a:normAutofit lnSpcReduction="10000"/>
+            <a:normAutofit fontScale="85000" lnSpcReduction="10000"/>
           </a:bodyPr>
           <a:lstStyle/>
           <a:p>
@@ -41267,7 +41944,7 @@
               <a:buNone/>
             </a:pPr>
             <a:r>
-              <a:rPr sz="1801" b="1" spc="361">
+              <a:rPr sz="1801" b="1" spc="361" dirty="0">
                 <a:solidFill>
                   <a:srgbClr val="E40046"/>
                 </a:solidFill>
@@ -41277,7 +41954,7 @@
               </a:rPr>
               <a:t>WHERE DBT FITS</a:t>
             </a:r>
-            <a:endParaRPr sz="1801"/>
+            <a:endParaRPr sz="1801" dirty="0"/>
           </a:p>
         </p:txBody>
       </p:sp>
@@ -41318,7 +41995,7 @@
               <a:buNone/>
             </a:pPr>
             <a:r>
-              <a:rPr sz="4651" b="1" spc="-69">
+              <a:rPr sz="4651" b="1" spc="-69" dirty="0">
                 <a:solidFill>
                   <a:srgbClr val="001F6B"/>
                 </a:solidFill>
@@ -41328,7 +42005,7 @@
               </a:rPr>
               <a:t>What dbt is — and what it isn’t</a:t>
             </a:r>
-            <a:endParaRPr sz="4651"/>
+            <a:endParaRPr sz="4651" dirty="0"/>
           </a:p>
         </p:txBody>
       </p:sp>
@@ -41494,7 +42171,7 @@
               <a:buNone/>
             </a:pPr>
             <a:r>
-              <a:rPr sz="1801">
+              <a:rPr sz="1801" dirty="0">
                 <a:solidFill>
                   <a:srgbClr val="667780"/>
                 </a:solidFill>
@@ -41504,7 +42181,7 @@
               </a:rPr>
               <a:t>Getting started with dbt</a:t>
             </a:r>
-            <a:endParaRPr sz="1801"/>
+            <a:endParaRPr sz="1801" dirty="0"/>
           </a:p>
         </p:txBody>
       </p:sp>
@@ -43087,7 +43764,7 @@
               <a:buNone/>
             </a:pPr>
             <a:r>
-              <a:rPr sz="4651" b="1" spc="-69">
+              <a:rPr sz="4651" b="1" spc="-69" dirty="0">
                 <a:solidFill>
                   <a:srgbClr val="001F6B"/>
                 </a:solidFill>
@@ -43097,7 +43774,7 @@
               </a:rPr>
               <a:t>dbt is the default transformation layer — everywhere</a:t>
             </a:r>
-            <a:endParaRPr sz="4651"/>
+            <a:endParaRPr sz="4651" dirty="0"/>
           </a:p>
         </p:txBody>
       </p:sp>
@@ -43263,7 +43940,7 @@
               <a:buNone/>
             </a:pPr>
             <a:r>
-              <a:rPr sz="1801">
+              <a:rPr sz="1801" dirty="0">
                 <a:solidFill>
                   <a:srgbClr val="667780"/>
                 </a:solidFill>
@@ -43273,7 +43950,7 @@
               </a:rPr>
               <a:t>Getting started with dbt</a:t>
             </a:r>
-            <a:endParaRPr sz="1801"/>
+            <a:endParaRPr sz="1801" dirty="0"/>
           </a:p>
         </p:txBody>
       </p:sp>
@@ -44769,7 +45446,7 @@
               <a:buNone/>
             </a:pPr>
             <a:r>
-              <a:rPr sz="4651" b="1" spc="-69">
+              <a:rPr sz="4651" b="1" spc="-69" dirty="0">
                 <a:solidFill>
                   <a:srgbClr val="001F6B"/>
                 </a:solidFill>
@@ -44779,7 +45456,7 @@
               </a:rPr>
               <a:t>dbt Core, adapters and the managed options</a:t>
             </a:r>
-            <a:endParaRPr sz="4651"/>
+            <a:endParaRPr sz="4651" dirty="0"/>
           </a:p>
         </p:txBody>
       </p:sp>
@@ -44945,7 +45622,7 @@
               <a:buNone/>
             </a:pPr>
             <a:r>
-              <a:rPr sz="1801">
+              <a:rPr sz="1801" dirty="0">
                 <a:solidFill>
                   <a:srgbClr val="667780"/>
                 </a:solidFill>
@@ -44955,7 +45632,7 @@
               </a:rPr>
               <a:t>Getting started with dbt</a:t>
             </a:r>
-            <a:endParaRPr sz="1801"/>
+            <a:endParaRPr sz="1801" dirty="0"/>
           </a:p>
         </p:txBody>
       </p:sp>
@@ -46336,57 +47013,6 @@
       </p:grpSpPr>
       <p:sp>
         <p:nvSpPr>
-          <p:cNvPr id="2" name="Text 0">
-            <a:extLst>
-              <a:ext uri="{FF2B5EF4-FFF2-40B4-BE49-F238E27FC236}">
-                <a16:creationId xmlns:a16="http://schemas.microsoft.com/office/drawing/2014/main" id="{EBF2AD33-830A-48C5-90B4-ADC3835E0158}"/>
-              </a:ext>
-            </a:extLst>
-          </p:cNvPr>
-          <p:cNvSpPr>
-            <a:spLocks noGrp="1"/>
-          </p:cNvSpPr>
-          <p:nvPr/>
-        </p:nvSpPr>
-        <p:spPr>
-          <a:xfrm>
-            <a:off x="838201" y="495302"/>
-            <a:ext cx="15240000" cy="392311"/>
-          </a:xfrm>
-          <a:prstGeom prst="rect">
-            <a:avLst/>
-          </a:prstGeom>
-          <a:noFill/>
-        </p:spPr>
-        <p:txBody>
-          <a:bodyPr wrap="square" lIns="25401" tIns="25401" rIns="25401" bIns="25401" anchor="t">
-            <a:normAutofit/>
-          </a:bodyPr>
-          <a:lstStyle/>
-          <a:p>
-            <a:pPr>
-              <a:lnSpc>
-                <a:spcPct val="120000"/>
-              </a:lnSpc>
-              <a:buNone/>
-            </a:pPr>
-            <a:r>
-              <a:rPr sz="1801" b="1" spc="361">
-                <a:solidFill>
-                  <a:srgbClr val="E40046"/>
-                </a:solidFill>
-                <a:latin typeface="Frutiger"/>
-                <a:ea typeface="Frutiger"/>
-                <a:cs typeface="Frutiger"/>
-              </a:rPr>
-              <a:t>EXECUTION MODEL</a:t>
-            </a:r>
-            <a:endParaRPr sz="1801"/>
-          </a:p>
-        </p:txBody>
-      </p:sp>
-      <p:sp>
-        <p:nvSpPr>
           <p:cNvPr id="3" name="Text 1">
             <a:extLst>
               <a:ext uri="{FF2B5EF4-FFF2-40B4-BE49-F238E27FC236}">
@@ -46422,17 +47048,15 @@
               <a:buNone/>
             </a:pPr>
             <a:r>
-              <a:rPr sz="4651" b="1" spc="-69">
+              <a:rPr lang="en-US" sz="4651" b="1" spc="-69" dirty="0">
                 <a:solidFill>
                   <a:srgbClr val="001F6B"/>
                 </a:solidFill>
                 <a:latin typeface="Frutiger"/>
-                <a:ea typeface="Frutiger"/>
-                <a:cs typeface="Frutiger"/>
-              </a:rPr>
-              <a:t>Who runs what?</a:t>
-            </a:r>
-            <a:endParaRPr sz="4651"/>
+              </a:rPr>
+              <a:t>dbt execution</a:t>
+            </a:r>
+            <a:endParaRPr sz="4651" dirty="0"/>
           </a:p>
         </p:txBody>
       </p:sp>
@@ -46598,7 +47222,7 @@
               <a:buNone/>
             </a:pPr>
             <a:r>
-              <a:rPr sz="1801">
+              <a:rPr sz="1801" dirty="0">
                 <a:solidFill>
                   <a:srgbClr val="667780"/>
                 </a:solidFill>
@@ -46608,7 +47232,7 @@
               </a:rPr>
               <a:t>Getting started with dbt</a:t>
             </a:r>
-            <a:endParaRPr sz="1801"/>
+            <a:endParaRPr sz="1801" dirty="0"/>
           </a:p>
         </p:txBody>
       </p:sp>
@@ -47634,57 +48258,6 @@
       </p:grpSpPr>
       <p:sp>
         <p:nvSpPr>
-          <p:cNvPr id="2" name="Text 0">
-            <a:extLst>
-              <a:ext uri="{FF2B5EF4-FFF2-40B4-BE49-F238E27FC236}">
-                <a16:creationId xmlns:a16="http://schemas.microsoft.com/office/drawing/2014/main" id="{EBF2AD33-830A-48C5-90B4-ADC3835E0158}"/>
-              </a:ext>
-            </a:extLst>
-          </p:cNvPr>
-          <p:cNvSpPr>
-            <a:spLocks noGrp="1"/>
-          </p:cNvSpPr>
-          <p:nvPr/>
-        </p:nvSpPr>
-        <p:spPr>
-          <a:xfrm>
-            <a:off x="838201" y="495302"/>
-            <a:ext cx="15240000" cy="392311"/>
-          </a:xfrm>
-          <a:prstGeom prst="rect">
-            <a:avLst/>
-          </a:prstGeom>
-          <a:noFill/>
-        </p:spPr>
-        <p:txBody>
-          <a:bodyPr wrap="square" lIns="25401" tIns="25401" rIns="25401" bIns="25401" anchor="t">
-            <a:normAutofit/>
-          </a:bodyPr>
-          <a:lstStyle/>
-          <a:p>
-            <a:pPr>
-              <a:lnSpc>
-                <a:spcPct val="120000"/>
-              </a:lnSpc>
-              <a:buNone/>
-            </a:pPr>
-            <a:r>
-              <a:rPr sz="1801" b="1" spc="361">
-                <a:solidFill>
-                  <a:srgbClr val="E40046"/>
-                </a:solidFill>
-                <a:latin typeface="Frutiger"/>
-                <a:ea typeface="Frutiger"/>
-                <a:cs typeface="Frutiger"/>
-              </a:rPr>
-              <a:t>TERMINOLOGY</a:t>
-            </a:r>
-            <a:endParaRPr sz="1801"/>
-          </a:p>
-        </p:txBody>
-      </p:sp>
-      <p:sp>
-        <p:nvSpPr>
           <p:cNvPr id="3" name="Text 1">
             <a:extLst>
               <a:ext uri="{FF2B5EF4-FFF2-40B4-BE49-F238E27FC236}">
@@ -47720,17 +48293,15 @@
               <a:buNone/>
             </a:pPr>
             <a:r>
-              <a:rPr sz="4651" b="1" spc="-69">
+              <a:rPr lang="en-US" sz="4651" b="1" spc="-69" dirty="0">
                 <a:solidFill>
                   <a:srgbClr val="001F6B"/>
                 </a:solidFill>
                 <a:latin typeface="Frutiger"/>
-                <a:ea typeface="Frutiger"/>
-                <a:cs typeface="Frutiger"/>
-              </a:rPr>
-              <a:t>Eight words you’ll hear all hour</a:t>
-            </a:r>
-            <a:endParaRPr sz="4651"/>
+              </a:rPr>
+              <a:t>dbt terminology</a:t>
+            </a:r>
+            <a:endParaRPr sz="4651" dirty="0"/>
           </a:p>
         </p:txBody>
       </p:sp>
@@ -47896,7 +48467,7 @@
               <a:buNone/>
             </a:pPr>
             <a:r>
-              <a:rPr sz="1801">
+              <a:rPr sz="1801" dirty="0">
                 <a:solidFill>
                   <a:srgbClr val="667780"/>
                 </a:solidFill>
@@ -47906,7 +48477,7 @@
               </a:rPr>
               <a:t>Getting started with dbt</a:t>
             </a:r>
-            <a:endParaRPr sz="1801"/>
+            <a:endParaRPr sz="1801" dirty="0"/>
           </a:p>
         </p:txBody>
       </p:sp>
@@ -49239,7 +49810,7 @@
         </p:spPr>
         <p:txBody>
           <a:bodyPr wrap="square" lIns="0" tIns="0" rIns="0" bIns="0" anchor="t">
-            <a:normAutofit/>
+            <a:normAutofit lnSpcReduction="10000"/>
           </a:bodyPr>
           <a:lstStyle/>
           <a:p>
@@ -49543,7 +50114,27 @@
                 <a:latin typeface="Frutiger"/>
                 <a:cs typeface="Frutiger"/>
               </a:rPr>
-              <a:t>DAG — the dependency graph ref() builds   ·   macro — a reusable Jinja snippet   ·   package — shared macros and tests (dbt_utils)   ·   artifacts — manifest.json and run_results.json in target/</a:t>
+              <a:t>DAG — the dependency graph ref() builds   ·   macro — a reusable Jinja snippet   ·   package — shared macros and tests (</a:t>
+            </a:r>
+            <a:r>
+              <a:rPr lang="en-US" sz="1600" dirty="0" err="1">
+                <a:solidFill>
+                  <a:srgbClr val="364750"/>
+                </a:solidFill>
+                <a:latin typeface="Frutiger"/>
+                <a:cs typeface="Frutiger"/>
+              </a:rPr>
+              <a:t>dbt_utils</a:t>
+            </a:r>
+            <a:r>
+              <a:rPr lang="en-US" sz="1600" dirty="0">
+                <a:solidFill>
+                  <a:srgbClr val="364750"/>
+                </a:solidFill>
+                <a:latin typeface="Frutiger"/>
+                <a:cs typeface="Frutiger"/>
+              </a:rPr>
+              <a:t>)   ·   artifacts — manifest.json and run_results.json in target/</a:t>
             </a:r>
           </a:p>
         </p:txBody>
@@ -49674,7 +50265,7 @@
               <a:buNone/>
             </a:pPr>
             <a:r>
-              <a:rPr sz="4651" b="1" spc="-69">
+              <a:rPr sz="4651" b="1" spc="-69" dirty="0">
                 <a:solidFill>
                   <a:srgbClr val="001F6B"/>
                 </a:solidFill>
@@ -49684,7 +50275,7 @@
               </a:rPr>
               <a:t>A folder of SQL and YAML — that’s the whole thing</a:t>
             </a:r>
-            <a:endParaRPr sz="4651"/>
+            <a:endParaRPr sz="4651" dirty="0"/>
           </a:p>
         </p:txBody>
       </p:sp>
@@ -49850,7 +50441,7 @@
               <a:buNone/>
             </a:pPr>
             <a:r>
-              <a:rPr sz="1801">
+              <a:rPr sz="1801" dirty="0">
                 <a:solidFill>
                   <a:srgbClr val="667780"/>
                 </a:solidFill>
@@ -49860,7 +50451,7 @@
               </a:rPr>
               <a:t>Getting started with dbt</a:t>
             </a:r>
-            <a:endParaRPr sz="1801"/>
+            <a:endParaRPr sz="1801" dirty="0"/>
           </a:p>
         </p:txBody>
       </p:sp>
@@ -49976,7 +50567,17 @@
                 <a:latin typeface="Consolas"/>
                 <a:cs typeface="Consolas"/>
               </a:rPr>
-              <a:t>├── dbt_project.yml</a:t>
+              <a:t>├── </a:t>
+            </a:r>
+            <a:r>
+              <a:rPr lang="en-US" sz="1700" dirty="0" err="1">
+                <a:solidFill>
+                  <a:srgbClr val="E8ECF5"/>
+                </a:solidFill>
+                <a:latin typeface="Consolas"/>
+                <a:cs typeface="Consolas"/>
+              </a:rPr>
+              <a:t>dbt_project.yml</a:t>
             </a:r>
             <a:r>
               <a:rPr lang="en-US" sz="1700" dirty="0">
@@ -50004,18 +50605,25 @@
                 <a:latin typeface="Consolas"/>
                 <a:cs typeface="Consolas"/>
               </a:rPr>
-              <a:t>├── packages.yml</a:t>
-            </a:r>
-            <a:r>
-              <a:rPr lang="en-US" sz="1700" dirty="0">
+              <a:t>├── packages.yml           # </a:t>
+            </a:r>
+            <a:r>
+              <a:rPr lang="en-US" sz="1700" dirty="0" err="1">
                 <a:solidFill>
                   <a:srgbClr val="E8ECF5"/>
                 </a:solidFill>
                 <a:latin typeface="Consolas"/>
                 <a:cs typeface="Consolas"/>
               </a:rPr>
-              <a:t>           # dbt_utils</a:t>
-            </a:r>
+              <a:t>dbt_utils</a:t>
+            </a:r>
+            <a:endParaRPr lang="en-US" sz="1700" dirty="0">
+              <a:solidFill>
+                <a:srgbClr val="E8ECF5"/>
+              </a:solidFill>
+              <a:latin typeface="Consolas"/>
+              <a:cs typeface="Consolas"/>
+            </a:endParaRPr>
           </a:p>
           <a:p>
             <a:pPr>
@@ -50078,17 +50686,7 @@
                 <a:latin typeface="Consolas"/>
                 <a:cs typeface="Consolas"/>
               </a:rPr>
-              <a:t>│   └── raw_*.csv</a:t>
-            </a:r>
-            <a:r>
-              <a:rPr lang="en-US" sz="1700" dirty="0">
-                <a:solidFill>
-                  <a:srgbClr val="E8ECF5"/>
-                </a:solidFill>
-                <a:latin typeface="Consolas"/>
-                <a:cs typeface="Consolas"/>
-              </a:rPr>
-              <a:t>          # six raw tables, loaded once</a:t>
+              <a:t>│   └── raw_*.csv          # six raw tables, loaded once</a:t>
             </a:r>
           </a:p>
           <a:p>
@@ -50142,17 +50740,7 @@
                 <a:latin typeface="Consolas"/>
                 <a:cs typeface="Consolas"/>
               </a:rPr>
-              <a:t>│   │   ├── __sources.yml</a:t>
-            </a:r>
-            <a:r>
-              <a:rPr lang="en-US" sz="1700" dirty="0">
-                <a:solidFill>
-                  <a:srgbClr val="FF8FA3"/>
-                </a:solidFill>
-                <a:latin typeface="Consolas"/>
-                <a:cs typeface="Consolas"/>
-              </a:rPr>
-              <a:t>  # the raw tables, declared</a:t>
+              <a:t>│   │   ├── __sources.yml  # the raw tables, declared</a:t>
             </a:r>
           </a:p>
           <a:p>
@@ -50188,17 +50776,7 @@
                 <a:latin typeface="Consolas"/>
                 <a:cs typeface="Consolas"/>
               </a:rPr>
-              <a:t>│   │   └── stg_orders.yml</a:t>
-            </a:r>
-            <a:r>
-              <a:rPr lang="en-US" sz="1700" dirty="0">
-                <a:solidFill>
-                  <a:srgbClr val="E8ECF5"/>
-                </a:solidFill>
-                <a:latin typeface="Consolas"/>
-                <a:cs typeface="Consolas"/>
-              </a:rPr>
-              <a:t> # docs + tests</a:t>
+              <a:t>│   │   └── stg_orders.yml # docs + tests</a:t>
             </a:r>
           </a:p>
           <a:p>
@@ -50270,17 +50848,7 @@
                 <a:latin typeface="Consolas"/>
                 <a:cs typeface="Consolas"/>
               </a:rPr>
-              <a:t>│       └── customers.yml</a:t>
-            </a:r>
-            <a:r>
-              <a:rPr lang="en-US" sz="1700" dirty="0">
-                <a:solidFill>
-                  <a:srgbClr val="FF8FA3"/>
-                </a:solidFill>
-                <a:latin typeface="Consolas"/>
-                <a:cs typeface="Consolas"/>
-              </a:rPr>
-              <a:t>  # docs + tests + unit tests</a:t>
+              <a:t>│       └── customers.yml  # docs + tests + unit tests</a:t>
             </a:r>
           </a:p>
           <a:p>
@@ -50409,7 +50977,7 @@
               <a:buNone/>
             </a:pPr>
             <a:r>
-              <a:rPr lang="en-US" sz="2000" b="1" dirty="0">
+              <a:rPr lang="en-US" sz="2000" b="1" dirty="0" err="1">
                 <a:solidFill>
                   <a:srgbClr val="001F6B"/>
                 </a:solidFill>
@@ -50418,6 +50986,13 @@
               </a:rPr>
               <a:t>dbt_project.yml</a:t>
             </a:r>
+            <a:endParaRPr lang="en-US" sz="2000" b="1" dirty="0">
+              <a:solidFill>
+                <a:srgbClr val="001F6B"/>
+              </a:solidFill>
+              <a:latin typeface="Consolas"/>
+              <a:cs typeface="Consolas"/>
+            </a:endParaRPr>
           </a:p>
           <a:p>
             <a:pPr>
@@ -51116,7 +51691,7 @@
               <a:buNone/>
             </a:pPr>
             <a:r>
-              <a:rPr sz="1801">
+              <a:rPr sz="1801" dirty="0">
                 <a:solidFill>
                   <a:srgbClr val="667780"/>
                 </a:solidFill>
@@ -51126,7 +51701,7 @@
               </a:rPr>
               <a:t>Getting started with dbt</a:t>
             </a:r>
-            <a:endParaRPr sz="1801"/>
+            <a:endParaRPr sz="1801" dirty="0"/>
           </a:p>
         </p:txBody>
       </p:sp>
@@ -51416,37 +51991,7 @@
                 <a:latin typeface="Consolas"/>
                 <a:cs typeface="Consolas"/>
               </a:rPr>
-              <a:t>    CAST</a:t>
-            </a:r>
-            <a:r>
-              <a:rPr lang="en-US" sz="1800" dirty="0">
-                <a:solidFill>
-                  <a:srgbClr val="E8ECF5"/>
-                </a:solidFill>
-                <a:latin typeface="Consolas"/>
-                <a:cs typeface="Consolas"/>
-              </a:rPr>
-              <a:t>(order_total / 100.0 </a:t>
-            </a:r>
-            <a:r>
-              <a:rPr lang="en-US" sz="1800" dirty="0">
-                <a:solidFill>
-                  <a:srgbClr val="E8ECF5"/>
-                </a:solidFill>
-                <a:latin typeface="Consolas"/>
-                <a:cs typeface="Consolas"/>
-              </a:rPr>
-              <a:t>AS</a:t>
-            </a:r>
-            <a:r>
-              <a:rPr lang="en-US" sz="1800" dirty="0">
-                <a:solidFill>
-                  <a:srgbClr val="E8ECF5"/>
-                </a:solidFill>
-                <a:latin typeface="Consolas"/>
-                <a:cs typeface="Consolas"/>
-              </a:rPr>
-              <a:t> numeric(16,2))</a:t>
+              <a:t>    CAST(order_total / 100.0 AS numeric(16,2))</a:t>
             </a:r>
           </a:p>
           <a:p>
@@ -51502,27 +52047,7 @@
                 <a:latin typeface="Consolas"/>
                 <a:cs typeface="Consolas"/>
               </a:rPr>
-              <a:t>(ordered_at </a:t>
-            </a:r>
-            <a:r>
-              <a:rPr lang="en-US" sz="1800" dirty="0">
-                <a:solidFill>
-                  <a:srgbClr val="E8ECF5"/>
-                </a:solidFill>
-                <a:latin typeface="Consolas"/>
-                <a:cs typeface="Consolas"/>
-              </a:rPr>
-              <a:t>AS</a:t>
-            </a:r>
-            <a:r>
-              <a:rPr lang="en-US" sz="1800" dirty="0">
-                <a:solidFill>
-                  <a:srgbClr val="E8ECF5"/>
-                </a:solidFill>
-                <a:latin typeface="Consolas"/>
-                <a:cs typeface="Consolas"/>
-              </a:rPr>
-              <a:t> date) AS ordered_at</a:t>
+              <a:t>(ordered_at AS date) AS ordered_at</a:t>
             </a:r>
           </a:p>
           <a:p>
@@ -51752,7 +52277,27 @@
                 <a:latin typeface="Consolas"/>
                 <a:cs typeface="Consolas"/>
               </a:rPr>
-              <a:t>    {{ dbt.date_trunc('day', 'ordered_at') }} as ordered_at</a:t>
+              <a:t>    {{ </a:t>
+            </a:r>
+            <a:r>
+              <a:rPr lang="en-US" sz="1800" dirty="0" err="1">
+                <a:solidFill>
+                  <a:srgbClr val="8EC5FF"/>
+                </a:solidFill>
+                <a:latin typeface="Consolas"/>
+                <a:cs typeface="Consolas"/>
+              </a:rPr>
+              <a:t>dbt.date_trunc</a:t>
+            </a:r>
+            <a:r>
+              <a:rPr lang="en-US" sz="1800" dirty="0">
+                <a:solidFill>
+                  <a:srgbClr val="8EC5FF"/>
+                </a:solidFill>
+                <a:latin typeface="Consolas"/>
+                <a:cs typeface="Consolas"/>
+              </a:rPr>
+              <a:t>('day', 'ordered_at') }} as ordered_at</a:t>
             </a:r>
           </a:p>
           <a:p>
@@ -52045,7 +52590,7 @@
         </p:spPr>
         <p:txBody>
           <a:bodyPr wrap="square" lIns="0" tIns="0" rIns="0" bIns="0" anchor="t">
-            <a:normAutofit/>
+            <a:normAutofit lnSpcReduction="10000"/>
           </a:bodyPr>
           <a:lstStyle/>
           <a:p>

--- a/sql-as-software-getting-started-with-dbt.pptx
+++ b/sql-as-software-getting-started-with-dbt.pptx
@@ -14795,57 +14795,6 @@
       </p:grpSpPr>
       <p:sp>
         <p:nvSpPr>
-          <p:cNvPr id="2" name="Text 0">
-            <a:extLst>
-              <a:ext uri="{FF2B5EF4-FFF2-40B4-BE49-F238E27FC236}">
-                <a16:creationId xmlns:a16="http://schemas.microsoft.com/office/drawing/2014/main" id="{53AA81A4-4B55-4071-8D0D-8E66DAC85BE0}"/>
-              </a:ext>
-            </a:extLst>
-          </p:cNvPr>
-          <p:cNvSpPr>
-            <a:spLocks noGrp="1"/>
-          </p:cNvSpPr>
-          <p:nvPr/>
-        </p:nvSpPr>
-        <p:spPr>
-          <a:xfrm>
-            <a:off x="838201" y="495302"/>
-            <a:ext cx="15240000" cy="392311"/>
-          </a:xfrm>
-          <a:prstGeom prst="rect">
-            <a:avLst/>
-          </a:prstGeom>
-          <a:noFill/>
-        </p:spPr>
-        <p:txBody>
-          <a:bodyPr wrap="square" lIns="25401" tIns="25401" rIns="25401" bIns="25401" anchor="t">
-            <a:normAutofit/>
-          </a:bodyPr>
-          <a:lstStyle/>
-          <a:p>
-            <a:pPr>
-              <a:lnSpc>
-                <a:spcPct val="120000"/>
-              </a:lnSpc>
-              <a:buNone/>
-            </a:pPr>
-            <a:r>
-              <a:rPr sz="1801" b="1" spc="361">
-                <a:solidFill>
-                  <a:srgbClr val="E40046"/>
-                </a:solidFill>
-                <a:latin typeface="Frutiger"/>
-                <a:ea typeface="Frutiger"/>
-                <a:cs typeface="Frutiger"/>
-              </a:rPr>
-              <a:t>ANATOMY OF A PROJECT</a:t>
-            </a:r>
-            <a:endParaRPr sz="1801"/>
-          </a:p>
-        </p:txBody>
-      </p:sp>
-      <p:sp>
-        <p:nvSpPr>
           <p:cNvPr id="3" name="Text 1">
             <a:extLst>
               <a:ext uri="{FF2B5EF4-FFF2-40B4-BE49-F238E27FC236}">
@@ -14881,7 +14830,7 @@
               <a:buNone/>
             </a:pPr>
             <a:r>
-              <a:rPr sz="4651" b="1" spc="-69" dirty="0">
+              <a:rPr lang="en-US" sz="4651" b="1" spc="-69" dirty="0">
                 <a:solidFill>
                   <a:srgbClr val="001F6B"/>
                 </a:solidFill>
@@ -14889,7 +14838,7 @@
                 <a:ea typeface="Frutiger"/>
                 <a:cs typeface="Frutiger"/>
               </a:rPr>
-              <a:t>A folder of SQL and YAML — that’s the whole thing</a:t>
+              <a:t>Anatomy of a dbt project</a:t>
             </a:r>
             <a:endParaRPr sz="4651" dirty="0"/>
           </a:p>
@@ -16045,57 +15994,6 @@
       </p:grpSpPr>
       <p:sp>
         <p:nvSpPr>
-          <p:cNvPr id="2" name="Text 0">
-            <a:extLst>
-              <a:ext uri="{FF2B5EF4-FFF2-40B4-BE49-F238E27FC236}">
-                <a16:creationId xmlns:a16="http://schemas.microsoft.com/office/drawing/2014/main" id="{78DD8E74-1DB1-4509-B6B8-8F85DE69EC33}"/>
-              </a:ext>
-            </a:extLst>
-          </p:cNvPr>
-          <p:cNvSpPr>
-            <a:spLocks noGrp="1"/>
-          </p:cNvSpPr>
-          <p:nvPr/>
-        </p:nvSpPr>
-        <p:spPr>
-          <a:xfrm>
-            <a:off x="838201" y="495302"/>
-            <a:ext cx="15240000" cy="392311"/>
-          </a:xfrm>
-          <a:prstGeom prst="rect">
-            <a:avLst/>
-          </a:prstGeom>
-          <a:noFill/>
-        </p:spPr>
-        <p:txBody>
-          <a:bodyPr wrap="square" lIns="25401" tIns="25401" rIns="25401" bIns="25401" anchor="t">
-            <a:normAutofit/>
-          </a:bodyPr>
-          <a:lstStyle/>
-          <a:p>
-            <a:pPr>
-              <a:lnSpc>
-                <a:spcPct val="120000"/>
-              </a:lnSpc>
-              <a:buNone/>
-            </a:pPr>
-            <a:r>
-              <a:rPr sz="1801" b="1" spc="361">
-                <a:solidFill>
-                  <a:srgbClr val="E40046"/>
-                </a:solidFill>
-                <a:latin typeface="Frutiger"/>
-                <a:ea typeface="Frutiger"/>
-                <a:cs typeface="Frutiger"/>
-              </a:rPr>
-              <a:t>MODELS</a:t>
-            </a:r>
-            <a:endParaRPr sz="1801"/>
-          </a:p>
-        </p:txBody>
-      </p:sp>
-      <p:sp>
-        <p:nvSpPr>
           <p:cNvPr id="3" name="Text 1">
             <a:extLst>
               <a:ext uri="{FF2B5EF4-FFF2-40B4-BE49-F238E27FC236}">
@@ -16131,7 +16029,7 @@
               <a:buNone/>
             </a:pPr>
             <a:r>
-              <a:rPr sz="4651" b="1" spc="-69">
+              <a:rPr sz="4651" b="1" spc="-69" dirty="0">
                 <a:solidFill>
                   <a:srgbClr val="001F6B"/>
                 </a:solidFill>
@@ -16139,9 +16037,20 @@
                 <a:ea typeface="Frutiger"/>
                 <a:cs typeface="Frutiger"/>
               </a:rPr>
-              <a:t>A model is just a SELECT</a:t>
-            </a:r>
-            <a:endParaRPr sz="4651"/>
+              <a:t>A model is a SELECT</a:t>
+            </a:r>
+            <a:r>
+              <a:rPr lang="en-US" sz="4651" b="1" spc="-69" dirty="0">
+                <a:solidFill>
+                  <a:srgbClr val="001F6B"/>
+                </a:solidFill>
+                <a:latin typeface="Frutiger"/>
+                <a:ea typeface="Frutiger"/>
+                <a:cs typeface="Frutiger"/>
+              </a:rPr>
+              <a:t> statement</a:t>
+            </a:r>
+            <a:endParaRPr sz="4651" dirty="0"/>
           </a:p>
         </p:txBody>
       </p:sp>
@@ -18643,47 +18552,6 @@
       </p:graphicFrame>
       <p:sp>
         <p:nvSpPr>
-          <p:cNvPr id="110" name="Shape 110"/>
-          <p:cNvSpPr/>
-          <p:nvPr/>
-        </p:nvSpPr>
-        <p:spPr>
-          <a:xfrm>
-            <a:off x="12700000" y="2362200"/>
-            <a:ext cx="4749800" cy="355600"/>
-          </a:xfrm>
-          <a:prstGeom prst="rect">
-            <a:avLst/>
-          </a:prstGeom>
-          <a:noFill/>
-          <a:ln>
-            <a:noFill/>
-          </a:ln>
-        </p:spPr>
-        <p:txBody>
-          <a:bodyPr wrap="square" lIns="0" tIns="0" rIns="0" bIns="0" anchor="t">
-            <a:normAutofit/>
-          </a:bodyPr>
-          <a:lstStyle/>
-          <a:p>
-            <a:pPr>
-              <a:buNone/>
-            </a:pPr>
-            <a:r>
-              <a:rPr lang="en-US" sz="1400" b="1" spc="150" dirty="0">
-                <a:solidFill>
-                  <a:srgbClr val="E40046"/>
-                </a:solidFill>
-                <a:latin typeface="Frutiger"/>
-                <a:cs typeface="Frutiger"/>
-              </a:rPr>
-              <a:t>SET IT ONCE, PER FOLDER</a:t>
-            </a:r>
-          </a:p>
-        </p:txBody>
-      </p:sp>
-      <p:sp>
-        <p:nvSpPr>
           <p:cNvPr id="111" name="Code 111"/>
           <p:cNvSpPr/>
           <p:nvPr/>
@@ -18911,7 +18779,7 @@
                 <a:latin typeface="Frutiger"/>
                 <a:cs typeface="Frutiger"/>
               </a:rPr>
-              <a:t>…OR OVERRIDE IN ONE MODEL</a:t>
+              <a:t>MODELS CAN OVERRIDE THE DEFAULT</a:t>
             </a:r>
           </a:p>
         </p:txBody>
@@ -19111,7 +18979,7 @@
                 <a:latin typeface="Frutiger"/>
                 <a:cs typeface="Frutiger"/>
               </a:rPr>
-              <a:t>materialized_view and friends are adapter-specific — check before you promise them.</a:t>
+              <a:t>Some materializations are adapter-specific. See what your chosen adapter supports.</a:t>
             </a:r>
           </a:p>
         </p:txBody>
@@ -21483,7 +21351,7 @@
                 <a:latin typeface="Frutiger"/>
                 <a:cs typeface="Frutiger"/>
               </a:rPr>
-              <a:t>MODELS/MARTS/CUSTOMERS.YML  ·  THE FILE THAT SITS NEXT TO CUSTOMERS.SQL</a:t>
+              <a:t>MODELS/MARTS/CUSTOMERS.YML</a:t>
             </a:r>
           </a:p>
         </p:txBody>
@@ -22517,57 +22385,6 @@
       </p:grpSpPr>
       <p:sp>
         <p:nvSpPr>
-          <p:cNvPr id="2" name="Text 0">
-            <a:extLst>
-              <a:ext uri="{FF2B5EF4-FFF2-40B4-BE49-F238E27FC236}">
-                <a16:creationId xmlns:a16="http://schemas.microsoft.com/office/drawing/2014/main" id="{78DD8E74-1DB1-4509-B6B8-8F85DE69EC33}"/>
-              </a:ext>
-            </a:extLst>
-          </p:cNvPr>
-          <p:cNvSpPr>
-            <a:spLocks noGrp="1"/>
-          </p:cNvSpPr>
-          <p:nvPr/>
-        </p:nvSpPr>
-        <p:spPr>
-          <a:xfrm>
-            <a:off x="838201" y="495302"/>
-            <a:ext cx="15240000" cy="392311"/>
-          </a:xfrm>
-          <a:prstGeom prst="rect">
-            <a:avLst/>
-          </a:prstGeom>
-          <a:noFill/>
-        </p:spPr>
-        <p:txBody>
-          <a:bodyPr wrap="square" lIns="25401" tIns="25401" rIns="25401" bIns="25401" anchor="t">
-            <a:normAutofit/>
-          </a:bodyPr>
-          <a:lstStyle/>
-          <a:p>
-            <a:pPr>
-              <a:lnSpc>
-                <a:spcPct val="120000"/>
-              </a:lnSpc>
-              <a:buNone/>
-            </a:pPr>
-            <a:r>
-              <a:rPr sz="1801" b="1" spc="361">
-                <a:solidFill>
-                  <a:srgbClr val="E40046"/>
-                </a:solidFill>
-                <a:latin typeface="Frutiger"/>
-                <a:ea typeface="Frutiger"/>
-                <a:cs typeface="Frutiger"/>
-              </a:rPr>
-              <a:t>TESTS</a:t>
-            </a:r>
-            <a:endParaRPr sz="1801"/>
-          </a:p>
-        </p:txBody>
-      </p:sp>
-      <p:sp>
-        <p:nvSpPr>
           <p:cNvPr id="3" name="Text 1">
             <a:extLst>
               <a:ext uri="{FF2B5EF4-FFF2-40B4-BE49-F238E27FC236}">
@@ -22603,7 +22420,7 @@
               <a:buNone/>
             </a:pPr>
             <a:r>
-              <a:rPr sz="4651" b="1" spc="-69" dirty="0">
+              <a:rPr lang="en-US" sz="4651" b="1" spc="-69" dirty="0">
                 <a:solidFill>
                   <a:srgbClr val="001F6B"/>
                 </a:solidFill>
@@ -22611,7 +22428,7 @@
                 <a:ea typeface="Frutiger"/>
                 <a:cs typeface="Frutiger"/>
               </a:rPr>
-              <a:t>State the rules next to the code</a:t>
+              <a:t>Tests</a:t>
             </a:r>
             <a:endParaRPr sz="4651" dirty="0"/>
           </a:p>
@@ -24101,7 +23918,7 @@
         </p:spPr>
         <p:txBody>
           <a:bodyPr wrap="square" lIns="0" tIns="0" rIns="0" bIns="0" anchor="t">
-            <a:normAutofit fontScale="92500"/>
+            <a:normAutofit/>
           </a:bodyPr>
           <a:lstStyle/>
           <a:p>
@@ -24160,7 +23977,27 @@
                 <a:latin typeface="Frutiger"/>
                 <a:cs typeface="Frutiger"/>
               </a:rPr>
-              <a:t>  check the model’s logic against rows you supply — e.g. “an order with one jaffle and one drink is both a food and a drink order”. Three ship with this project; confirm adapter support first.</a:t>
+              <a:t>  check the model’s logic against rows you </a:t>
+            </a:r>
+            <a:r>
+              <a:rPr lang="en-US" dirty="0">
+                <a:solidFill>
+                  <a:srgbClr val="364750"/>
+                </a:solidFill>
+                <a:latin typeface="Frutiger"/>
+                <a:cs typeface="Frutiger"/>
+              </a:rPr>
+              <a:t>provide</a:t>
+            </a:r>
+            <a:r>
+              <a:rPr lang="en-US" sz="1800" dirty="0">
+                <a:solidFill>
+                  <a:srgbClr val="364750"/>
+                </a:solidFill>
+                <a:latin typeface="Frutiger"/>
+                <a:cs typeface="Frutiger"/>
+              </a:rPr>
+              <a:t> e.g. “an order with one jaffle and one drink is both a food and a drink order”. Confirm adapter support first.</a:t>
             </a:r>
           </a:p>
           <a:p>
@@ -24191,7 +24028,7 @@
                 <a:latin typeface="Frutiger"/>
                 <a:cs typeface="Frutiger"/>
               </a:rPr>
-              <a:t>  are one-off SELECTs in data-tests/ — great for business reconciliations.</a:t>
+              <a:t>  are one-off SELECTs in data-tests/      Great for reconciliations!</a:t>
             </a:r>
           </a:p>
         </p:txBody>
@@ -24570,47 +24407,6 @@
           </a:prstGeom>
         </p:spPr>
       </p:pic>
-      <p:sp>
-        <p:nvSpPr>
-          <p:cNvPr id="100" name="Shape 100"/>
-          <p:cNvSpPr/>
-          <p:nvPr/>
-        </p:nvSpPr>
-        <p:spPr>
-          <a:xfrm>
-            <a:off x="838200" y="660400"/>
-            <a:ext cx="7620000" cy="355600"/>
-          </a:xfrm>
-          <a:prstGeom prst="rect">
-            <a:avLst/>
-          </a:prstGeom>
-          <a:noFill/>
-          <a:ln>
-            <a:noFill/>
-          </a:ln>
-        </p:spPr>
-        <p:txBody>
-          <a:bodyPr wrap="square" lIns="0" tIns="0" rIns="0" bIns="0" anchor="t">
-            <a:normAutofit/>
-          </a:bodyPr>
-          <a:lstStyle/>
-          <a:p>
-            <a:pPr>
-              <a:buNone/>
-            </a:pPr>
-            <a:r>
-              <a:rPr lang="en-US" sz="1500" b="1" spc="200" dirty="0">
-                <a:solidFill>
-                  <a:srgbClr val="E40046"/>
-                </a:solidFill>
-                <a:latin typeface="Frutiger"/>
-                <a:cs typeface="Frutiger"/>
-              </a:rPr>
-              <a:t>WHAT YOU’LL SEE  ·  ~9 MINUTES</a:t>
-            </a:r>
-          </a:p>
-        </p:txBody>
-      </p:sp>
       <p:sp>
         <p:nvSpPr>
           <p:cNvPr id="110" name="Shape 110"/>
@@ -26005,47 +25801,6 @@
       </p:pic>
       <p:sp>
         <p:nvSpPr>
-          <p:cNvPr id="100" name="Shape 100"/>
-          <p:cNvSpPr/>
-          <p:nvPr/>
-        </p:nvSpPr>
-        <p:spPr>
-          <a:xfrm>
-            <a:off x="838200" y="660400"/>
-            <a:ext cx="7620000" cy="355600"/>
-          </a:xfrm>
-          <a:prstGeom prst="rect">
-            <a:avLst/>
-          </a:prstGeom>
-          <a:noFill/>
-          <a:ln>
-            <a:noFill/>
-          </a:ln>
-        </p:spPr>
-        <p:txBody>
-          <a:bodyPr wrap="square" lIns="0" tIns="0" rIns="0" bIns="0" anchor="t">
-            <a:normAutofit/>
-          </a:bodyPr>
-          <a:lstStyle/>
-          <a:p>
-            <a:pPr>
-              <a:buNone/>
-            </a:pPr>
-            <a:r>
-              <a:rPr lang="en-US" sz="1500" b="1" spc="200" dirty="0">
-                <a:solidFill>
-                  <a:srgbClr val="E40046"/>
-                </a:solidFill>
-                <a:latin typeface="Frutiger"/>
-                <a:cs typeface="Frutiger"/>
-              </a:rPr>
-              <a:t>WHAT YOU’LL SEE  ·  ~9 MINUTES</a:t>
-            </a:r>
-          </a:p>
-        </p:txBody>
-      </p:sp>
-      <p:sp>
-        <p:nvSpPr>
           <p:cNvPr id="110" name="Shape 110"/>
           <p:cNvSpPr/>
           <p:nvPr/>
@@ -27052,7 +26807,7 @@
                 <a:latin typeface="Frutiger"/>
                 <a:cs typeface="Frutiger"/>
               </a:rPr>
-              <a:t>A green build proves</a:t>
+              <a:t>A green build </a:t>
             </a:r>
           </a:p>
         </p:txBody>
